--- a/midterm_report/texas_holdem_midterm_report.pptx
+++ b/midterm_report/texas_holdem_midterm_report.pptx
@@ -1,33 +1,128 @@
 
 <file path=ppt/presentation.xml><?xml version="1.0" encoding="utf-8"?>
-<p:presentation xmlns:p="http://schemas.openxmlformats.org/presentationml/2006/main">
+<p:presentation xmlns:a="http://schemas.openxmlformats.org/drawingml/2006/main" xmlns:r="http://schemas.openxmlformats.org/officeDocument/2006/relationships" xmlns:p="http://schemas.openxmlformats.org/presentationml/2006/main">
   <p:sldMasterIdLst>
-    <p:sldMasterId xmlns:r="http://schemas.openxmlformats.org/officeDocument/2006/relationships" id="2147483648" r:id="Rf97517b348ef4393"/>
+    <p:sldMasterId id="2147483648" r:id="rId1"/>
   </p:sldMasterIdLst>
   <p:notesMasterIdLst>
-    <p:notesMasterId xmlns:r="http://schemas.openxmlformats.org/officeDocument/2006/relationships" r:id="Rd80ffc8025f4495b"/>
+    <p:notesMasterId r:id="rId10"/>
   </p:notesMasterIdLst>
   <p:sldIdLst>
-    <p:sldId xmlns:r="http://schemas.openxmlformats.org/officeDocument/2006/relationships" id="256" r:id="Racd00c78374c4e0c"/>
-    <p:sldId xmlns:r="http://schemas.openxmlformats.org/officeDocument/2006/relationships" id="257" r:id="R166bfd03659f4b99"/>
-    <p:sldId xmlns:r="http://schemas.openxmlformats.org/officeDocument/2006/relationships" id="258" r:id="Rd45d65b810894089"/>
-    <p:sldId xmlns:r="http://schemas.openxmlformats.org/officeDocument/2006/relationships" id="259" r:id="R1f538ae074304e3e"/>
-    <p:sldId xmlns:r="http://schemas.openxmlformats.org/officeDocument/2006/relationships" id="260" r:id="Raa3f7fb8b10840bd"/>
-    <p:sldId xmlns:r="http://schemas.openxmlformats.org/officeDocument/2006/relationships" id="261" r:id="Re1474d221a9b416a"/>
-    <p:sldId xmlns:r="http://schemas.openxmlformats.org/officeDocument/2006/relationships" id="262" r:id="Rbf61dc41b6d641e1"/>
-    <p:sldId xmlns:r="http://schemas.openxmlformats.org/officeDocument/2006/relationships" id="263" r:id="R81a54d502fc3465c"/>
+    <p:sldId id="256" r:id="rId2"/>
+    <p:sldId id="257" r:id="rId3"/>
+    <p:sldId id="258" r:id="rId4"/>
+    <p:sldId id="259" r:id="rId5"/>
+    <p:sldId id="260" r:id="rId6"/>
+    <p:sldId id="261" r:id="rId7"/>
+    <p:sldId id="262" r:id="rId8"/>
+    <p:sldId id="263" r:id="rId9"/>
   </p:sldIdLst>
   <p:sldSz cx="12192000" cy="6858000"/>
   <p:notesSz cx="6858000" cy="9144000"/>
+  <p:defaultTextStyle>
+    <a:defPPr>
+      <a:defRPr lang="zh-CN"/>
+    </a:defPPr>
+    <a:lvl1pPr marL="0" algn="l" defTabSz="914400" rtl="0" eaLnBrk="1" latinLnBrk="0" hangingPunct="1">
+      <a:defRPr sz="1800" kern="1200">
+        <a:solidFill>
+          <a:schemeClr val="tx1"/>
+        </a:solidFill>
+        <a:latin typeface="+mn-lt"/>
+        <a:ea typeface="+mn-ea"/>
+        <a:cs typeface="+mn-cs"/>
+      </a:defRPr>
+    </a:lvl1pPr>
+    <a:lvl2pPr marL="457200" algn="l" defTabSz="914400" rtl="0" eaLnBrk="1" latinLnBrk="0" hangingPunct="1">
+      <a:defRPr sz="1800" kern="1200">
+        <a:solidFill>
+          <a:schemeClr val="tx1"/>
+        </a:solidFill>
+        <a:latin typeface="+mn-lt"/>
+        <a:ea typeface="+mn-ea"/>
+        <a:cs typeface="+mn-cs"/>
+      </a:defRPr>
+    </a:lvl2pPr>
+    <a:lvl3pPr marL="914400" algn="l" defTabSz="914400" rtl="0" eaLnBrk="1" latinLnBrk="0" hangingPunct="1">
+      <a:defRPr sz="1800" kern="1200">
+        <a:solidFill>
+          <a:schemeClr val="tx1"/>
+        </a:solidFill>
+        <a:latin typeface="+mn-lt"/>
+        <a:ea typeface="+mn-ea"/>
+        <a:cs typeface="+mn-cs"/>
+      </a:defRPr>
+    </a:lvl3pPr>
+    <a:lvl4pPr marL="1371600" algn="l" defTabSz="914400" rtl="0" eaLnBrk="1" latinLnBrk="0" hangingPunct="1">
+      <a:defRPr sz="1800" kern="1200">
+        <a:solidFill>
+          <a:schemeClr val="tx1"/>
+        </a:solidFill>
+        <a:latin typeface="+mn-lt"/>
+        <a:ea typeface="+mn-ea"/>
+        <a:cs typeface="+mn-cs"/>
+      </a:defRPr>
+    </a:lvl4pPr>
+    <a:lvl5pPr marL="1828800" algn="l" defTabSz="914400" rtl="0" eaLnBrk="1" latinLnBrk="0" hangingPunct="1">
+      <a:defRPr sz="1800" kern="1200">
+        <a:solidFill>
+          <a:schemeClr val="tx1"/>
+        </a:solidFill>
+        <a:latin typeface="+mn-lt"/>
+        <a:ea typeface="+mn-ea"/>
+        <a:cs typeface="+mn-cs"/>
+      </a:defRPr>
+    </a:lvl5pPr>
+    <a:lvl6pPr marL="2286000" algn="l" defTabSz="914400" rtl="0" eaLnBrk="1" latinLnBrk="0" hangingPunct="1">
+      <a:defRPr sz="1800" kern="1200">
+        <a:solidFill>
+          <a:schemeClr val="tx1"/>
+        </a:solidFill>
+        <a:latin typeface="+mn-lt"/>
+        <a:ea typeface="+mn-ea"/>
+        <a:cs typeface="+mn-cs"/>
+      </a:defRPr>
+    </a:lvl6pPr>
+    <a:lvl7pPr marL="2743200" algn="l" defTabSz="914400" rtl="0" eaLnBrk="1" latinLnBrk="0" hangingPunct="1">
+      <a:defRPr sz="1800" kern="1200">
+        <a:solidFill>
+          <a:schemeClr val="tx1"/>
+        </a:solidFill>
+        <a:latin typeface="+mn-lt"/>
+        <a:ea typeface="+mn-ea"/>
+        <a:cs typeface="+mn-cs"/>
+      </a:defRPr>
+    </a:lvl7pPr>
+    <a:lvl8pPr marL="3200400" algn="l" defTabSz="914400" rtl="0" eaLnBrk="1" latinLnBrk="0" hangingPunct="1">
+      <a:defRPr sz="1800" kern="1200">
+        <a:solidFill>
+          <a:schemeClr val="tx1"/>
+        </a:solidFill>
+        <a:latin typeface="+mn-lt"/>
+        <a:ea typeface="+mn-ea"/>
+        <a:cs typeface="+mn-cs"/>
+      </a:defRPr>
+    </a:lvl8pPr>
+    <a:lvl9pPr marL="3657600" algn="l" defTabSz="914400" rtl="0" eaLnBrk="1" latinLnBrk="0" hangingPunct="1">
+      <a:defRPr sz="1800" kern="1200">
+        <a:solidFill>
+          <a:schemeClr val="tx1"/>
+        </a:solidFill>
+        <a:latin typeface="+mn-lt"/>
+        <a:ea typeface="+mn-ea"/>
+        <a:cs typeface="+mn-cs"/>
+      </a:defRPr>
+    </a:lvl9pPr>
+  </p:defaultTextStyle>
 </p:presentation>
 </file>
 
 <file path=ppt/notesMasters/notesMaster1.xml><?xml version="1.0" encoding="utf-8"?>
-<p:notesMaster xmlns:p="http://schemas.openxmlformats.org/presentationml/2006/main">
+<p:notesMaster xmlns:a="http://schemas.openxmlformats.org/drawingml/2006/main" xmlns:r="http://schemas.openxmlformats.org/officeDocument/2006/relationships" xmlns:p="http://schemas.openxmlformats.org/presentationml/2006/main">
   <p:cSld>
     <p:bg>
       <p:bgRef idx="1001">
-        <a:schemeClr xmlns:a="http://schemas.openxmlformats.org/drawingml/2006/main" val="bg1"/>
+        <a:schemeClr val="bg1"/>
       </p:bgRef>
     </p:bg>
     <p:spTree>
@@ -37,380 +132,164 @@
         <p:nvPr/>
       </p:nvGrpSpPr>
       <p:grpSpPr>
-        <a:xfrm xmlns:a="http://schemas.openxmlformats.org/drawingml/2006/main"/>
+        <a:xfrm>
+          <a:off x="0" y="0"/>
+          <a:ext cx="0" cy="0"/>
+          <a:chOff x="0" y="0"/>
+          <a:chExt cx="0" cy="0"/>
+        </a:xfrm>
       </p:grpSpPr>
       <p:sp>
         <p:nvSpPr>
           <p:cNvPr id="2" name="Header Placeholder"/>
-          <p:cNvSpPr/>
+          <p:cNvSpPr>
+            <a:spLocks noGrp="1"/>
+          </p:cNvSpPr>
           <p:nvPr>
             <p:ph type="hdr" sz="quarter"/>
           </p:nvPr>
         </p:nvSpPr>
         <p:spPr>
-          <a:prstGeom xmlns:a="http://schemas.openxmlformats.org/drawingml/2006/main" prst="rect">
-            <a:avLst/>
-          </a:prstGeom>
-        </p:spPr>
-        <p:txBody>
-          <a:bodyPr xmlns:a="http://schemas.openxmlformats.org/drawingml/2006/main"/>
-          <a:lstStyle xmlns:a="http://schemas.openxmlformats.org/drawingml/2006/main"/>
-          <a:p xmlns:a="http://schemas.openxmlformats.org/drawingml/2006/main"/>
+          <a:prstGeom prst="rect">
+            <a:avLst/>
+          </a:prstGeom>
+        </p:spPr>
+        <p:txBody>
+          <a:bodyPr/>
+          <a:lstStyle/>
+          <a:p>
+            <a:endParaRPr/>
+          </a:p>
         </p:txBody>
       </p:sp>
       <p:sp>
         <p:nvSpPr>
           <p:cNvPr id="3" name="Date Placeholder"/>
-          <p:cNvSpPr/>
+          <p:cNvSpPr>
+            <a:spLocks noGrp="1"/>
+          </p:cNvSpPr>
           <p:nvPr>
             <p:ph type="dt" sz="quarter" idx="1"/>
           </p:nvPr>
         </p:nvSpPr>
         <p:spPr>
-          <a:prstGeom xmlns:a="http://schemas.openxmlformats.org/drawingml/2006/main" prst="rect">
-            <a:avLst/>
-          </a:prstGeom>
-        </p:spPr>
-        <p:txBody>
-          <a:bodyPr xmlns:a="http://schemas.openxmlformats.org/drawingml/2006/main"/>
-          <a:lstStyle xmlns:a="http://schemas.openxmlformats.org/drawingml/2006/main"/>
-          <a:p xmlns:a="http://schemas.openxmlformats.org/drawingml/2006/main"/>
+          <a:prstGeom prst="rect">
+            <a:avLst/>
+          </a:prstGeom>
+        </p:spPr>
+        <p:txBody>
+          <a:bodyPr/>
+          <a:lstStyle/>
+          <a:p>
+            <a:endParaRPr/>
+          </a:p>
         </p:txBody>
       </p:sp>
       <p:sp>
         <p:nvSpPr>
           <p:cNvPr id="4" name="Slide Image Placeholder"/>
-          <p:cNvSpPr/>
+          <p:cNvSpPr>
+            <a:spLocks noGrp="1" noRot="1" noChangeAspect="1"/>
+          </p:cNvSpPr>
           <p:nvPr>
             <p:ph type="sldImg" idx="2"/>
           </p:nvPr>
         </p:nvSpPr>
         <p:spPr>
-          <a:prstGeom xmlns:a="http://schemas.openxmlformats.org/drawingml/2006/main" prst="rect">
-            <a:avLst/>
-          </a:prstGeom>
-        </p:spPr>
-        <p:txBody>
-          <a:bodyPr xmlns:a="http://schemas.openxmlformats.org/drawingml/2006/main"/>
-          <a:lstStyle xmlns:a="http://schemas.openxmlformats.org/drawingml/2006/main"/>
-          <a:p xmlns:a="http://schemas.openxmlformats.org/drawingml/2006/main"/>
+          <a:prstGeom prst="rect">
+            <a:avLst/>
+          </a:prstGeom>
+        </p:spPr>
+        <p:txBody>
+          <a:bodyPr/>
+          <a:lstStyle/>
+          <a:p>
+            <a:endParaRPr/>
+          </a:p>
         </p:txBody>
       </p:sp>
       <p:sp>
         <p:nvSpPr>
           <p:cNvPr id="5" name="Notes Placeholder"/>
-          <p:cNvSpPr/>
+          <p:cNvSpPr>
+            <a:spLocks noGrp="1"/>
+          </p:cNvSpPr>
           <p:nvPr>
             <p:ph type="body" sz="quarter" idx="3"/>
           </p:nvPr>
         </p:nvSpPr>
         <p:spPr>
-          <a:prstGeom xmlns:a="http://schemas.openxmlformats.org/drawingml/2006/main" prst="rect">
-            <a:avLst/>
-          </a:prstGeom>
-        </p:spPr>
-        <p:txBody>
-          <a:bodyPr xmlns:a="http://schemas.openxmlformats.org/drawingml/2006/main"/>
-          <a:lstStyle xmlns:a="http://schemas.openxmlformats.org/drawingml/2006/main"/>
-          <a:p xmlns:a="http://schemas.openxmlformats.org/drawingml/2006/main"/>
+          <a:prstGeom prst="rect">
+            <a:avLst/>
+          </a:prstGeom>
+        </p:spPr>
+        <p:txBody>
+          <a:bodyPr/>
+          <a:lstStyle/>
+          <a:p>
+            <a:endParaRPr/>
+          </a:p>
         </p:txBody>
       </p:sp>
       <p:sp>
         <p:nvSpPr>
           <p:cNvPr id="6" name="Footer Placeholder"/>
-          <p:cNvSpPr/>
+          <p:cNvSpPr>
+            <a:spLocks noGrp="1"/>
+          </p:cNvSpPr>
           <p:nvPr>
             <p:ph type="ftr" sz="quarter" idx="4"/>
           </p:nvPr>
         </p:nvSpPr>
         <p:spPr>
-          <a:prstGeom xmlns:a="http://schemas.openxmlformats.org/drawingml/2006/main" prst="rect">
-            <a:avLst/>
-          </a:prstGeom>
-        </p:spPr>
-        <p:txBody>
-          <a:bodyPr xmlns:a="http://schemas.openxmlformats.org/drawingml/2006/main"/>
-          <a:lstStyle xmlns:a="http://schemas.openxmlformats.org/drawingml/2006/main"/>
-          <a:p xmlns:a="http://schemas.openxmlformats.org/drawingml/2006/main"/>
+          <a:prstGeom prst="rect">
+            <a:avLst/>
+          </a:prstGeom>
+        </p:spPr>
+        <p:txBody>
+          <a:bodyPr/>
+          <a:lstStyle/>
+          <a:p>
+            <a:endParaRPr/>
+          </a:p>
         </p:txBody>
       </p:sp>
       <p:sp>
         <p:nvSpPr>
           <p:cNvPr id="7" name="Slide Number Placeholder"/>
-          <p:cNvSpPr/>
+          <p:cNvSpPr>
+            <a:spLocks noGrp="1"/>
+          </p:cNvSpPr>
           <p:nvPr>
             <p:ph type="sldNum" sz="quarter" idx="5"/>
           </p:nvPr>
         </p:nvSpPr>
         <p:spPr>
-          <a:prstGeom xmlns:a="http://schemas.openxmlformats.org/drawingml/2006/main" prst="rect">
-            <a:avLst/>
-          </a:prstGeom>
-        </p:spPr>
-        <p:txBody>
-          <a:bodyPr xmlns:a="http://schemas.openxmlformats.org/drawingml/2006/main"/>
-          <a:lstStyle xmlns:a="http://schemas.openxmlformats.org/drawingml/2006/main"/>
-          <a:p xmlns:a="http://schemas.openxmlformats.org/drawingml/2006/main"/>
+          <a:prstGeom prst="rect">
+            <a:avLst/>
+          </a:prstGeom>
+        </p:spPr>
+        <p:txBody>
+          <a:bodyPr/>
+          <a:lstStyle/>
+          <a:p>
+            <a:endParaRPr/>
+          </a:p>
         </p:txBody>
       </p:sp>
     </p:spTree>
   </p:cSld>
   <p:clrMap bg1="lt1" tx1="dk1" bg2="lt2" tx2="dk2" accent1="accent1" accent2="accent2" accent3="accent3" accent4="accent4" accent5="accent5" accent6="accent6" hlink="hlink" folHlink="folHlink"/>
   <p:notesStyle>
-    <a:lvl1pPr xmlns:a="http://schemas.openxmlformats.org/drawingml/2006/main" marL="0" algn="l" defTabSz="914400" rtl="0" eaLnBrk="1" latinLnBrk="0" hangingPunct="1">
+    <a:lvl1pPr marL="0" algn="l" defTabSz="914400" rtl="0" eaLnBrk="1" latinLnBrk="0" hangingPunct="1">
       <a:defRPr sz="1200" kern="1200"/>
     </a:lvl1pPr>
   </p:notesStyle>
 </p:notesMaster>
 </file>
 
-<file path=ppt/notesMasters/theme/theme3.xml><?xml version="1.0" encoding="utf-8"?>
-<a:theme xmlns:a="http://schemas.openxmlformats.org/drawingml/2006/main" name="ChatGPT">
-  <a:themeElements>
-    <a:clrScheme name="ChatGPT">
-      <a:dk1>
-        <a:srgbClr val="000000"/>
-      </a:dk1>
-      <a:lt1>
-        <a:srgbClr val="FFFFFF"/>
-      </a:lt1>
-      <a:dk2>
-        <a:srgbClr val="0E2841"/>
-      </a:dk2>
-      <a:lt2>
-        <a:srgbClr val="E8E8E8"/>
-      </a:lt2>
-      <a:accent1>
-        <a:srgbClr val="156082"/>
-      </a:accent1>
-      <a:accent2>
-        <a:srgbClr val="E97132"/>
-      </a:accent2>
-      <a:accent3>
-        <a:srgbClr val="196B24"/>
-      </a:accent3>
-      <a:accent4>
-        <a:srgbClr val="0F9ED5"/>
-      </a:accent4>
-      <a:accent5>
-        <a:srgbClr val="A02B93"/>
-      </a:accent5>
-      <a:accent6>
-        <a:srgbClr val="4EA72E"/>
-      </a:accent6>
-      <a:hlink>
-        <a:srgbClr val="467886"/>
-      </a:hlink>
-      <a:folHlink>
-        <a:srgbClr val="96607D"/>
-      </a:folHlink>
-    </a:clrScheme>
-    <a:fontScheme name="Office">
-      <a:majorFont>
-        <a:latin typeface="Calibri Light"/>
-        <a:ea typeface="Calibri Light"/>
-        <a:cs typeface="Calibri Light"/>
-      </a:majorFont>
-      <a:minorFont>
-        <a:latin typeface="Calibri"/>
-        <a:ea typeface="Calibri"/>
-        <a:cs typeface="Calibri"/>
-      </a:minorFont>
-    </a:fontScheme>
-    <a:fmtScheme name="ChatGPT">
-      <a:fillStyleLst>
-        <a:solidFill>
-          <a:schemeClr val="phClr"/>
-        </a:solidFill>
-        <a:gradFill>
-          <a:gsLst>
-            <a:gs pos="0">
-              <a:schemeClr val="phClr">
-                <a:tint val="67000"/>
-                <a:lumMod val="110000"/>
-                <a:satMod val="105000"/>
-              </a:schemeClr>
-            </a:gs>
-            <a:gs pos="50000">
-              <a:schemeClr val="phClr">
-                <a:tint val="73000"/>
-                <a:lumMod val="105000"/>
-                <a:satMod val="103000"/>
-              </a:schemeClr>
-            </a:gs>
-            <a:gs pos="100000">
-              <a:schemeClr val="phClr">
-                <a:tint val="81000"/>
-                <a:lumMod val="105000"/>
-                <a:satMod val="109000"/>
-              </a:schemeClr>
-            </a:gs>
-          </a:gsLst>
-          <a:lin ang="5400000" scaled="0"/>
-        </a:gradFill>
-        <a:gradFill>
-          <a:gsLst>
-            <a:gs pos="0">
-              <a:schemeClr val="phClr">
-                <a:tint val="94000"/>
-                <a:lumMod val="102000"/>
-                <a:satMod val="103000"/>
-              </a:schemeClr>
-            </a:gs>
-            <a:gs pos="50000">
-              <a:schemeClr val="phClr">
-                <a:shade val="100000"/>
-                <a:lumMod val="100000"/>
-                <a:satMod val="110000"/>
-              </a:schemeClr>
-            </a:gs>
-            <a:gs pos="100000">
-              <a:schemeClr val="phClr">
-                <a:shade val="78000"/>
-                <a:lumMod val="99000"/>
-                <a:satMod val="120000"/>
-              </a:schemeClr>
-            </a:gs>
-          </a:gsLst>
-          <a:lin ang="5400000" scaled="0"/>
-        </a:gradFill>
-      </a:fillStyleLst>
-      <a:lnStyleLst>
-        <a:ln w="12700">
-          <a:solidFill>
-            <a:schemeClr val="phClr"/>
-          </a:solidFill>
-          <a:prstDash val="solid"/>
-        </a:ln>
-        <a:ln w="19050">
-          <a:solidFill>
-            <a:schemeClr val="phClr"/>
-          </a:solidFill>
-          <a:prstDash val="solid"/>
-        </a:ln>
-        <a:ln w="25400">
-          <a:solidFill>
-            <a:schemeClr val="phClr"/>
-          </a:solidFill>
-          <a:prstDash val="solid"/>
-        </a:ln>
-      </a:lnStyleLst>
-      <a:effectStyleLst>
-        <a:effectStyle>
-          <a:effectLst/>
-        </a:effectStyle>
-        <a:effectStyle>
-          <a:effectLst/>
-        </a:effectStyle>
-        <a:effectStyle>
-          <a:effectLst>
-            <a:outerShdw blurRad="57150" dist="19050" dir="5400000">
-              <a:srgbClr val="000000">
-                <a:alpha val="16000"/>
-              </a:srgbClr>
-            </a:outerShdw>
-          </a:effectLst>
-        </a:effectStyle>
-        <a:effectStyle>
-          <a:effectLst>
-            <a:outerShdw blurRad="19050" dist="9525" dir="5400000">
-              <a:srgbClr val="000000">
-                <a:alpha val="6000"/>
-              </a:srgbClr>
-            </a:outerShdw>
-          </a:effectLst>
-        </a:effectStyle>
-        <a:effectStyle>
-          <a:effectLst>
-            <a:outerShdw blurRad="28575" dist="9525" dir="5400000">
-              <a:srgbClr val="000000">
-                <a:alpha val="8000"/>
-              </a:srgbClr>
-            </a:outerShdw>
-          </a:effectLst>
-        </a:effectStyle>
-        <a:effectStyle>
-          <a:effectLst>
-            <a:outerShdw blurRad="57150" dist="19050" dir="5400000">
-              <a:srgbClr val="000000">
-                <a:alpha val="10000"/>
-              </a:srgbClr>
-            </a:outerShdw>
-          </a:effectLst>
-        </a:effectStyle>
-        <a:effectStyle>
-          <a:effectLst>
-            <a:outerShdw blurRad="114300" dist="38100" dir="5400000">
-              <a:srgbClr val="000000">
-                <a:alpha val="12000"/>
-              </a:srgbClr>
-            </a:outerShdw>
-          </a:effectLst>
-        </a:effectStyle>
-        <a:effectStyle>
-          <a:effectLst>
-            <a:outerShdw blurRad="171450" dist="57150" dir="5400000">
-              <a:srgbClr val="000000">
-                <a:alpha val="16000"/>
-              </a:srgbClr>
-            </a:outerShdw>
-          </a:effectLst>
-        </a:effectStyle>
-        <a:effectStyle>
-          <a:effectLst>
-            <a:outerShdw blurRad="266700" dist="95250" dir="5400000">
-              <a:srgbClr val="000000">
-                <a:alpha val="24000"/>
-              </a:srgbClr>
-            </a:outerShdw>
-          </a:effectLst>
-        </a:effectStyle>
-      </a:effectStyleLst>
-      <a:bgFillStyleLst>
-        <a:solidFill>
-          <a:schemeClr val="phClr"/>
-        </a:solidFill>
-        <a:solidFill>
-          <a:schemeClr val="phClr">
-            <a:tint val="95000"/>
-            <a:satMod val="170000"/>
-          </a:schemeClr>
-        </a:solidFill>
-        <a:gradFill>
-          <a:gsLst>
-            <a:gs pos="0">
-              <a:schemeClr val="phClr">
-                <a:tint val="93000"/>
-                <a:shade val="98000"/>
-                <a:lumMod val="102000"/>
-                <a:satMod val="150000"/>
-              </a:schemeClr>
-            </a:gs>
-            <a:gs pos="50000">
-              <a:schemeClr val="phClr">
-                <a:tint val="98000"/>
-                <a:shade val="90000"/>
-                <a:lumMod val="103000"/>
-                <a:satMod val="130000"/>
-              </a:schemeClr>
-            </a:gs>
-            <a:gs pos="100000">
-              <a:schemeClr val="phClr">
-                <a:shade val="63000"/>
-                <a:satMod val="120000"/>
-              </a:schemeClr>
-            </a:gs>
-          </a:gsLst>
-          <a:lin ang="5400000" scaled="0"/>
-        </a:gradFill>
-      </a:bgFillStyleLst>
-    </a:fmtScheme>
-  </a:themeElements>
-</a:theme>
-</file>
-
 <file path=ppt/notesSlides/notesSlide1.xml><?xml version="1.0" encoding="utf-8"?>
-<p:notes xmlns:p="http://schemas.openxmlformats.org/presentationml/2006/main">
+<p:notes xmlns:a="http://schemas.openxmlformats.org/drawingml/2006/main" xmlns:r="http://schemas.openxmlformats.org/officeDocument/2006/relationships" xmlns:p="http://schemas.openxmlformats.org/presentationml/2006/main">
   <p:cSld>
     <p:spTree>
       <p:nvGrpSpPr>
@@ -419,16 +298,21 @@
         <p:nvPr/>
       </p:nvGrpSpPr>
       <p:grpSpPr>
-        <a:xfrm xmlns:a="http://schemas.openxmlformats.org/drawingml/2006/main"/>
+        <a:xfrm>
+          <a:off x="0" y="0"/>
+          <a:ext cx="0" cy="0"/>
+          <a:chOff x="0" y="0"/>
+          <a:chExt cx="0" cy="0"/>
+        </a:xfrm>
       </p:grpSpPr>
       <p:sp>
         <p:nvSpPr>
           <p:cNvPr id="2" name="Slide Image Placeholder 1"/>
           <p:cNvSpPr>
-            <a:spLocks xmlns:a="http://schemas.openxmlformats.org/drawingml/2006/main" noGrp="1"/>
+            <a:spLocks noGrp="1" noRot="1" noChangeAspect="1"/>
           </p:cNvSpPr>
           <p:nvPr>
-            <p:ph type="sldImg" idx="0"/>
+            <p:ph type="sldImg"/>
           </p:nvPr>
         </p:nvSpPr>
         <p:spPr/>
@@ -437,7 +321,7 @@
         <p:nvSpPr>
           <p:cNvPr id="3" name="Notes Placeholder 2"/>
           <p:cNvSpPr>
-            <a:spLocks xmlns:a="http://schemas.openxmlformats.org/drawingml/2006/main" noGrp="1"/>
+            <a:spLocks noGrp="1"/>
           </p:cNvSpPr>
           <p:nvPr>
             <p:ph type="body" idx="1"/>
@@ -445,9 +329,9 @@
         </p:nvSpPr>
         <p:spPr/>
         <p:txBody>
-          <a:bodyPr xmlns:a="http://schemas.openxmlformats.org/drawingml/2006/main"/>
-          <a:lstStyle xmlns:a="http://schemas.openxmlformats.org/drawingml/2006/main"/>
-          <a:p xmlns:a="http://schemas.openxmlformats.org/drawingml/2006/main">
+          <a:bodyPr/>
+          <a:lstStyle/>
+          <a:p>
             <a:r>
               <a:t>Opening: This is a terminal Texas Hold'em game written in Python. I will introduce the project scope, hand flow, and hand evaluation, then run a sample hand. The game is one human player versus one computer. </a:t>
             </a:r>
@@ -458,7 +342,7 @@
         <p:nvSpPr>
           <p:cNvPr id="4" name="Slide Number Placeholder 3"/>
           <p:cNvSpPr>
-            <a:spLocks xmlns:a="http://schemas.openxmlformats.org/drawingml/2006/main" noGrp="1"/>
+            <a:spLocks noGrp="1"/>
           </p:cNvSpPr>
           <p:nvPr>
             <p:ph type="sldNum" idx="5"/>
@@ -466,21 +350,23 @@
         </p:nvSpPr>
         <p:spPr/>
         <p:txBody>
-          <a:bodyPr xmlns:a="http://schemas.openxmlformats.org/drawingml/2006/main"/>
-          <a:lstStyle xmlns:a="http://schemas.openxmlformats.org/drawingml/2006/main"/>
-          <a:p xmlns:a="http://schemas.openxmlformats.org/drawingml/2006/main"/>
+          <a:bodyPr/>
+          <a:lstStyle/>
+          <a:p>
+            <a:endParaRPr/>
+          </a:p>
         </p:txBody>
       </p:sp>
     </p:spTree>
   </p:cSld>
   <p:clrMapOvr>
-    <a:masterClrMapping xmlns:a="http://schemas.openxmlformats.org/drawingml/2006/main"/>
+    <a:masterClrMapping/>
   </p:clrMapOvr>
 </p:notes>
 </file>
 
 <file path=ppt/notesSlides/notesSlide2.xml><?xml version="1.0" encoding="utf-8"?>
-<p:notes xmlns:p="http://schemas.openxmlformats.org/presentationml/2006/main">
+<p:notes xmlns:a="http://schemas.openxmlformats.org/drawingml/2006/main" xmlns:r="http://schemas.openxmlformats.org/officeDocument/2006/relationships" xmlns:p="http://schemas.openxmlformats.org/presentationml/2006/main">
   <p:cSld>
     <p:spTree>
       <p:nvGrpSpPr>
@@ -489,16 +375,21 @@
         <p:nvPr/>
       </p:nvGrpSpPr>
       <p:grpSpPr>
-        <a:xfrm xmlns:a="http://schemas.openxmlformats.org/drawingml/2006/main"/>
+        <a:xfrm>
+          <a:off x="0" y="0"/>
+          <a:ext cx="0" cy="0"/>
+          <a:chOff x="0" y="0"/>
+          <a:chExt cx="0" cy="0"/>
+        </a:xfrm>
       </p:grpSpPr>
       <p:sp>
         <p:nvSpPr>
           <p:cNvPr id="2" name="Slide Image Placeholder 1"/>
           <p:cNvSpPr>
-            <a:spLocks xmlns:a="http://schemas.openxmlformats.org/drawingml/2006/main" noGrp="1"/>
+            <a:spLocks noGrp="1" noRot="1" noChangeAspect="1"/>
           </p:cNvSpPr>
           <p:nvPr>
-            <p:ph type="sldImg" idx="0"/>
+            <p:ph type="sldImg"/>
           </p:nvPr>
         </p:nvSpPr>
         <p:spPr/>
@@ -507,7 +398,7 @@
         <p:nvSpPr>
           <p:cNvPr id="3" name="Notes Placeholder 2"/>
           <p:cNvSpPr>
-            <a:spLocks xmlns:a="http://schemas.openxmlformats.org/drawingml/2006/main" noGrp="1"/>
+            <a:spLocks noGrp="1"/>
           </p:cNvSpPr>
           <p:nvPr>
             <p:ph type="body" idx="1"/>
@@ -515,9 +406,9 @@
         </p:nvSpPr>
         <p:spPr/>
         <p:txBody>
-          <a:bodyPr xmlns:a="http://schemas.openxmlformats.org/drawingml/2006/main"/>
-          <a:lstStyle xmlns:a="http://schemas.openxmlformats.org/drawingml/2006/main"/>
-          <a:p xmlns:a="http://schemas.openxmlformats.org/drawingml/2006/main">
+          <a:bodyPr/>
+          <a:lstStyle/>
+          <a:p>
             <a:r>
               <a:t>This is the first working checkpoint, not the complete game. It creates and shuffles the deck, deals two private cards to each player, and displays those cards. </a:t>
             </a:r>
@@ -528,7 +419,7 @@
         <p:nvSpPr>
           <p:cNvPr id="4" name="Slide Number Placeholder 3"/>
           <p:cNvSpPr>
-            <a:spLocks xmlns:a="http://schemas.openxmlformats.org/drawingml/2006/main" noGrp="1"/>
+            <a:spLocks noGrp="1"/>
           </p:cNvSpPr>
           <p:nvPr>
             <p:ph type="sldNum" idx="5"/>
@@ -536,21 +427,23 @@
         </p:nvSpPr>
         <p:spPr/>
         <p:txBody>
-          <a:bodyPr xmlns:a="http://schemas.openxmlformats.org/drawingml/2006/main"/>
-          <a:lstStyle xmlns:a="http://schemas.openxmlformats.org/drawingml/2006/main"/>
-          <a:p xmlns:a="http://schemas.openxmlformats.org/drawingml/2006/main"/>
+          <a:bodyPr/>
+          <a:lstStyle/>
+          <a:p>
+            <a:endParaRPr/>
+          </a:p>
         </p:txBody>
       </p:sp>
     </p:spTree>
   </p:cSld>
   <p:clrMapOvr>
-    <a:masterClrMapping xmlns:a="http://schemas.openxmlformats.org/drawingml/2006/main"/>
+    <a:masterClrMapping/>
   </p:clrMapOvr>
 </p:notes>
 </file>
 
 <file path=ppt/notesSlides/notesSlide3.xml><?xml version="1.0" encoding="utf-8"?>
-<p:notes xmlns:p="http://schemas.openxmlformats.org/presentationml/2006/main">
+<p:notes xmlns:a="http://schemas.openxmlformats.org/drawingml/2006/main" xmlns:r="http://schemas.openxmlformats.org/officeDocument/2006/relationships" xmlns:p="http://schemas.openxmlformats.org/presentationml/2006/main">
   <p:cSld>
     <p:spTree>
       <p:nvGrpSpPr>
@@ -559,16 +452,21 @@
         <p:nvPr/>
       </p:nvGrpSpPr>
       <p:grpSpPr>
-        <a:xfrm xmlns:a="http://schemas.openxmlformats.org/drawingml/2006/main"/>
+        <a:xfrm>
+          <a:off x="0" y="0"/>
+          <a:ext cx="0" cy="0"/>
+          <a:chOff x="0" y="0"/>
+          <a:chExt cx="0" cy="0"/>
+        </a:xfrm>
       </p:grpSpPr>
       <p:sp>
         <p:nvSpPr>
           <p:cNvPr id="2" name="Slide Image Placeholder 1"/>
           <p:cNvSpPr>
-            <a:spLocks xmlns:a="http://schemas.openxmlformats.org/drawingml/2006/main" noGrp="1"/>
+            <a:spLocks noGrp="1" noRot="1" noChangeAspect="1"/>
           </p:cNvSpPr>
           <p:nvPr>
-            <p:ph type="sldImg" idx="0"/>
+            <p:ph type="sldImg"/>
           </p:nvPr>
         </p:nvSpPr>
         <p:spPr/>
@@ -577,7 +475,7 @@
         <p:nvSpPr>
           <p:cNvPr id="3" name="Notes Placeholder 2"/>
           <p:cNvSpPr>
-            <a:spLocks xmlns:a="http://schemas.openxmlformats.org/drawingml/2006/main" noGrp="1"/>
+            <a:spLocks noGrp="1"/>
           </p:cNvSpPr>
           <p:nvPr>
             <p:ph type="body" idx="1"/>
@@ -585,9 +483,9 @@
         </p:nvSpPr>
         <p:spPr/>
         <p:txBody>
-          <a:bodyPr xmlns:a="http://schemas.openxmlformats.org/drawingml/2006/main"/>
-          <a:lstStyle xmlns:a="http://schemas.openxmlformats.org/drawingml/2006/main"/>
-          <a:p xmlns:a="http://schemas.openxmlformats.org/drawingml/2006/main">
+          <a:bodyPr/>
+          <a:lstStyle/>
+          <a:p>
             <a:r>
               <a:t>Explain that this is the planned game flow. The current code only reaches the first step: shuffling the deck and dealing two private cards to each player. </a:t>
             </a:r>
@@ -598,7 +496,7 @@
         <p:nvSpPr>
           <p:cNvPr id="4" name="Slide Number Placeholder 3"/>
           <p:cNvSpPr>
-            <a:spLocks xmlns:a="http://schemas.openxmlformats.org/drawingml/2006/main" noGrp="1"/>
+            <a:spLocks noGrp="1"/>
           </p:cNvSpPr>
           <p:nvPr>
             <p:ph type="sldNum" idx="5"/>
@@ -606,21 +504,23 @@
         </p:nvSpPr>
         <p:spPr/>
         <p:txBody>
-          <a:bodyPr xmlns:a="http://schemas.openxmlformats.org/drawingml/2006/main"/>
-          <a:lstStyle xmlns:a="http://schemas.openxmlformats.org/drawingml/2006/main"/>
-          <a:p xmlns:a="http://schemas.openxmlformats.org/drawingml/2006/main"/>
+          <a:bodyPr/>
+          <a:lstStyle/>
+          <a:p>
+            <a:endParaRPr/>
+          </a:p>
         </p:txBody>
       </p:sp>
     </p:spTree>
   </p:cSld>
   <p:clrMapOvr>
-    <a:masterClrMapping xmlns:a="http://schemas.openxmlformats.org/drawingml/2006/main"/>
+    <a:masterClrMapping/>
   </p:clrMapOvr>
 </p:notes>
 </file>
 
 <file path=ppt/notesSlides/notesSlide4.xml><?xml version="1.0" encoding="utf-8"?>
-<p:notes xmlns:p="http://schemas.openxmlformats.org/presentationml/2006/main">
+<p:notes xmlns:a="http://schemas.openxmlformats.org/drawingml/2006/main" xmlns:r="http://schemas.openxmlformats.org/officeDocument/2006/relationships" xmlns:p="http://schemas.openxmlformats.org/presentationml/2006/main">
   <p:cSld>
     <p:spTree>
       <p:nvGrpSpPr>
@@ -629,16 +529,21 @@
         <p:nvPr/>
       </p:nvGrpSpPr>
       <p:grpSpPr>
-        <a:xfrm xmlns:a="http://schemas.openxmlformats.org/drawingml/2006/main"/>
+        <a:xfrm>
+          <a:off x="0" y="0"/>
+          <a:ext cx="0" cy="0"/>
+          <a:chOff x="0" y="0"/>
+          <a:chExt cx="0" cy="0"/>
+        </a:xfrm>
       </p:grpSpPr>
       <p:sp>
         <p:nvSpPr>
           <p:cNvPr id="2" name="Slide Image Placeholder 1"/>
           <p:cNvSpPr>
-            <a:spLocks xmlns:a="http://schemas.openxmlformats.org/drawingml/2006/main" noGrp="1"/>
+            <a:spLocks noGrp="1" noRot="1" noChangeAspect="1"/>
           </p:cNvSpPr>
           <p:nvPr>
-            <p:ph type="sldImg" idx="0"/>
+            <p:ph type="sldImg"/>
           </p:nvPr>
         </p:nvSpPr>
         <p:spPr/>
@@ -647,7 +552,7 @@
         <p:nvSpPr>
           <p:cNvPr id="3" name="Notes Placeholder 2"/>
           <p:cNvSpPr>
-            <a:spLocks xmlns:a="http://schemas.openxmlformats.org/drawingml/2006/main" noGrp="1"/>
+            <a:spLocks noGrp="1"/>
           </p:cNvSpPr>
           <p:nvPr>
             <p:ph type="body" idx="1"/>
@@ -655,9 +560,9 @@
         </p:nvSpPr>
         <p:spPr/>
         <p:txBody>
-          <a:bodyPr xmlns:a="http://schemas.openxmlformats.org/drawingml/2006/main"/>
-          <a:lstStyle xmlns:a="http://schemas.openxmlformats.org/drawingml/2006/main"/>
-          <a:p xmlns:a="http://schemas.openxmlformats.org/drawingml/2006/main">
+          <a:bodyPr/>
+          <a:lstStyle/>
+          <a:p>
             <a:r>
               <a:t>Describe this as a planned algorithm, not a feature in the current prototype. A later version will score every five-card combination and compare categories and kickers. A-2-3-4-5 will count as a five-high straight. </a:t>
             </a:r>
@@ -668,7 +573,7 @@
         <p:nvSpPr>
           <p:cNvPr id="4" name="Slide Number Placeholder 3"/>
           <p:cNvSpPr>
-            <a:spLocks xmlns:a="http://schemas.openxmlformats.org/drawingml/2006/main" noGrp="1"/>
+            <a:spLocks noGrp="1"/>
           </p:cNvSpPr>
           <p:nvPr>
             <p:ph type="sldNum" idx="5"/>
@@ -676,21 +581,23 @@
         </p:nvSpPr>
         <p:spPr/>
         <p:txBody>
-          <a:bodyPr xmlns:a="http://schemas.openxmlformats.org/drawingml/2006/main"/>
-          <a:lstStyle xmlns:a="http://schemas.openxmlformats.org/drawingml/2006/main"/>
-          <a:p xmlns:a="http://schemas.openxmlformats.org/drawingml/2006/main"/>
+          <a:bodyPr/>
+          <a:lstStyle/>
+          <a:p>
+            <a:endParaRPr/>
+          </a:p>
         </p:txBody>
       </p:sp>
     </p:spTree>
   </p:cSld>
   <p:clrMapOvr>
-    <a:masterClrMapping xmlns:a="http://schemas.openxmlformats.org/drawingml/2006/main"/>
+    <a:masterClrMapping/>
   </p:clrMapOvr>
 </p:notes>
 </file>
 
 <file path=ppt/notesSlides/notesSlide5.xml><?xml version="1.0" encoding="utf-8"?>
-<p:notes xmlns:p="http://schemas.openxmlformats.org/presentationml/2006/main">
+<p:notes xmlns:a="http://schemas.openxmlformats.org/drawingml/2006/main" xmlns:r="http://schemas.openxmlformats.org/officeDocument/2006/relationships" xmlns:p="http://schemas.openxmlformats.org/presentationml/2006/main">
   <p:cSld>
     <p:spTree>
       <p:nvGrpSpPr>
@@ -699,16 +606,21 @@
         <p:nvPr/>
       </p:nvGrpSpPr>
       <p:grpSpPr>
-        <a:xfrm xmlns:a="http://schemas.openxmlformats.org/drawingml/2006/main"/>
+        <a:xfrm>
+          <a:off x="0" y="0"/>
+          <a:ext cx="0" cy="0"/>
+          <a:chOff x="0" y="0"/>
+          <a:chExt cx="0" cy="0"/>
+        </a:xfrm>
       </p:grpSpPr>
       <p:sp>
         <p:nvSpPr>
           <p:cNvPr id="2" name="Slide Image Placeholder 1"/>
           <p:cNvSpPr>
-            <a:spLocks xmlns:a="http://schemas.openxmlformats.org/drawingml/2006/main" noGrp="1"/>
+            <a:spLocks noGrp="1" noRot="1" noChangeAspect="1"/>
           </p:cNvSpPr>
           <p:nvPr>
-            <p:ph type="sldImg" idx="0"/>
+            <p:ph type="sldImg"/>
           </p:nvPr>
         </p:nvSpPr>
         <p:spPr/>
@@ -717,7 +629,7 @@
         <p:nvSpPr>
           <p:cNvPr id="3" name="Notes Placeholder 2"/>
           <p:cNvSpPr>
-            <a:spLocks xmlns:a="http://schemas.openxmlformats.org/drawingml/2006/main" noGrp="1"/>
+            <a:spLocks noGrp="1"/>
           </p:cNvSpPr>
           <p:nvPr>
             <p:ph type="body" idx="1"/>
@@ -725,9 +637,9 @@
         </p:nvSpPr>
         <p:spPr/>
         <p:txBody>
-          <a:bodyPr xmlns:a="http://schemas.openxmlformats.org/drawingml/2006/main"/>
-          <a:lstStyle xmlns:a="http://schemas.openxmlformats.org/drawingml/2006/main"/>
-          <a:p xmlns:a="http://schemas.openxmlformats.org/drawingml/2006/main">
+          <a:bodyPr/>
+          <a:lstStyle/>
+          <a:p>
             <a:r>
               <a:t>Show the code that exists now: Card stores a rank and suit, Deck builds and shuffles cards, Player stores private cards, and TexasHoldemGame deals and displays them. Betting and hand evaluation are future modules. </a:t>
             </a:r>
@@ -738,7 +650,7 @@
         <p:nvSpPr>
           <p:cNvPr id="4" name="Slide Number Placeholder 3"/>
           <p:cNvSpPr>
-            <a:spLocks xmlns:a="http://schemas.openxmlformats.org/drawingml/2006/main" noGrp="1"/>
+            <a:spLocks noGrp="1"/>
           </p:cNvSpPr>
           <p:nvPr>
             <p:ph type="sldNum" idx="5"/>
@@ -746,21 +658,23 @@
         </p:nvSpPr>
         <p:spPr/>
         <p:txBody>
-          <a:bodyPr xmlns:a="http://schemas.openxmlformats.org/drawingml/2006/main"/>
-          <a:lstStyle xmlns:a="http://schemas.openxmlformats.org/drawingml/2006/main"/>
-          <a:p xmlns:a="http://schemas.openxmlformats.org/drawingml/2006/main"/>
+          <a:bodyPr/>
+          <a:lstStyle/>
+          <a:p>
+            <a:endParaRPr/>
+          </a:p>
         </p:txBody>
       </p:sp>
     </p:spTree>
   </p:cSld>
   <p:clrMapOvr>
-    <a:masterClrMapping xmlns:a="http://schemas.openxmlformats.org/drawingml/2006/main"/>
+    <a:masterClrMapping/>
   </p:clrMapOvr>
 </p:notes>
 </file>
 
 <file path=ppt/notesSlides/notesSlide6.xml><?xml version="1.0" encoding="utf-8"?>
-<p:notes xmlns:p="http://schemas.openxmlformats.org/presentationml/2006/main">
+<p:notes xmlns:a="http://schemas.openxmlformats.org/drawingml/2006/main" xmlns:r="http://schemas.openxmlformats.org/officeDocument/2006/relationships" xmlns:p="http://schemas.openxmlformats.org/presentationml/2006/main">
   <p:cSld>
     <p:spTree>
       <p:nvGrpSpPr>
@@ -769,16 +683,21 @@
         <p:nvPr/>
       </p:nvGrpSpPr>
       <p:grpSpPr>
-        <a:xfrm xmlns:a="http://schemas.openxmlformats.org/drawingml/2006/main"/>
+        <a:xfrm>
+          <a:off x="0" y="0"/>
+          <a:ext cx="0" cy="0"/>
+          <a:chOff x="0" y="0"/>
+          <a:chExt cx="0" cy="0"/>
+        </a:xfrm>
       </p:grpSpPr>
       <p:sp>
         <p:nvSpPr>
           <p:cNvPr id="2" name="Slide Image Placeholder 1"/>
           <p:cNvSpPr>
-            <a:spLocks xmlns:a="http://schemas.openxmlformats.org/drawingml/2006/main" noGrp="1"/>
+            <a:spLocks noGrp="1" noRot="1" noChangeAspect="1"/>
           </p:cNvSpPr>
           <p:nvPr>
-            <p:ph type="sldImg" idx="0"/>
+            <p:ph type="sldImg"/>
           </p:nvPr>
         </p:nvSpPr>
         <p:spPr/>
@@ -787,7 +706,7 @@
         <p:nvSpPr>
           <p:cNvPr id="3" name="Notes Placeholder 2"/>
           <p:cNvSpPr>
-            <a:spLocks xmlns:a="http://schemas.openxmlformats.org/drawingml/2006/main" noGrp="1"/>
+            <a:spLocks noGrp="1"/>
           </p:cNvSpPr>
           <p:nvPr>
             <p:ph type="body" idx="1"/>
@@ -795,9 +714,9 @@
         </p:nvSpPr>
         <p:spPr/>
         <p:txBody>
-          <a:bodyPr xmlns:a="http://schemas.openxmlformats.org/drawingml/2006/main"/>
-          <a:lstStyle xmlns:a="http://schemas.openxmlformats.org/drawingml/2006/main"/>
-          <a:p xmlns:a="http://schemas.openxmlformats.org/drawingml/2006/main">
+          <a:bodyPr/>
+          <a:lstStyle/>
+          <a:p>
             <a:r>
               <a:t>Explain that this slide describes a possible future feature. The current prototype does not make betting decisions because betting has not been implemented. </a:t>
             </a:r>
@@ -808,7 +727,7 @@
         <p:nvSpPr>
           <p:cNvPr id="4" name="Slide Number Placeholder 3"/>
           <p:cNvSpPr>
-            <a:spLocks xmlns:a="http://schemas.openxmlformats.org/drawingml/2006/main" noGrp="1"/>
+            <a:spLocks noGrp="1"/>
           </p:cNvSpPr>
           <p:nvPr>
             <p:ph type="sldNum" idx="5"/>
@@ -816,21 +735,23 @@
         </p:nvSpPr>
         <p:spPr/>
         <p:txBody>
-          <a:bodyPr xmlns:a="http://schemas.openxmlformats.org/drawingml/2006/main"/>
-          <a:lstStyle xmlns:a="http://schemas.openxmlformats.org/drawingml/2006/main"/>
-          <a:p xmlns:a="http://schemas.openxmlformats.org/drawingml/2006/main"/>
+          <a:bodyPr/>
+          <a:lstStyle/>
+          <a:p>
+            <a:endParaRPr/>
+          </a:p>
         </p:txBody>
       </p:sp>
     </p:spTree>
   </p:cSld>
   <p:clrMapOvr>
-    <a:masterClrMapping xmlns:a="http://schemas.openxmlformats.org/drawingml/2006/main"/>
+    <a:masterClrMapping/>
   </p:clrMapOvr>
 </p:notes>
 </file>
 
 <file path=ppt/notesSlides/notesSlide7.xml><?xml version="1.0" encoding="utf-8"?>
-<p:notes xmlns:p="http://schemas.openxmlformats.org/presentationml/2006/main">
+<p:notes xmlns:a="http://schemas.openxmlformats.org/drawingml/2006/main" xmlns:r="http://schemas.openxmlformats.org/officeDocument/2006/relationships" xmlns:p="http://schemas.openxmlformats.org/presentationml/2006/main">
   <p:cSld>
     <p:spTree>
       <p:nvGrpSpPr>
@@ -839,16 +760,21 @@
         <p:nvPr/>
       </p:nvGrpSpPr>
       <p:grpSpPr>
-        <a:xfrm xmlns:a="http://schemas.openxmlformats.org/drawingml/2006/main"/>
+        <a:xfrm>
+          <a:off x="0" y="0"/>
+          <a:ext cx="0" cy="0"/>
+          <a:chOff x="0" y="0"/>
+          <a:chExt cx="0" cy="0"/>
+        </a:xfrm>
       </p:grpSpPr>
       <p:sp>
         <p:nvSpPr>
           <p:cNvPr id="2" name="Slide Image Placeholder 1"/>
           <p:cNvSpPr>
-            <a:spLocks xmlns:a="http://schemas.openxmlformats.org/drawingml/2006/main" noGrp="1"/>
+            <a:spLocks noGrp="1" noRot="1" noChangeAspect="1"/>
           </p:cNvSpPr>
           <p:nvPr>
-            <p:ph type="sldImg" idx="0"/>
+            <p:ph type="sldImg"/>
           </p:nvPr>
         </p:nvSpPr>
         <p:spPr/>
@@ -857,7 +783,7 @@
         <p:nvSpPr>
           <p:cNvPr id="3" name="Notes Placeholder 2"/>
           <p:cNvSpPr>
-            <a:spLocks xmlns:a="http://schemas.openxmlformats.org/drawingml/2006/main" noGrp="1"/>
+            <a:spLocks noGrp="1"/>
           </p:cNvSpPr>
           <p:nvPr>
             <p:ph type="body" idx="1"/>
@@ -865,9 +791,9 @@
         </p:nvSpPr>
         <p:spPr/>
         <p:txBody>
-          <a:bodyPr xmlns:a="http://schemas.openxmlformats.org/drawingml/2006/main"/>
-          <a:lstStyle xmlns:a="http://schemas.openxmlformats.org/drawingml/2006/main"/>
-          <a:p xmlns:a="http://schemas.openxmlformats.org/drawingml/2006/main">
+          <a:bodyPr/>
+          <a:lstStyle/>
+          <a:p>
             <a:r>
               <a:t>Run the program once. It will display the two dealt hands and stop; there are no action prompts in this first framework. Use the TODO list to introduce the next implementation steps. </a:t>
             </a:r>
@@ -878,7 +804,7 @@
         <p:nvSpPr>
           <p:cNvPr id="4" name="Slide Number Placeholder 3"/>
           <p:cNvSpPr>
-            <a:spLocks xmlns:a="http://schemas.openxmlformats.org/drawingml/2006/main" noGrp="1"/>
+            <a:spLocks noGrp="1"/>
           </p:cNvSpPr>
           <p:nvPr>
             <p:ph type="sldNum" idx="5"/>
@@ -886,21 +812,23 @@
         </p:nvSpPr>
         <p:spPr/>
         <p:txBody>
-          <a:bodyPr xmlns:a="http://schemas.openxmlformats.org/drawingml/2006/main"/>
-          <a:lstStyle xmlns:a="http://schemas.openxmlformats.org/drawingml/2006/main"/>
-          <a:p xmlns:a="http://schemas.openxmlformats.org/drawingml/2006/main"/>
+          <a:bodyPr/>
+          <a:lstStyle/>
+          <a:p>
+            <a:endParaRPr/>
+          </a:p>
         </p:txBody>
       </p:sp>
     </p:spTree>
   </p:cSld>
   <p:clrMapOvr>
-    <a:masterClrMapping xmlns:a="http://schemas.openxmlformats.org/drawingml/2006/main"/>
+    <a:masterClrMapping/>
   </p:clrMapOvr>
 </p:notes>
 </file>
 
 <file path=ppt/notesSlides/notesSlide8.xml><?xml version="1.0" encoding="utf-8"?>
-<p:notes xmlns:p="http://schemas.openxmlformats.org/presentationml/2006/main">
+<p:notes xmlns:a="http://schemas.openxmlformats.org/drawingml/2006/main" xmlns:r="http://schemas.openxmlformats.org/officeDocument/2006/relationships" xmlns:p="http://schemas.openxmlformats.org/presentationml/2006/main">
   <p:cSld>
     <p:spTree>
       <p:nvGrpSpPr>
@@ -909,16 +837,21 @@
         <p:nvPr/>
       </p:nvGrpSpPr>
       <p:grpSpPr>
-        <a:xfrm xmlns:a="http://schemas.openxmlformats.org/drawingml/2006/main"/>
+        <a:xfrm>
+          <a:off x="0" y="0"/>
+          <a:ext cx="0" cy="0"/>
+          <a:chOff x="0" y="0"/>
+          <a:chExt cx="0" cy="0"/>
+        </a:xfrm>
       </p:grpSpPr>
       <p:sp>
         <p:nvSpPr>
           <p:cNvPr id="2" name="Slide Image Placeholder 1"/>
           <p:cNvSpPr>
-            <a:spLocks xmlns:a="http://schemas.openxmlformats.org/drawingml/2006/main" noGrp="1"/>
+            <a:spLocks noGrp="1" noRot="1" noChangeAspect="1"/>
           </p:cNvSpPr>
           <p:nvPr>
-            <p:ph type="sldImg" idx="0"/>
+            <p:ph type="sldImg"/>
           </p:nvPr>
         </p:nvSpPr>
         <p:spPr/>
@@ -927,7 +860,7 @@
         <p:nvSpPr>
           <p:cNvPr id="3" name="Notes Placeholder 2"/>
           <p:cNvSpPr>
-            <a:spLocks xmlns:a="http://schemas.openxmlformats.org/drawingml/2006/main" noGrp="1"/>
+            <a:spLocks noGrp="1"/>
           </p:cNvSpPr>
           <p:nvPr>
             <p:ph type="body" idx="1"/>
@@ -935,9 +868,9 @@
         </p:nvSpPr>
         <p:spPr/>
         <p:txBody>
-          <a:bodyPr xmlns:a="http://schemas.openxmlformats.org/drawingml/2006/main"/>
-          <a:lstStyle xmlns:a="http://schemas.openxmlformats.org/drawingml/2006/main"/>
-          <a:p xmlns:a="http://schemas.openxmlformats.org/drawingml/2006/main">
+          <a:bodyPr/>
+          <a:lstStyle/>
+          <a:p>
             <a:r>
               <a:t>Summarize the actual milestone: the deck, shuffle, player objects, and private-card dealing now work. Betting, board cards, hand evaluation, and computer strategy are future work. </a:t>
             </a:r>
@@ -948,7 +881,7 @@
         <p:nvSpPr>
           <p:cNvPr id="4" name="Slide Number Placeholder 3"/>
           <p:cNvSpPr>
-            <a:spLocks xmlns:a="http://schemas.openxmlformats.org/drawingml/2006/main" noGrp="1"/>
+            <a:spLocks noGrp="1"/>
           </p:cNvSpPr>
           <p:nvPr>
             <p:ph type="sldNum" idx="5"/>
@@ -956,21 +889,23 @@
         </p:nvSpPr>
         <p:spPr/>
         <p:txBody>
-          <a:bodyPr xmlns:a="http://schemas.openxmlformats.org/drawingml/2006/main"/>
-          <a:lstStyle xmlns:a="http://schemas.openxmlformats.org/drawingml/2006/main"/>
-          <a:p xmlns:a="http://schemas.openxmlformats.org/drawingml/2006/main"/>
+          <a:bodyPr/>
+          <a:lstStyle/>
+          <a:p>
+            <a:endParaRPr/>
+          </a:p>
         </p:txBody>
       </p:sp>
     </p:spTree>
   </p:cSld>
   <p:clrMapOvr>
-    <a:masterClrMapping xmlns:a="http://schemas.openxmlformats.org/drawingml/2006/main"/>
+    <a:masterClrMapping/>
   </p:clrMapOvr>
 </p:notes>
 </file>
 
 <file path=ppt/slideLayouts/slideLayout1.xml><?xml version="1.0" encoding="utf-8"?>
-<p:sldLayout xmlns:p="http://schemas.openxmlformats.org/presentationml/2006/main" type="title">
+<p:sldLayout xmlns:a="http://schemas.openxmlformats.org/drawingml/2006/main" xmlns:r="http://schemas.openxmlformats.org/officeDocument/2006/relationships" xmlns:p="http://schemas.openxmlformats.org/presentationml/2006/main" type="title">
   <p:cSld name="Title Slide">
     <p:spTree>
       <p:nvGrpSpPr>
@@ -979,19 +914,27 @@
         <p:nvPr/>
       </p:nvGrpSpPr>
       <p:grpSpPr>
-        <a:xfrm xmlns:a="http://schemas.openxmlformats.org/drawingml/2006/main"/>
+        <a:xfrm>
+          <a:off x="0" y="0"/>
+          <a:ext cx="0" cy="0"/>
+          <a:chOff x="0" y="0"/>
+          <a:chExt cx="0" cy="0"/>
+        </a:xfrm>
       </p:grpSpPr>
     </p:spTree>
   </p:cSld>
+  <p:clrMapOvr>
+    <a:masterClrMapping/>
+  </p:clrMapOvr>
 </p:sldLayout>
 </file>
 
 <file path=ppt/slideMasters/slideMaster1.xml><?xml version="1.0" encoding="utf-8"?>
-<p:sldMaster xmlns:p="http://schemas.openxmlformats.org/presentationml/2006/main">
+<p:sldMaster xmlns:a="http://schemas.openxmlformats.org/drawingml/2006/main" xmlns:r="http://schemas.openxmlformats.org/officeDocument/2006/relationships" xmlns:p="http://schemas.openxmlformats.org/presentationml/2006/main">
   <p:cSld name="Master">
     <p:bg>
       <p:bgRef idx="1001">
-        <a:schemeClr xmlns:a="http://schemas.openxmlformats.org/drawingml/2006/main" val="bg1"/>
+        <a:schemeClr val="bg1"/>
       </p:bgRef>
     </p:bg>
     <p:spTree>
@@ -1001,17 +944,22 @@
         <p:nvPr/>
       </p:nvGrpSpPr>
       <p:grpSpPr>
-        <a:xfrm xmlns:a="http://schemas.openxmlformats.org/drawingml/2006/main"/>
+        <a:xfrm>
+          <a:off x="0" y="0"/>
+          <a:ext cx="0" cy="0"/>
+          <a:chOff x="0" y="0"/>
+          <a:chExt cx="0" cy="0"/>
+        </a:xfrm>
       </p:grpSpPr>
     </p:spTree>
   </p:cSld>
   <p:clrMap bg1="lt1" tx1="dk1" bg2="lt2" tx2="dk2" accent1="accent1" accent2="accent2" accent3="accent3" accent4="accent4" accent5="accent5" accent6="accent6" hlink="hlink" folHlink="folHlink"/>
   <p:sldLayoutIdLst>
-    <p:sldLayoutId xmlns:r="http://schemas.openxmlformats.org/officeDocument/2006/relationships" id="2147483649" r:id="R76c031eeffb444d3"/>
+    <p:sldLayoutId id="2147483649" r:id="rId1"/>
   </p:sldLayoutIdLst>
   <p:txStyles>
     <p:titleStyle>
-      <a:lvl1pPr xmlns:a="http://schemas.openxmlformats.org/drawingml/2006/main" algn="l">
+      <a:lvl1pPr algn="l">
         <a:lnSpc>
           <a:spcPct val="90000"/>
         </a:lnSpc>
@@ -1030,7 +978,7 @@
       </a:lvl1pPr>
     </p:titleStyle>
     <p:bodyStyle>
-      <a:lvl1pPr xmlns:a="http://schemas.openxmlformats.org/drawingml/2006/main" marL="228600" indent="-228600" algn="l">
+      <a:lvl1pPr marL="228600" indent="-228600" algn="l">
         <a:lnSpc>
           <a:spcPct val="90000"/>
         </a:lnSpc>
@@ -1047,7 +995,7 @@
           <a:cs typeface="+mn-lt"/>
         </a:defRPr>
       </a:lvl1pPr>
-      <a:lvl2pPr xmlns:a="http://schemas.openxmlformats.org/drawingml/2006/main" marL="685800" indent="-228600" algn="l">
+      <a:lvl2pPr marL="685800" indent="-228600" algn="l">
         <a:lnSpc>
           <a:spcPct val="90000"/>
         </a:lnSpc>
@@ -1064,7 +1012,7 @@
           <a:cs typeface="+mn-lt"/>
         </a:defRPr>
       </a:lvl2pPr>
-      <a:lvl3pPr xmlns:a="http://schemas.openxmlformats.org/drawingml/2006/main" marL="1143000" indent="-228600" algn="l">
+      <a:lvl3pPr marL="1143000" indent="-228600" algn="l">
         <a:lnSpc>
           <a:spcPct val="90000"/>
         </a:lnSpc>
@@ -1081,7 +1029,7 @@
           <a:cs typeface="+mn-lt"/>
         </a:defRPr>
       </a:lvl3pPr>
-      <a:lvl4pPr xmlns:a="http://schemas.openxmlformats.org/drawingml/2006/main" marL="1600200" indent="-228600" algn="l">
+      <a:lvl4pPr marL="1600200" indent="-228600" algn="l">
         <a:lnSpc>
           <a:spcPct val="90000"/>
         </a:lnSpc>
@@ -1098,7 +1046,7 @@
           <a:cs typeface="+mn-lt"/>
         </a:defRPr>
       </a:lvl4pPr>
-      <a:lvl5pPr xmlns:a="http://schemas.openxmlformats.org/drawingml/2006/main" marL="2057400" indent="-228600" algn="l">
+      <a:lvl5pPr marL="2057400" indent="-228600" algn="l">
         <a:lnSpc>
           <a:spcPct val="90000"/>
         </a:lnSpc>
@@ -1115,7 +1063,7 @@
           <a:cs typeface="+mn-lt"/>
         </a:defRPr>
       </a:lvl5pPr>
-      <a:lvl6pPr xmlns:a="http://schemas.openxmlformats.org/drawingml/2006/main" marL="2514600" indent="-228600" algn="l">
+      <a:lvl6pPr marL="2514600" indent="-228600" algn="l">
         <a:lnSpc>
           <a:spcPct val="90000"/>
         </a:lnSpc>
@@ -1132,7 +1080,7 @@
           <a:cs typeface="+mn-lt"/>
         </a:defRPr>
       </a:lvl6pPr>
-      <a:lvl7pPr xmlns:a="http://schemas.openxmlformats.org/drawingml/2006/main" marL="2971800" indent="-228600" algn="l">
+      <a:lvl7pPr marL="2971800" indent="-228600" algn="l">
         <a:lnSpc>
           <a:spcPct val="90000"/>
         </a:lnSpc>
@@ -1149,7 +1097,7 @@
           <a:cs typeface="+mn-lt"/>
         </a:defRPr>
       </a:lvl7pPr>
-      <a:lvl8pPr xmlns:a="http://schemas.openxmlformats.org/drawingml/2006/main" marL="3429000" indent="-228600" algn="l">
+      <a:lvl8pPr marL="3429000" indent="-228600" algn="l">
         <a:lnSpc>
           <a:spcPct val="90000"/>
         </a:lnSpc>
@@ -1166,7 +1114,7 @@
           <a:cs typeface="+mn-lt"/>
         </a:defRPr>
       </a:lvl8pPr>
-      <a:lvl9pPr xmlns:a="http://schemas.openxmlformats.org/drawingml/2006/main" marL="3886200" indent="-228600" algn="l">
+      <a:lvl9pPr marL="3886200" indent="-228600" algn="l">
         <a:lnSpc>
           <a:spcPct val="90000"/>
         </a:lnSpc>
@@ -1185,7 +1133,7 @@
       </a:lvl9pPr>
     </p:bodyStyle>
     <p:otherStyle>
-      <a:lvl1pPr xmlns:a="http://schemas.openxmlformats.org/drawingml/2006/main" marL="0" algn="l">
+      <a:lvl1pPr marL="0" algn="l">
         <a:buNone/>
         <a:defRPr sz="1800">
           <a:solidFill>
@@ -1196,7 +1144,7 @@
           <a:cs typeface="+mn-lt"/>
         </a:defRPr>
       </a:lvl1pPr>
-      <a:lvl2pPr xmlns:a="http://schemas.openxmlformats.org/drawingml/2006/main" marL="457200" algn="l">
+      <a:lvl2pPr marL="457200" algn="l">
         <a:buNone/>
         <a:defRPr sz="1800">
           <a:solidFill>
@@ -1207,7 +1155,7 @@
           <a:cs typeface="+mn-lt"/>
         </a:defRPr>
       </a:lvl2pPr>
-      <a:lvl3pPr xmlns:a="http://schemas.openxmlformats.org/drawingml/2006/main" marL="914400" algn="l">
+      <a:lvl3pPr marL="914400" algn="l">
         <a:buNone/>
         <a:defRPr sz="1800">
           <a:solidFill>
@@ -1218,7 +1166,7 @@
           <a:cs typeface="+mn-lt"/>
         </a:defRPr>
       </a:lvl3pPr>
-      <a:lvl4pPr xmlns:a="http://schemas.openxmlformats.org/drawingml/2006/main" marL="1371600" algn="l">
+      <a:lvl4pPr marL="1371600" algn="l">
         <a:buNone/>
         <a:defRPr sz="1800">
           <a:solidFill>
@@ -1229,7 +1177,7 @@
           <a:cs typeface="+mn-lt"/>
         </a:defRPr>
       </a:lvl4pPr>
-      <a:lvl5pPr xmlns:a="http://schemas.openxmlformats.org/drawingml/2006/main" marL="1828800" algn="l">
+      <a:lvl5pPr marL="1828800" algn="l">
         <a:buNone/>
         <a:defRPr sz="1800">
           <a:solidFill>
@@ -1240,7 +1188,7 @@
           <a:cs typeface="+mn-lt"/>
         </a:defRPr>
       </a:lvl5pPr>
-      <a:lvl6pPr xmlns:a="http://schemas.openxmlformats.org/drawingml/2006/main" marL="2286000" algn="l">
+      <a:lvl6pPr marL="2286000" algn="l">
         <a:buNone/>
         <a:defRPr sz="1800">
           <a:solidFill>
@@ -1251,7 +1199,7 @@
           <a:cs typeface="+mn-lt"/>
         </a:defRPr>
       </a:lvl6pPr>
-      <a:lvl7pPr xmlns:a="http://schemas.openxmlformats.org/drawingml/2006/main" marL="2743200" algn="l">
+      <a:lvl7pPr marL="2743200" algn="l">
         <a:buNone/>
         <a:defRPr sz="1800">
           <a:solidFill>
@@ -1262,7 +1210,7 @@
           <a:cs typeface="+mn-lt"/>
         </a:defRPr>
       </a:lvl7pPr>
-      <a:lvl8pPr xmlns:a="http://schemas.openxmlformats.org/drawingml/2006/main" marL="3200400" algn="l">
+      <a:lvl8pPr marL="3200400" algn="l">
         <a:buNone/>
         <a:defRPr sz="1800">
           <a:solidFill>
@@ -1273,7 +1221,7 @@
           <a:cs typeface="+mn-lt"/>
         </a:defRPr>
       </a:lvl8pPr>
-      <a:lvl9pPr xmlns:a="http://schemas.openxmlformats.org/drawingml/2006/main" marL="3657600" algn="l">
+      <a:lvl9pPr marL="3657600" algn="l">
         <a:buNone/>
         <a:defRPr sz="1800">
           <a:solidFill>
@@ -1289,259 +1237,15 @@
 </p:sldMaster>
 </file>
 
-<file path=ppt/slideMasters/theme/theme2.xml><?xml version="1.0" encoding="utf-8"?>
-<a:theme xmlns:a="http://schemas.openxmlformats.org/drawingml/2006/main" name="ChatGPT">
-  <a:themeElements>
-    <a:clrScheme name="ChatGPT">
-      <a:dk1>
-        <a:srgbClr val="000000"/>
-      </a:dk1>
-      <a:lt1>
-        <a:srgbClr val="FFFFFF"/>
-      </a:lt1>
-      <a:dk2>
-        <a:srgbClr val="0E2841"/>
-      </a:dk2>
-      <a:lt2>
-        <a:srgbClr val="E8E8E8"/>
-      </a:lt2>
-      <a:accent1>
-        <a:srgbClr val="156082"/>
-      </a:accent1>
-      <a:accent2>
-        <a:srgbClr val="E97132"/>
-      </a:accent2>
-      <a:accent3>
-        <a:srgbClr val="196B24"/>
-      </a:accent3>
-      <a:accent4>
-        <a:srgbClr val="0F9ED5"/>
-      </a:accent4>
-      <a:accent5>
-        <a:srgbClr val="A02B93"/>
-      </a:accent5>
-      <a:accent6>
-        <a:srgbClr val="4EA72E"/>
-      </a:accent6>
-      <a:hlink>
-        <a:srgbClr val="467886"/>
-      </a:hlink>
-      <a:folHlink>
-        <a:srgbClr val="96607D"/>
-      </a:folHlink>
-    </a:clrScheme>
-    <a:fontScheme name="Office">
-      <a:majorFont>
-        <a:latin typeface="Calibri Light"/>
-        <a:ea typeface="Calibri Light"/>
-        <a:cs typeface="Calibri Light"/>
-      </a:majorFont>
-      <a:minorFont>
-        <a:latin typeface="Calibri"/>
-        <a:ea typeface="Calibri"/>
-        <a:cs typeface="Calibri"/>
-      </a:minorFont>
-    </a:fontScheme>
-    <a:fmtScheme name="ChatGPT">
-      <a:fillStyleLst>
-        <a:solidFill>
-          <a:schemeClr val="phClr"/>
-        </a:solidFill>
-        <a:gradFill>
-          <a:gsLst>
-            <a:gs pos="0">
-              <a:schemeClr val="phClr">
-                <a:tint val="67000"/>
-                <a:lumMod val="110000"/>
-                <a:satMod val="105000"/>
-              </a:schemeClr>
-            </a:gs>
-            <a:gs pos="50000">
-              <a:schemeClr val="phClr">
-                <a:tint val="73000"/>
-                <a:lumMod val="105000"/>
-                <a:satMod val="103000"/>
-              </a:schemeClr>
-            </a:gs>
-            <a:gs pos="100000">
-              <a:schemeClr val="phClr">
-                <a:tint val="81000"/>
-                <a:lumMod val="105000"/>
-                <a:satMod val="109000"/>
-              </a:schemeClr>
-            </a:gs>
-          </a:gsLst>
-          <a:lin ang="5400000" scaled="0"/>
-        </a:gradFill>
-        <a:gradFill>
-          <a:gsLst>
-            <a:gs pos="0">
-              <a:schemeClr val="phClr">
-                <a:tint val="94000"/>
-                <a:lumMod val="102000"/>
-                <a:satMod val="103000"/>
-              </a:schemeClr>
-            </a:gs>
-            <a:gs pos="50000">
-              <a:schemeClr val="phClr">
-                <a:shade val="100000"/>
-                <a:lumMod val="100000"/>
-                <a:satMod val="110000"/>
-              </a:schemeClr>
-            </a:gs>
-            <a:gs pos="100000">
-              <a:schemeClr val="phClr">
-                <a:shade val="78000"/>
-                <a:lumMod val="99000"/>
-                <a:satMod val="120000"/>
-              </a:schemeClr>
-            </a:gs>
-          </a:gsLst>
-          <a:lin ang="5400000" scaled="0"/>
-        </a:gradFill>
-      </a:fillStyleLst>
-      <a:lnStyleLst>
-        <a:ln w="12700">
-          <a:solidFill>
-            <a:schemeClr val="phClr"/>
-          </a:solidFill>
-          <a:prstDash val="solid"/>
-        </a:ln>
-        <a:ln w="19050">
-          <a:solidFill>
-            <a:schemeClr val="phClr"/>
-          </a:solidFill>
-          <a:prstDash val="solid"/>
-        </a:ln>
-        <a:ln w="25400">
-          <a:solidFill>
-            <a:schemeClr val="phClr"/>
-          </a:solidFill>
-          <a:prstDash val="solid"/>
-        </a:ln>
-      </a:lnStyleLst>
-      <a:effectStyleLst>
-        <a:effectStyle>
-          <a:effectLst/>
-        </a:effectStyle>
-        <a:effectStyle>
-          <a:effectLst/>
-        </a:effectStyle>
-        <a:effectStyle>
-          <a:effectLst>
-            <a:outerShdw blurRad="57150" dist="19050" dir="5400000">
-              <a:srgbClr val="000000">
-                <a:alpha val="16000"/>
-              </a:srgbClr>
-            </a:outerShdw>
-          </a:effectLst>
-        </a:effectStyle>
-        <a:effectStyle>
-          <a:effectLst>
-            <a:outerShdw blurRad="19050" dist="9525" dir="5400000">
-              <a:srgbClr val="000000">
-                <a:alpha val="6000"/>
-              </a:srgbClr>
-            </a:outerShdw>
-          </a:effectLst>
-        </a:effectStyle>
-        <a:effectStyle>
-          <a:effectLst>
-            <a:outerShdw blurRad="28575" dist="9525" dir="5400000">
-              <a:srgbClr val="000000">
-                <a:alpha val="8000"/>
-              </a:srgbClr>
-            </a:outerShdw>
-          </a:effectLst>
-        </a:effectStyle>
-        <a:effectStyle>
-          <a:effectLst>
-            <a:outerShdw blurRad="57150" dist="19050" dir="5400000">
-              <a:srgbClr val="000000">
-                <a:alpha val="10000"/>
-              </a:srgbClr>
-            </a:outerShdw>
-          </a:effectLst>
-        </a:effectStyle>
-        <a:effectStyle>
-          <a:effectLst>
-            <a:outerShdw blurRad="114300" dist="38100" dir="5400000">
-              <a:srgbClr val="000000">
-                <a:alpha val="12000"/>
-              </a:srgbClr>
-            </a:outerShdw>
-          </a:effectLst>
-        </a:effectStyle>
-        <a:effectStyle>
-          <a:effectLst>
-            <a:outerShdw blurRad="171450" dist="57150" dir="5400000">
-              <a:srgbClr val="000000">
-                <a:alpha val="16000"/>
-              </a:srgbClr>
-            </a:outerShdw>
-          </a:effectLst>
-        </a:effectStyle>
-        <a:effectStyle>
-          <a:effectLst>
-            <a:outerShdw blurRad="266700" dist="95250" dir="5400000">
-              <a:srgbClr val="000000">
-                <a:alpha val="24000"/>
-              </a:srgbClr>
-            </a:outerShdw>
-          </a:effectLst>
-        </a:effectStyle>
-      </a:effectStyleLst>
-      <a:bgFillStyleLst>
-        <a:solidFill>
-          <a:schemeClr val="phClr"/>
-        </a:solidFill>
-        <a:solidFill>
-          <a:schemeClr val="phClr">
-            <a:tint val="95000"/>
-            <a:satMod val="170000"/>
-          </a:schemeClr>
-        </a:solidFill>
-        <a:gradFill>
-          <a:gsLst>
-            <a:gs pos="0">
-              <a:schemeClr val="phClr">
-                <a:tint val="93000"/>
-                <a:shade val="98000"/>
-                <a:lumMod val="102000"/>
-                <a:satMod val="150000"/>
-              </a:schemeClr>
-            </a:gs>
-            <a:gs pos="50000">
-              <a:schemeClr val="phClr">
-                <a:tint val="98000"/>
-                <a:shade val="90000"/>
-                <a:lumMod val="103000"/>
-                <a:satMod val="130000"/>
-              </a:schemeClr>
-            </a:gs>
-            <a:gs pos="100000">
-              <a:schemeClr val="phClr">
-                <a:shade val="63000"/>
-                <a:satMod val="120000"/>
-              </a:schemeClr>
-            </a:gs>
-          </a:gsLst>
-          <a:lin ang="5400000" scaled="0"/>
-        </a:gradFill>
-      </a:bgFillStyleLst>
-    </a:fmtScheme>
-  </a:themeElements>
-</a:theme>
-</file>
-
 <file path=ppt/slides/slide1.xml><?xml version="1.0" encoding="utf-8"?>
-<p:sld xmlns:p="http://schemas.openxmlformats.org/presentationml/2006/main">
+<p:sld xmlns:a="http://schemas.openxmlformats.org/drawingml/2006/main" xmlns:r="http://schemas.openxmlformats.org/officeDocument/2006/relationships" xmlns:p="http://schemas.openxmlformats.org/presentationml/2006/main">
   <p:cSld>
     <p:bg>
       <p:bgPr>
-        <a:solidFill xmlns:a="http://schemas.openxmlformats.org/drawingml/2006/main">
+        <a:solidFill>
           <a:srgbClr val="163B32"/>
         </a:solidFill>
+        <a:effectLst/>
       </p:bgPr>
     </p:bg>
     <p:spTree>
@@ -1551,73 +1255,78 @@
         <p:nvPr/>
       </p:nvGrpSpPr>
       <p:grpSpPr>
-        <a:xfrm xmlns:a="http://schemas.openxmlformats.org/drawingml/2006/main"/>
+        <a:xfrm>
+          <a:off x="0" y="0"/>
+          <a:ext cx="0" cy="0"/>
+          <a:chOff x="0" y="0"/>
+          <a:chExt cx="0" cy="0"/>
+        </a:xfrm>
       </p:grpSpPr>
       <p:sp>
         <p:nvSpPr>
-          <p:cNvPr id="6" name="">
-            <a:extLst xmlns:a="http://schemas.openxmlformats.org/drawingml/2006/main">
+          <p:cNvPr id="6" name="Rectangle 5">
+            <a:extLst>
               <a:ext uri="{FF2B5EF4-FFF2-40B4-BE49-F238E27FC236}">
                 <a16:creationId xmlns:a16="http://schemas.microsoft.com/office/drawing/2014/main" id="{83135688-9F82-4A5F-BEE5-16A322BD8873}"/>
               </a:ext>
             </a:extLst>
           </p:cNvPr>
           <p:cNvSpPr>
-            <a:spLocks xmlns:a="http://schemas.openxmlformats.org/drawingml/2006/main" noGrp="1"/>
-          </p:cNvSpPr>
-          <p:nvPr/>
-        </p:nvSpPr>
-        <p:spPr>
-          <a:xfrm xmlns:a="http://schemas.openxmlformats.org/drawingml/2006/main">
+            <a:spLocks noGrp="1"/>
+          </p:cNvSpPr>
+          <p:nvPr/>
+        </p:nvSpPr>
+        <p:spPr>
+          <a:xfrm>
             <a:off x="685800" y="1143000"/>
             <a:ext cx="57150" cy="3162300"/>
           </a:xfrm>
-          <a:prstGeom xmlns:a="http://schemas.openxmlformats.org/drawingml/2006/main" prst="rect">
-            <a:avLst/>
-          </a:prstGeom>
-          <a:solidFill xmlns:a="http://schemas.openxmlformats.org/drawingml/2006/main">
+          <a:prstGeom prst="rect">
+            <a:avLst/>
+          </a:prstGeom>
+          <a:solidFill>
             <a:srgbClr val="D8B86A"/>
           </a:solidFill>
-          <a:ln xmlns:a="http://schemas.openxmlformats.org/drawingml/2006/main" w="0">
-            <a:noFill/>
-            <a:prstDash val="solid"/>
-          </a:ln>
-        </p:spPr>
-      </p:sp>
-      <p:sp>
-        <p:nvSpPr>
-          <p:cNvPr id="2" name="">
-            <a:extLst xmlns:a="http://schemas.openxmlformats.org/drawingml/2006/main">
+          <a:ln w="0">
+            <a:noFill/>
+            <a:prstDash val="solid"/>
+          </a:ln>
+        </p:spPr>
+      </p:sp>
+      <p:sp>
+        <p:nvSpPr>
+          <p:cNvPr id="2" name="Rectangle 1">
+            <a:extLst>
               <a:ext uri="{FF2B5EF4-FFF2-40B4-BE49-F238E27FC236}">
                 <a16:creationId xmlns:a16="http://schemas.microsoft.com/office/drawing/2014/main" id="{FD42DCDE-660C-4274-920D-BE6B84CD9378}"/>
               </a:ext>
             </a:extLst>
           </p:cNvPr>
           <p:cNvSpPr>
-            <a:spLocks xmlns:a="http://schemas.openxmlformats.org/drawingml/2006/main" noGrp="1"/>
-          </p:cNvSpPr>
-          <p:nvPr/>
-        </p:nvSpPr>
-        <p:spPr>
-          <a:xfrm xmlns:a="http://schemas.openxmlformats.org/drawingml/2006/main">
+            <a:spLocks noGrp="1"/>
+          </p:cNvSpPr>
+          <p:nvPr/>
+        </p:nvSpPr>
+        <p:spPr>
+          <a:xfrm>
             <a:off x="1066800" y="1504950"/>
             <a:ext cx="10096500" cy="1066800"/>
           </a:xfrm>
-          <a:prstGeom xmlns:a="http://schemas.openxmlformats.org/drawingml/2006/main" prst="rect">
-            <a:avLst/>
-          </a:prstGeom>
-          <a:noFill xmlns:a="http://schemas.openxmlformats.org/drawingml/2006/main"/>
-          <a:ln xmlns:a="http://schemas.openxmlformats.org/drawingml/2006/main" w="0">
-            <a:noFill/>
-            <a:prstDash val="solid"/>
-          </a:ln>
-        </p:spPr>
-        <p:txBody>
-          <a:bodyPr xmlns:a="http://schemas.openxmlformats.org/drawingml/2006/main" wrap="square" lIns="0" tIns="0" rIns="0" bIns="0" anchor="t">
-            <a:normAutofit fontScale="100000"/>
+          <a:prstGeom prst="rect">
+            <a:avLst/>
+          </a:prstGeom>
+          <a:noFill/>
+          <a:ln w="0">
+            <a:noFill/>
+            <a:prstDash val="solid"/>
+          </a:ln>
+        </p:spPr>
+        <p:txBody>
+          <a:bodyPr wrap="square" lIns="0" tIns="0" rIns="0" bIns="0" anchor="t">
+            <a:normAutofit/>
           </a:bodyPr>
-          <a:lstStyle xmlns:a="http://schemas.openxmlformats.org/drawingml/2006/main"/>
-          <a:p xmlns:a="http://schemas.openxmlformats.org/drawingml/2006/main">
+          <a:lstStyle/>
+          <a:p>
             <a:pPr algn="l">
               <a:defRPr sz="4050" b="1">
                 <a:solidFill>
@@ -1644,38 +1353,38 @@
       </p:sp>
       <p:sp>
         <p:nvSpPr>
-          <p:cNvPr id="3" name="">
-            <a:extLst xmlns:a="http://schemas.openxmlformats.org/drawingml/2006/main">
+          <p:cNvPr id="3" name="Rectangle 2">
+            <a:extLst>
               <a:ext uri="{FF2B5EF4-FFF2-40B4-BE49-F238E27FC236}">
                 <a16:creationId xmlns:a16="http://schemas.microsoft.com/office/drawing/2014/main" id="{54846424-65B5-437C-A23F-2D0CF6578C2C}"/>
               </a:ext>
             </a:extLst>
           </p:cNvPr>
           <p:cNvSpPr>
-            <a:spLocks xmlns:a="http://schemas.openxmlformats.org/drawingml/2006/main" noGrp="1"/>
-          </p:cNvSpPr>
-          <p:nvPr/>
-        </p:nvSpPr>
-        <p:spPr>
-          <a:xfrm xmlns:a="http://schemas.openxmlformats.org/drawingml/2006/main">
+            <a:spLocks noGrp="1"/>
+          </p:cNvSpPr>
+          <p:nvPr/>
+        </p:nvSpPr>
+        <p:spPr>
+          <a:xfrm>
             <a:off x="1104900" y="2724150"/>
             <a:ext cx="7048500" cy="552450"/>
           </a:xfrm>
-          <a:prstGeom xmlns:a="http://schemas.openxmlformats.org/drawingml/2006/main" prst="rect">
-            <a:avLst/>
-          </a:prstGeom>
-          <a:noFill xmlns:a="http://schemas.openxmlformats.org/drawingml/2006/main"/>
-          <a:ln xmlns:a="http://schemas.openxmlformats.org/drawingml/2006/main" w="0">
-            <a:noFill/>
-            <a:prstDash val="solid"/>
-          </a:ln>
-        </p:spPr>
-        <p:txBody>
-          <a:bodyPr xmlns:a="http://schemas.openxmlformats.org/drawingml/2006/main" wrap="square" lIns="0" tIns="0" rIns="0" bIns="0" anchor="t">
-            <a:normAutofit fontScale="100000"/>
+          <a:prstGeom prst="rect">
+            <a:avLst/>
+          </a:prstGeom>
+          <a:noFill/>
+          <a:ln w="0">
+            <a:noFill/>
+            <a:prstDash val="solid"/>
+          </a:ln>
+        </p:spPr>
+        <p:txBody>
+          <a:bodyPr wrap="square" lIns="0" tIns="0" rIns="0" bIns="0" anchor="t">
+            <a:normAutofit/>
           </a:bodyPr>
-          <a:lstStyle xmlns:a="http://schemas.openxmlformats.org/drawingml/2006/main"/>
-          <a:p xmlns:a="http://schemas.openxmlformats.org/drawingml/2006/main">
+          <a:lstStyle/>
+          <a:p>
             <a:pPr algn="l">
               <a:defRPr sz="2700" b="0">
                 <a:solidFill>
@@ -1702,38 +1411,38 @@
       </p:sp>
       <p:sp>
         <p:nvSpPr>
-          <p:cNvPr id="4" name="">
-            <a:extLst xmlns:a="http://schemas.openxmlformats.org/drawingml/2006/main">
+          <p:cNvPr id="4" name="Rectangle 3">
+            <a:extLst>
               <a:ext uri="{FF2B5EF4-FFF2-40B4-BE49-F238E27FC236}">
                 <a16:creationId xmlns:a16="http://schemas.microsoft.com/office/drawing/2014/main" id="{492FACD1-FACB-48F1-8A55-6F7C377E8C03}"/>
               </a:ext>
             </a:extLst>
           </p:cNvPr>
           <p:cNvSpPr>
-            <a:spLocks xmlns:a="http://schemas.openxmlformats.org/drawingml/2006/main" noGrp="1"/>
-          </p:cNvSpPr>
-          <p:nvPr/>
-        </p:nvSpPr>
-        <p:spPr>
-          <a:xfrm xmlns:a="http://schemas.openxmlformats.org/drawingml/2006/main">
+            <a:spLocks noGrp="1"/>
+          </p:cNvSpPr>
+          <p:nvPr/>
+        </p:nvSpPr>
+        <p:spPr>
+          <a:xfrm>
             <a:off x="1104900" y="3638550"/>
             <a:ext cx="8572500" cy="438150"/>
           </a:xfrm>
-          <a:prstGeom xmlns:a="http://schemas.openxmlformats.org/drawingml/2006/main" prst="rect">
-            <a:avLst/>
-          </a:prstGeom>
-          <a:noFill xmlns:a="http://schemas.openxmlformats.org/drawingml/2006/main"/>
-          <a:ln xmlns:a="http://schemas.openxmlformats.org/drawingml/2006/main" w="0">
-            <a:noFill/>
-            <a:prstDash val="solid"/>
-          </a:ln>
-        </p:spPr>
-        <p:txBody>
-          <a:bodyPr xmlns:a="http://schemas.openxmlformats.org/drawingml/2006/main" wrap="square" lIns="0" tIns="0" rIns="0" bIns="0" anchor="t">
-            <a:normAutofit fontScale="100000"/>
+          <a:prstGeom prst="rect">
+            <a:avLst/>
+          </a:prstGeom>
+          <a:noFill/>
+          <a:ln w="0">
+            <a:noFill/>
+            <a:prstDash val="solid"/>
+          </a:ln>
+        </p:spPr>
+        <p:txBody>
+          <a:bodyPr wrap="square" lIns="0" tIns="0" rIns="0" bIns="0" anchor="t">
+            <a:normAutofit/>
           </a:bodyPr>
-          <a:lstStyle xmlns:a="http://schemas.openxmlformats.org/drawingml/2006/main"/>
-          <a:p xmlns:a="http://schemas.openxmlformats.org/drawingml/2006/main">
+          <a:lstStyle/>
+          <a:p>
             <a:pPr algn="l">
               <a:defRPr sz="1950" b="0">
                 <a:solidFill>
@@ -1760,38 +1469,38 @@
       </p:sp>
       <p:sp>
         <p:nvSpPr>
-          <p:cNvPr id="5" name="">
-            <a:extLst xmlns:a="http://schemas.openxmlformats.org/drawingml/2006/main">
+          <p:cNvPr id="5" name="Rectangle 4">
+            <a:extLst>
               <a:ext uri="{FF2B5EF4-FFF2-40B4-BE49-F238E27FC236}">
                 <a16:creationId xmlns:a16="http://schemas.microsoft.com/office/drawing/2014/main" id="{FBB38E97-C903-4EFC-BCB7-E63D8B0EA984}"/>
               </a:ext>
             </a:extLst>
           </p:cNvPr>
           <p:cNvSpPr>
-            <a:spLocks xmlns:a="http://schemas.openxmlformats.org/drawingml/2006/main" noGrp="1"/>
-          </p:cNvSpPr>
-          <p:nvPr/>
-        </p:nvSpPr>
-        <p:spPr>
-          <a:xfrm xmlns:a="http://schemas.openxmlformats.org/drawingml/2006/main">
+            <a:spLocks noGrp="1"/>
+          </p:cNvSpPr>
+          <p:nvPr/>
+        </p:nvSpPr>
+        <p:spPr>
+          <a:xfrm>
             <a:off x="1104900" y="4953000"/>
             <a:ext cx="5715000" cy="361950"/>
           </a:xfrm>
-          <a:prstGeom xmlns:a="http://schemas.openxmlformats.org/drawingml/2006/main" prst="rect">
-            <a:avLst/>
-          </a:prstGeom>
-          <a:noFill xmlns:a="http://schemas.openxmlformats.org/drawingml/2006/main"/>
-          <a:ln xmlns:a="http://schemas.openxmlformats.org/drawingml/2006/main" w="0">
-            <a:noFill/>
-            <a:prstDash val="solid"/>
-          </a:ln>
-        </p:spPr>
-        <p:txBody>
-          <a:bodyPr xmlns:a="http://schemas.openxmlformats.org/drawingml/2006/main" wrap="square" lIns="0" tIns="0" rIns="0" bIns="0" anchor="t">
-            <a:normAutofit fontScale="100000"/>
+          <a:prstGeom prst="rect">
+            <a:avLst/>
+          </a:prstGeom>
+          <a:noFill/>
+          <a:ln w="0">
+            <a:noFill/>
+            <a:prstDash val="solid"/>
+          </a:ln>
+        </p:spPr>
+        <p:txBody>
+          <a:bodyPr wrap="square" lIns="0" tIns="0" rIns="0" bIns="0" anchor="t">
+            <a:normAutofit/>
           </a:bodyPr>
-          <a:lstStyle xmlns:a="http://schemas.openxmlformats.org/drawingml/2006/main"/>
-          <a:p xmlns:a="http://schemas.openxmlformats.org/drawingml/2006/main">
+          <a:lstStyle/>
+          <a:p>
             <a:pPr algn="l">
               <a:defRPr sz="1650" b="0">
                 <a:solidFill>
@@ -1823,17 +1532,21 @@
       </p:ext>
     </p:extLst>
   </p:cSld>
+  <p:clrMapOvr>
+    <a:masterClrMapping/>
+  </p:clrMapOvr>
 </p:sld>
 </file>
 
 <file path=ppt/slides/slide2.xml><?xml version="1.0" encoding="utf-8"?>
-<p:sld xmlns:p="http://schemas.openxmlformats.org/presentationml/2006/main">
+<p:sld xmlns:a="http://schemas.openxmlformats.org/drawingml/2006/main" xmlns:r="http://schemas.openxmlformats.org/officeDocument/2006/relationships" xmlns:p="http://schemas.openxmlformats.org/presentationml/2006/main">
   <p:cSld>
     <p:bg>
       <p:bgPr>
-        <a:solidFill xmlns:a="http://schemas.openxmlformats.org/drawingml/2006/main">
+        <a:solidFill>
           <a:srgbClr val="F5F1E7"/>
         </a:solidFill>
+        <a:effectLst/>
       </p:bgPr>
     </p:bg>
     <p:spTree>
@@ -1843,42 +1556,47 @@
         <p:nvPr/>
       </p:nvGrpSpPr>
       <p:grpSpPr>
-        <a:xfrm xmlns:a="http://schemas.openxmlformats.org/drawingml/2006/main"/>
+        <a:xfrm>
+          <a:off x="0" y="0"/>
+          <a:ext cx="0" cy="0"/>
+          <a:chOff x="0" y="0"/>
+          <a:chExt cx="0" cy="0"/>
+        </a:xfrm>
       </p:grpSpPr>
       <p:sp>
         <p:nvSpPr>
-          <p:cNvPr id="9" name="">
-            <a:extLst xmlns:a="http://schemas.openxmlformats.org/drawingml/2006/main">
+          <p:cNvPr id="9" name="Rectangle 8">
+            <a:extLst>
               <a:ext uri="{FF2B5EF4-FFF2-40B4-BE49-F238E27FC236}">
                 <a16:creationId xmlns:a16="http://schemas.microsoft.com/office/drawing/2014/main" id="{9F267A76-5545-43BD-A4FC-AB7FC0307ACE}"/>
               </a:ext>
             </a:extLst>
           </p:cNvPr>
           <p:cNvSpPr>
-            <a:spLocks xmlns:a="http://schemas.openxmlformats.org/drawingml/2006/main" noGrp="1"/>
-          </p:cNvSpPr>
-          <p:nvPr/>
-        </p:nvSpPr>
-        <p:spPr>
-          <a:xfrm xmlns:a="http://schemas.openxmlformats.org/drawingml/2006/main">
+            <a:spLocks noGrp="1"/>
+          </p:cNvSpPr>
+          <p:nvPr/>
+        </p:nvSpPr>
+        <p:spPr>
+          <a:xfrm>
             <a:off x="685800" y="495300"/>
             <a:ext cx="10820400" cy="609600"/>
           </a:xfrm>
-          <a:prstGeom xmlns:a="http://schemas.openxmlformats.org/drawingml/2006/main" prst="rect">
-            <a:avLst/>
-          </a:prstGeom>
-          <a:noFill xmlns:a="http://schemas.openxmlformats.org/drawingml/2006/main"/>
-          <a:ln xmlns:a="http://schemas.openxmlformats.org/drawingml/2006/main" w="0">
-            <a:noFill/>
-            <a:prstDash val="solid"/>
-          </a:ln>
-        </p:spPr>
-        <p:txBody>
-          <a:bodyPr xmlns:a="http://schemas.openxmlformats.org/drawingml/2006/main" wrap="square" lIns="0" tIns="0" rIns="0" bIns="0" anchor="t">
-            <a:normAutofit fontScale="100000"/>
+          <a:prstGeom prst="rect">
+            <a:avLst/>
+          </a:prstGeom>
+          <a:noFill/>
+          <a:ln w="0">
+            <a:noFill/>
+            <a:prstDash val="solid"/>
+          </a:ln>
+        </p:spPr>
+        <p:txBody>
+          <a:bodyPr wrap="square" lIns="0" tIns="0" rIns="0" bIns="0" anchor="t">
+            <a:normAutofit/>
           </a:bodyPr>
-          <a:lstStyle xmlns:a="http://schemas.openxmlformats.org/drawingml/2006/main"/>
-          <a:p xmlns:a="http://schemas.openxmlformats.org/drawingml/2006/main">
+          <a:lstStyle/>
+          <a:p>
             <a:pPr algn="l">
               <a:defRPr sz="3300" b="1">
                 <a:solidFill>
@@ -1905,69 +1623,69 @@
       </p:sp>
       <p:sp>
         <p:nvSpPr>
-          <p:cNvPr id="2" name="">
-            <a:extLst xmlns:a="http://schemas.openxmlformats.org/drawingml/2006/main">
+          <p:cNvPr id="2" name="Rectangle 1">
+            <a:extLst>
               <a:ext uri="{FF2B5EF4-FFF2-40B4-BE49-F238E27FC236}">
                 <a16:creationId xmlns:a16="http://schemas.microsoft.com/office/drawing/2014/main" id="{3FD852BB-4319-45C5-9DCC-C2A83D1A0B45}"/>
               </a:ext>
             </a:extLst>
           </p:cNvPr>
           <p:cNvSpPr>
-            <a:spLocks xmlns:a="http://schemas.openxmlformats.org/drawingml/2006/main" noGrp="1"/>
-          </p:cNvSpPr>
-          <p:nvPr/>
-        </p:nvSpPr>
-        <p:spPr>
-          <a:xfrm xmlns:a="http://schemas.openxmlformats.org/drawingml/2006/main">
+            <a:spLocks noGrp="1"/>
+          </p:cNvSpPr>
+          <p:nvPr/>
+        </p:nvSpPr>
+        <p:spPr>
+          <a:xfrm>
             <a:off x="685800" y="1219200"/>
             <a:ext cx="800100" cy="38100"/>
           </a:xfrm>
-          <a:prstGeom xmlns:a="http://schemas.openxmlformats.org/drawingml/2006/main" prst="rect">
-            <a:avLst/>
-          </a:prstGeom>
-          <a:solidFill xmlns:a="http://schemas.openxmlformats.org/drawingml/2006/main">
+          <a:prstGeom prst="rect">
+            <a:avLst/>
+          </a:prstGeom>
+          <a:solidFill>
             <a:srgbClr val="D8B86A"/>
           </a:solidFill>
-          <a:ln xmlns:a="http://schemas.openxmlformats.org/drawingml/2006/main" w="0">
-            <a:noFill/>
-            <a:prstDash val="solid"/>
-          </a:ln>
-        </p:spPr>
-      </p:sp>
-      <p:sp>
-        <p:nvSpPr>
-          <p:cNvPr id="3" name="">
-            <a:extLst xmlns:a="http://schemas.openxmlformats.org/drawingml/2006/main">
+          <a:ln w="0">
+            <a:noFill/>
+            <a:prstDash val="solid"/>
+          </a:ln>
+        </p:spPr>
+      </p:sp>
+      <p:sp>
+        <p:nvSpPr>
+          <p:cNvPr id="3" name="Rectangle 2">
+            <a:extLst>
               <a:ext uri="{FF2B5EF4-FFF2-40B4-BE49-F238E27FC236}">
                 <a16:creationId xmlns:a16="http://schemas.microsoft.com/office/drawing/2014/main" id="{44854403-0976-4B0F-BA5A-34CEDA3C164B}"/>
               </a:ext>
             </a:extLst>
           </p:cNvPr>
           <p:cNvSpPr>
-            <a:spLocks xmlns:a="http://schemas.openxmlformats.org/drawingml/2006/main" noGrp="1"/>
-          </p:cNvSpPr>
-          <p:nvPr/>
-        </p:nvSpPr>
-        <p:spPr>
-          <a:xfrm xmlns:a="http://schemas.openxmlformats.org/drawingml/2006/main">
+            <a:spLocks noGrp="1"/>
+          </p:cNvSpPr>
+          <p:nvPr/>
+        </p:nvSpPr>
+        <p:spPr>
+          <a:xfrm>
             <a:off x="800100" y="1752600"/>
             <a:ext cx="4095750" cy="400050"/>
           </a:xfrm>
-          <a:prstGeom xmlns:a="http://schemas.openxmlformats.org/drawingml/2006/main" prst="rect">
-            <a:avLst/>
-          </a:prstGeom>
-          <a:noFill xmlns:a="http://schemas.openxmlformats.org/drawingml/2006/main"/>
-          <a:ln xmlns:a="http://schemas.openxmlformats.org/drawingml/2006/main" w="0">
-            <a:noFill/>
-            <a:prstDash val="solid"/>
-          </a:ln>
-        </p:spPr>
-        <p:txBody>
-          <a:bodyPr xmlns:a="http://schemas.openxmlformats.org/drawingml/2006/main" wrap="square" lIns="0" tIns="0" rIns="0" bIns="0" anchor="t">
-            <a:normAutofit fontScale="100000"/>
+          <a:prstGeom prst="rect">
+            <a:avLst/>
+          </a:prstGeom>
+          <a:noFill/>
+          <a:ln w="0">
+            <a:noFill/>
+            <a:prstDash val="solid"/>
+          </a:ln>
+        </p:spPr>
+        <p:txBody>
+          <a:bodyPr wrap="square" lIns="0" tIns="0" rIns="0" bIns="0" anchor="t">
+            <a:normAutofit/>
           </a:bodyPr>
-          <a:lstStyle xmlns:a="http://schemas.openxmlformats.org/drawingml/2006/main"/>
-          <a:p xmlns:a="http://schemas.openxmlformats.org/drawingml/2006/main">
+          <a:lstStyle/>
+          <a:p>
             <a:pPr algn="l">
               <a:defRPr sz="2175" b="1">
                 <a:solidFill>
@@ -1994,38 +1712,38 @@
       </p:sp>
       <p:sp>
         <p:nvSpPr>
-          <p:cNvPr id="4" name="">
-            <a:extLst xmlns:a="http://schemas.openxmlformats.org/drawingml/2006/main">
+          <p:cNvPr id="4" name="Rectangle 3">
+            <a:extLst>
               <a:ext uri="{FF2B5EF4-FFF2-40B4-BE49-F238E27FC236}">
                 <a16:creationId xmlns:a16="http://schemas.microsoft.com/office/drawing/2014/main" id="{E717FF60-DB8E-4D49-80CC-4B699076C11B}"/>
               </a:ext>
             </a:extLst>
           </p:cNvPr>
           <p:cNvSpPr>
-            <a:spLocks xmlns:a="http://schemas.openxmlformats.org/drawingml/2006/main" noGrp="1"/>
-          </p:cNvSpPr>
-          <p:nvPr/>
-        </p:nvSpPr>
-        <p:spPr>
-          <a:xfrm xmlns:a="http://schemas.openxmlformats.org/drawingml/2006/main">
+            <a:spLocks noGrp="1"/>
+          </p:cNvSpPr>
+          <p:nvPr/>
+        </p:nvSpPr>
+        <p:spPr>
+          <a:xfrm>
             <a:off x="800100" y="2266950"/>
             <a:ext cx="4476750" cy="2333625"/>
           </a:xfrm>
-          <a:prstGeom xmlns:a="http://schemas.openxmlformats.org/drawingml/2006/main" prst="rect">
-            <a:avLst/>
-          </a:prstGeom>
-          <a:noFill xmlns:a="http://schemas.openxmlformats.org/drawingml/2006/main"/>
-          <a:ln xmlns:a="http://schemas.openxmlformats.org/drawingml/2006/main" w="0">
-            <a:noFill/>
-            <a:prstDash val="solid"/>
-          </a:ln>
-        </p:spPr>
-        <p:txBody>
-          <a:bodyPr xmlns:a="http://schemas.openxmlformats.org/drawingml/2006/main" wrap="square" lIns="0" tIns="0" rIns="0" bIns="0" anchor="t">
-            <a:normAutofit fontScale="100000"/>
+          <a:prstGeom prst="rect">
+            <a:avLst/>
+          </a:prstGeom>
+          <a:noFill/>
+          <a:ln w="0">
+            <a:noFill/>
+            <a:prstDash val="solid"/>
+          </a:ln>
+        </p:spPr>
+        <p:txBody>
+          <a:bodyPr wrap="square" lIns="0" tIns="0" rIns="0" bIns="0" anchor="t">
+            <a:normAutofit/>
           </a:bodyPr>
-          <a:lstStyle xmlns:a="http://schemas.openxmlformats.org/drawingml/2006/main"/>
-          <a:p xmlns:a="http://schemas.openxmlformats.org/drawingml/2006/main">
+          <a:lstStyle/>
+          <a:p>
             <a:pPr algn="l">
               <a:defRPr sz="2025" b="0">
                 <a:solidFill>
@@ -2052,38 +1770,38 @@
       </p:sp>
       <p:sp>
         <p:nvSpPr>
-          <p:cNvPr id="5" name="">
-            <a:extLst xmlns:a="http://schemas.openxmlformats.org/drawingml/2006/main">
+          <p:cNvPr id="5" name="Rectangle 4">
+            <a:extLst>
               <a:ext uri="{FF2B5EF4-FFF2-40B4-BE49-F238E27FC236}">
                 <a16:creationId xmlns:a16="http://schemas.microsoft.com/office/drawing/2014/main" id="{1DDC0197-E990-400F-AC37-4FB9474863D8}"/>
               </a:ext>
             </a:extLst>
           </p:cNvPr>
           <p:cNvSpPr>
-            <a:spLocks xmlns:a="http://schemas.openxmlformats.org/drawingml/2006/main" noGrp="1"/>
-          </p:cNvSpPr>
-          <p:nvPr/>
-        </p:nvSpPr>
-        <p:spPr>
-          <a:xfrm xmlns:a="http://schemas.openxmlformats.org/drawingml/2006/main">
+            <a:spLocks noGrp="1"/>
+          </p:cNvSpPr>
+          <p:nvPr/>
+        </p:nvSpPr>
+        <p:spPr>
+          <a:xfrm>
             <a:off x="800100" y="4857750"/>
             <a:ext cx="4476750" cy="952500"/>
           </a:xfrm>
-          <a:prstGeom xmlns:a="http://schemas.openxmlformats.org/drawingml/2006/main" prst="rect">
-            <a:avLst/>
-          </a:prstGeom>
-          <a:noFill xmlns:a="http://schemas.openxmlformats.org/drawingml/2006/main"/>
-          <a:ln xmlns:a="http://schemas.openxmlformats.org/drawingml/2006/main" w="0">
-            <a:noFill/>
-            <a:prstDash val="solid"/>
-          </a:ln>
-        </p:spPr>
-        <p:txBody>
-          <a:bodyPr xmlns:a="http://schemas.openxmlformats.org/drawingml/2006/main" wrap="square" lIns="0" tIns="0" rIns="0" bIns="0" anchor="t">
-            <a:normAutofit fontScale="100000"/>
+          <a:prstGeom prst="rect">
+            <a:avLst/>
+          </a:prstGeom>
+          <a:noFill/>
+          <a:ln w="0">
+            <a:noFill/>
+            <a:prstDash val="solid"/>
+          </a:ln>
+        </p:spPr>
+        <p:txBody>
+          <a:bodyPr wrap="square" lIns="0" tIns="0" rIns="0" bIns="0" anchor="t">
+            <a:normAutofit/>
           </a:bodyPr>
-          <a:lstStyle xmlns:a="http://schemas.openxmlformats.org/drawingml/2006/main"/>
-          <a:p xmlns:a="http://schemas.openxmlformats.org/drawingml/2006/main">
+          <a:lstStyle/>
+          <a:p>
             <a:pPr algn="l">
               <a:defRPr sz="1650" b="0">
                 <a:solidFill>
@@ -2110,69 +1828,69 @@
       </p:sp>
       <p:sp>
         <p:nvSpPr>
-          <p:cNvPr id="6" name="">
-            <a:extLst xmlns:a="http://schemas.openxmlformats.org/drawingml/2006/main">
+          <p:cNvPr id="6" name="Rectangle 5">
+            <a:extLst>
               <a:ext uri="{FF2B5EF4-FFF2-40B4-BE49-F238E27FC236}">
                 <a16:creationId xmlns:a16="http://schemas.microsoft.com/office/drawing/2014/main" id="{D62EF455-4C21-41FB-9B0F-2D109662AE34}"/>
               </a:ext>
             </a:extLst>
           </p:cNvPr>
           <p:cNvSpPr>
-            <a:spLocks xmlns:a="http://schemas.openxmlformats.org/drawingml/2006/main" noGrp="1"/>
-          </p:cNvSpPr>
-          <p:nvPr/>
-        </p:nvSpPr>
-        <p:spPr>
-          <a:xfrm xmlns:a="http://schemas.openxmlformats.org/drawingml/2006/main">
+            <a:spLocks noGrp="1"/>
+          </p:cNvSpPr>
+          <p:nvPr/>
+        </p:nvSpPr>
+        <p:spPr>
+          <a:xfrm>
             <a:off x="5829300" y="1752600"/>
             <a:ext cx="19050" cy="4057650"/>
           </a:xfrm>
-          <a:prstGeom xmlns:a="http://schemas.openxmlformats.org/drawingml/2006/main" prst="rect">
-            <a:avLst/>
-          </a:prstGeom>
-          <a:solidFill xmlns:a="http://schemas.openxmlformats.org/drawingml/2006/main">
+          <a:prstGeom prst="rect">
+            <a:avLst/>
+          </a:prstGeom>
+          <a:solidFill>
             <a:srgbClr val="C9D2CB"/>
           </a:solidFill>
-          <a:ln xmlns:a="http://schemas.openxmlformats.org/drawingml/2006/main" w="0">
-            <a:noFill/>
-            <a:prstDash val="solid"/>
-          </a:ln>
-        </p:spPr>
-      </p:sp>
-      <p:sp>
-        <p:nvSpPr>
-          <p:cNvPr id="7" name="">
-            <a:extLst xmlns:a="http://schemas.openxmlformats.org/drawingml/2006/main">
+          <a:ln w="0">
+            <a:noFill/>
+            <a:prstDash val="solid"/>
+          </a:ln>
+        </p:spPr>
+      </p:sp>
+      <p:sp>
+        <p:nvSpPr>
+          <p:cNvPr id="7" name="Rectangle 6">
+            <a:extLst>
               <a:ext uri="{FF2B5EF4-FFF2-40B4-BE49-F238E27FC236}">
                 <a16:creationId xmlns:a16="http://schemas.microsoft.com/office/drawing/2014/main" id="{F3D79ADC-3E49-41EA-AE23-D385E2B83C7C}"/>
               </a:ext>
             </a:extLst>
           </p:cNvPr>
           <p:cNvSpPr>
-            <a:spLocks xmlns:a="http://schemas.openxmlformats.org/drawingml/2006/main" noGrp="1"/>
-          </p:cNvSpPr>
-          <p:nvPr/>
-        </p:nvSpPr>
-        <p:spPr>
-          <a:xfrm xmlns:a="http://schemas.openxmlformats.org/drawingml/2006/main">
+            <a:spLocks noGrp="1"/>
+          </p:cNvSpPr>
+          <p:nvPr/>
+        </p:nvSpPr>
+        <p:spPr>
+          <a:xfrm>
             <a:off x="6286500" y="1752600"/>
             <a:ext cx="4667250" cy="400050"/>
           </a:xfrm>
-          <a:prstGeom xmlns:a="http://schemas.openxmlformats.org/drawingml/2006/main" prst="rect">
-            <a:avLst/>
-          </a:prstGeom>
-          <a:noFill xmlns:a="http://schemas.openxmlformats.org/drawingml/2006/main"/>
-          <a:ln xmlns:a="http://schemas.openxmlformats.org/drawingml/2006/main" w="0">
-            <a:noFill/>
-            <a:prstDash val="solid"/>
-          </a:ln>
-        </p:spPr>
-        <p:txBody>
-          <a:bodyPr xmlns:a="http://schemas.openxmlformats.org/drawingml/2006/main" wrap="square" lIns="0" tIns="0" rIns="0" bIns="0" anchor="t">
-            <a:normAutofit fontScale="100000"/>
+          <a:prstGeom prst="rect">
+            <a:avLst/>
+          </a:prstGeom>
+          <a:noFill/>
+          <a:ln w="0">
+            <a:noFill/>
+            <a:prstDash val="solid"/>
+          </a:ln>
+        </p:spPr>
+        <p:txBody>
+          <a:bodyPr wrap="square" lIns="0" tIns="0" rIns="0" bIns="0" anchor="t">
+            <a:normAutofit/>
           </a:bodyPr>
-          <a:lstStyle xmlns:a="http://schemas.openxmlformats.org/drawingml/2006/main"/>
-          <a:p xmlns:a="http://schemas.openxmlformats.org/drawingml/2006/main">
+          <a:lstStyle/>
+          <a:p>
             <a:pPr algn="l">
               <a:defRPr sz="2175" b="1">
                 <a:solidFill>
@@ -2199,38 +1917,38 @@
       </p:sp>
       <p:sp>
         <p:nvSpPr>
-          <p:cNvPr id="8" name="">
-            <a:extLst xmlns:a="http://schemas.openxmlformats.org/drawingml/2006/main">
+          <p:cNvPr id="8" name="Rectangle 7">
+            <a:extLst>
               <a:ext uri="{FF2B5EF4-FFF2-40B4-BE49-F238E27FC236}">
                 <a16:creationId xmlns:a16="http://schemas.microsoft.com/office/drawing/2014/main" id="{13EA67D6-8877-461D-9557-EC045F4781F5}"/>
               </a:ext>
             </a:extLst>
           </p:cNvPr>
           <p:cNvSpPr>
-            <a:spLocks xmlns:a="http://schemas.openxmlformats.org/drawingml/2006/main" noGrp="1"/>
-          </p:cNvSpPr>
-          <p:nvPr/>
-        </p:nvSpPr>
-        <p:spPr>
-          <a:xfrm xmlns:a="http://schemas.openxmlformats.org/drawingml/2006/main">
+            <a:spLocks noGrp="1"/>
+          </p:cNvSpPr>
+          <p:nvPr/>
+        </p:nvSpPr>
+        <p:spPr>
+          <a:xfrm>
             <a:off x="6286500" y="2266950"/>
             <a:ext cx="5143500" cy="3429000"/>
           </a:xfrm>
-          <a:prstGeom xmlns:a="http://schemas.openxmlformats.org/drawingml/2006/main" prst="rect">
-            <a:avLst/>
-          </a:prstGeom>
-          <a:noFill xmlns:a="http://schemas.openxmlformats.org/drawingml/2006/main"/>
-          <a:ln xmlns:a="http://schemas.openxmlformats.org/drawingml/2006/main" w="0">
-            <a:noFill/>
-            <a:prstDash val="solid"/>
-          </a:ln>
-        </p:spPr>
-        <p:txBody>
-          <a:bodyPr xmlns:a="http://schemas.openxmlformats.org/drawingml/2006/main" wrap="square" lIns="0" tIns="0" rIns="0" bIns="0" anchor="t">
-            <a:normAutofit fontScale="100000"/>
+          <a:prstGeom prst="rect">
+            <a:avLst/>
+          </a:prstGeom>
+          <a:noFill/>
+          <a:ln w="0">
+            <a:noFill/>
+            <a:prstDash val="solid"/>
+          </a:ln>
+        </p:spPr>
+        <p:txBody>
+          <a:bodyPr wrap="square" lIns="0" tIns="0" rIns="0" bIns="0" anchor="t">
+            <a:normAutofit/>
           </a:bodyPr>
-          <a:lstStyle xmlns:a="http://schemas.openxmlformats.org/drawingml/2006/main"/>
-          <a:p xmlns:a="http://schemas.openxmlformats.org/drawingml/2006/main">
+          <a:lstStyle/>
+          <a:p>
             <a:pPr algn="l">
               <a:defRPr sz="1875" b="0">
                 <a:solidFill>
@@ -2253,7 +1971,7 @@
               <a:t>Build and shuffle a 52-card deck</a:t>
             </a:r>
           </a:p>
-          <a:p xmlns:a="http://schemas.openxmlformats.org/drawingml/2006/main">
+          <a:p>
             <a:pPr algn="l">
               <a:defRPr sz="1875" b="0">
                 <a:solidFill>
@@ -2276,7 +1994,7 @@
               <a:t>Deal two private cards to each player</a:t>
             </a:r>
           </a:p>
-          <a:p xmlns:a="http://schemas.openxmlformats.org/drawingml/2006/main">
+          <a:p>
             <a:pPr algn="l">
               <a:defRPr sz="1875" b="0">
                 <a:solidFill>
@@ -2299,7 +2017,7 @@
               <a:t>Display each player's cards in the terminal</a:t>
             </a:r>
           </a:p>
-          <a:p xmlns:a="http://schemas.openxmlformats.org/drawingml/2006/main">
+          <a:p>
             <a:pPr algn="l">
               <a:defRPr sz="1875" b="0">
                 <a:solidFill>
@@ -2322,7 +2040,7 @@
               <a:t>Use Card, Deck, Player, and Game classes</a:t>
             </a:r>
           </a:p>
-          <a:p xmlns:a="http://schemas.openxmlformats.org/drawingml/2006/main">
+          <a:p>
             <a:pPr algn="l">
               <a:defRPr sz="1875" b="0">
                 <a:solidFill>
@@ -2345,7 +2063,7 @@
               <a:t>No betting or community cards yet</a:t>
             </a:r>
           </a:p>
-          <a:p xmlns:a="http://schemas.openxmlformats.org/drawingml/2006/main">
+          <a:p>
             <a:pPr algn="l">
               <a:defRPr sz="1875" b="0">
                 <a:solidFill>
@@ -2377,17 +2095,21 @@
       </p:ext>
     </p:extLst>
   </p:cSld>
+  <p:clrMapOvr>
+    <a:masterClrMapping/>
+  </p:clrMapOvr>
 </p:sld>
 </file>
 
 <file path=ppt/slides/slide3.xml><?xml version="1.0" encoding="utf-8"?>
-<p:sld xmlns:p="http://schemas.openxmlformats.org/presentationml/2006/main">
+<p:sld xmlns:a="http://schemas.openxmlformats.org/drawingml/2006/main" xmlns:r="http://schemas.openxmlformats.org/officeDocument/2006/relationships" xmlns:p="http://schemas.openxmlformats.org/presentationml/2006/main">
   <p:cSld>
     <p:bg>
       <p:bgPr>
-        <a:solidFill xmlns:a="http://schemas.openxmlformats.org/drawingml/2006/main">
+        <a:solidFill>
           <a:srgbClr val="FFFDF8"/>
         </a:solidFill>
+        <a:effectLst/>
       </p:bgPr>
     </p:bg>
     <p:spTree>
@@ -2397,42 +2119,47 @@
         <p:nvPr/>
       </p:nvGrpSpPr>
       <p:grpSpPr>
-        <a:xfrm xmlns:a="http://schemas.openxmlformats.org/drawingml/2006/main"/>
+        <a:xfrm>
+          <a:off x="0" y="0"/>
+          <a:ext cx="0" cy="0"/>
+          <a:chOff x="0" y="0"/>
+          <a:chExt cx="0" cy="0"/>
+        </a:xfrm>
       </p:grpSpPr>
       <p:sp>
         <p:nvSpPr>
-          <p:cNvPr id="29" name="">
-            <a:extLst xmlns:a="http://schemas.openxmlformats.org/drawingml/2006/main">
+          <p:cNvPr id="29" name="Rectangle 28">
+            <a:extLst>
               <a:ext uri="{FF2B5EF4-FFF2-40B4-BE49-F238E27FC236}">
                 <a16:creationId xmlns:a16="http://schemas.microsoft.com/office/drawing/2014/main" id="{12EC5290-52E3-4086-B293-0660CE346EFB}"/>
               </a:ext>
             </a:extLst>
           </p:cNvPr>
           <p:cNvSpPr>
-            <a:spLocks xmlns:a="http://schemas.openxmlformats.org/drawingml/2006/main" noGrp="1"/>
-          </p:cNvSpPr>
-          <p:nvPr/>
-        </p:nvSpPr>
-        <p:spPr>
-          <a:xfrm xmlns:a="http://schemas.openxmlformats.org/drawingml/2006/main">
+            <a:spLocks noGrp="1"/>
+          </p:cNvSpPr>
+          <p:nvPr/>
+        </p:nvSpPr>
+        <p:spPr>
+          <a:xfrm>
             <a:off x="685800" y="495300"/>
             <a:ext cx="10820400" cy="609600"/>
           </a:xfrm>
-          <a:prstGeom xmlns:a="http://schemas.openxmlformats.org/drawingml/2006/main" prst="rect">
-            <a:avLst/>
-          </a:prstGeom>
-          <a:noFill xmlns:a="http://schemas.openxmlformats.org/drawingml/2006/main"/>
-          <a:ln xmlns:a="http://schemas.openxmlformats.org/drawingml/2006/main" w="0">
-            <a:noFill/>
-            <a:prstDash val="solid"/>
-          </a:ln>
-        </p:spPr>
-        <p:txBody>
-          <a:bodyPr xmlns:a="http://schemas.openxmlformats.org/drawingml/2006/main" wrap="square" lIns="0" tIns="0" rIns="0" bIns="0" anchor="t">
-            <a:normAutofit fontScale="100000"/>
+          <a:prstGeom prst="rect">
+            <a:avLst/>
+          </a:prstGeom>
+          <a:noFill/>
+          <a:ln w="0">
+            <a:noFill/>
+            <a:prstDash val="solid"/>
+          </a:ln>
+        </p:spPr>
+        <p:txBody>
+          <a:bodyPr wrap="square" lIns="0" tIns="0" rIns="0" bIns="0" anchor="t">
+            <a:normAutofit/>
           </a:bodyPr>
-          <a:lstStyle xmlns:a="http://schemas.openxmlformats.org/drawingml/2006/main"/>
-          <a:p xmlns:a="http://schemas.openxmlformats.org/drawingml/2006/main">
+          <a:lstStyle/>
+          <a:p>
             <a:pPr algn="l">
               <a:defRPr sz="3300" b="1">
                 <a:solidFill>
@@ -2459,69 +2186,69 @@
       </p:sp>
       <p:sp>
         <p:nvSpPr>
-          <p:cNvPr id="2" name="">
-            <a:extLst xmlns:a="http://schemas.openxmlformats.org/drawingml/2006/main">
+          <p:cNvPr id="2" name="Rectangle 1">
+            <a:extLst>
               <a:ext uri="{FF2B5EF4-FFF2-40B4-BE49-F238E27FC236}">
                 <a16:creationId xmlns:a16="http://schemas.microsoft.com/office/drawing/2014/main" id="{D6295D1F-8B5B-4852-BECF-062620B41787}"/>
               </a:ext>
             </a:extLst>
           </p:cNvPr>
           <p:cNvSpPr>
-            <a:spLocks xmlns:a="http://schemas.openxmlformats.org/drawingml/2006/main" noGrp="1"/>
-          </p:cNvSpPr>
-          <p:nvPr/>
-        </p:nvSpPr>
-        <p:spPr>
-          <a:xfrm xmlns:a="http://schemas.openxmlformats.org/drawingml/2006/main">
+            <a:spLocks noGrp="1"/>
+          </p:cNvSpPr>
+          <p:nvPr/>
+        </p:nvSpPr>
+        <p:spPr>
+          <a:xfrm>
             <a:off x="685800" y="1219200"/>
             <a:ext cx="800100" cy="38100"/>
           </a:xfrm>
-          <a:prstGeom xmlns:a="http://schemas.openxmlformats.org/drawingml/2006/main" prst="rect">
-            <a:avLst/>
-          </a:prstGeom>
-          <a:solidFill xmlns:a="http://schemas.openxmlformats.org/drawingml/2006/main">
+          <a:prstGeom prst="rect">
+            <a:avLst/>
+          </a:prstGeom>
+          <a:solidFill>
             <a:srgbClr val="D8B86A"/>
           </a:solidFill>
-          <a:ln xmlns:a="http://schemas.openxmlformats.org/drawingml/2006/main" w="0">
-            <a:noFill/>
-            <a:prstDash val="solid"/>
-          </a:ln>
-        </p:spPr>
-      </p:sp>
-      <p:sp>
-        <p:nvSpPr>
-          <p:cNvPr id="3" name="">
-            <a:extLst xmlns:a="http://schemas.openxmlformats.org/drawingml/2006/main">
+          <a:ln w="0">
+            <a:noFill/>
+            <a:prstDash val="solid"/>
+          </a:ln>
+        </p:spPr>
+      </p:sp>
+      <p:sp>
+        <p:nvSpPr>
+          <p:cNvPr id="3" name="Rectangle 2">
+            <a:extLst>
               <a:ext uri="{FF2B5EF4-FFF2-40B4-BE49-F238E27FC236}">
                 <a16:creationId xmlns:a16="http://schemas.microsoft.com/office/drawing/2014/main" id="{73A233B6-F6FE-4394-9590-733186821E16}"/>
               </a:ext>
             </a:extLst>
           </p:cNvPr>
           <p:cNvSpPr>
-            <a:spLocks xmlns:a="http://schemas.openxmlformats.org/drawingml/2006/main" noGrp="1"/>
-          </p:cNvSpPr>
-          <p:nvPr/>
-        </p:nvSpPr>
-        <p:spPr>
-          <a:xfrm xmlns:a="http://schemas.openxmlformats.org/drawingml/2006/main">
+            <a:spLocks noGrp="1"/>
+          </p:cNvSpPr>
+          <p:nvPr/>
+        </p:nvSpPr>
+        <p:spPr>
+          <a:xfrm>
             <a:off x="742950" y="1543050"/>
             <a:ext cx="10668000" cy="419100"/>
           </a:xfrm>
-          <a:prstGeom xmlns:a="http://schemas.openxmlformats.org/drawingml/2006/main" prst="rect">
-            <a:avLst/>
-          </a:prstGeom>
-          <a:noFill xmlns:a="http://schemas.openxmlformats.org/drawingml/2006/main"/>
-          <a:ln xmlns:a="http://schemas.openxmlformats.org/drawingml/2006/main" w="0">
-            <a:noFill/>
-            <a:prstDash val="solid"/>
-          </a:ln>
-        </p:spPr>
-        <p:txBody>
-          <a:bodyPr xmlns:a="http://schemas.openxmlformats.org/drawingml/2006/main" wrap="square" lIns="0" tIns="0" rIns="0" bIns="0" anchor="t">
+          <a:prstGeom prst="rect">
+            <a:avLst/>
+          </a:prstGeom>
+          <a:noFill/>
+          <a:ln w="0">
+            <a:noFill/>
+            <a:prstDash val="solid"/>
+          </a:ln>
+        </p:spPr>
+        <p:txBody>
+          <a:bodyPr wrap="square" lIns="0" tIns="0" rIns="0" bIns="0" anchor="t">
             <a:normAutofit fontScale="91206"/>
           </a:bodyPr>
-          <a:lstStyle xmlns:a="http://schemas.openxmlformats.org/drawingml/2006/main"/>
-          <a:p xmlns:a="http://schemas.openxmlformats.org/drawingml/2006/main">
+          <a:lstStyle/>
+          <a:p>
             <a:pPr algn="l">
               <a:defRPr sz="1800" b="0">
                 <a:solidFill>
@@ -2549,29 +2276,29 @@
       <p:sp>
         <p:nvSpPr>
           <p:cNvPr id="4" name="stage-1">
-            <a:extLst xmlns:a="http://schemas.openxmlformats.org/drawingml/2006/main">
+            <a:extLst>
               <a:ext uri="{FF2B5EF4-FFF2-40B4-BE49-F238E27FC236}">
                 <a16:creationId xmlns:a16="http://schemas.microsoft.com/office/drawing/2014/main" id="{3818DC4C-297B-4C86-B85B-9196E2DD50AF}"/>
               </a:ext>
             </a:extLst>
           </p:cNvPr>
           <p:cNvSpPr>
-            <a:spLocks xmlns:a="http://schemas.openxmlformats.org/drawingml/2006/main" noGrp="1"/>
-          </p:cNvSpPr>
-          <p:nvPr/>
-        </p:nvSpPr>
-        <p:spPr>
-          <a:xfrm xmlns:a="http://schemas.openxmlformats.org/drawingml/2006/main">
+            <a:spLocks noGrp="1"/>
+          </p:cNvSpPr>
+          <p:nvPr/>
+        </p:nvSpPr>
+        <p:spPr>
+          <a:xfrm>
             <a:off x="685800" y="2324100"/>
             <a:ext cx="1905000" cy="1485900"/>
           </a:xfrm>
-          <a:prstGeom xmlns:a="http://schemas.openxmlformats.org/drawingml/2006/main" prst="rect">
-            <a:avLst/>
-          </a:prstGeom>
-          <a:solidFill xmlns:a="http://schemas.openxmlformats.org/drawingml/2006/main">
+          <a:prstGeom prst="rect">
+            <a:avLst/>
+          </a:prstGeom>
+          <a:solidFill>
             <a:srgbClr val="E4EEE8"/>
           </a:solidFill>
-          <a:ln xmlns:a="http://schemas.openxmlformats.org/drawingml/2006/main" w="14288">
+          <a:ln w="14288">
             <a:solidFill>
               <a:srgbClr val="AFC3B8"/>
             </a:solidFill>
@@ -2581,38 +2308,38 @@
       </p:sp>
       <p:sp>
         <p:nvSpPr>
-          <p:cNvPr id="5" name="">
-            <a:extLst xmlns:a="http://schemas.openxmlformats.org/drawingml/2006/main">
+          <p:cNvPr id="5" name="Rectangle 4">
+            <a:extLst>
               <a:ext uri="{FF2B5EF4-FFF2-40B4-BE49-F238E27FC236}">
                 <a16:creationId xmlns:a16="http://schemas.microsoft.com/office/drawing/2014/main" id="{1CFD522F-3A45-4CC7-ACE1-5C6077DABB66}"/>
               </a:ext>
             </a:extLst>
           </p:cNvPr>
           <p:cNvSpPr>
-            <a:spLocks xmlns:a="http://schemas.openxmlformats.org/drawingml/2006/main" noGrp="1"/>
-          </p:cNvSpPr>
-          <p:nvPr/>
-        </p:nvSpPr>
-        <p:spPr>
-          <a:xfrm xmlns:a="http://schemas.openxmlformats.org/drawingml/2006/main">
+            <a:spLocks noGrp="1"/>
+          </p:cNvSpPr>
+          <p:nvPr/>
+        </p:nvSpPr>
+        <p:spPr>
+          <a:xfrm>
             <a:off x="857250" y="2457450"/>
             <a:ext cx="400050" cy="266700"/>
           </a:xfrm>
-          <a:prstGeom xmlns:a="http://schemas.openxmlformats.org/drawingml/2006/main" prst="rect">
-            <a:avLst/>
-          </a:prstGeom>
-          <a:noFill xmlns:a="http://schemas.openxmlformats.org/drawingml/2006/main"/>
-          <a:ln xmlns:a="http://schemas.openxmlformats.org/drawingml/2006/main" w="0">
-            <a:noFill/>
-            <a:prstDash val="solid"/>
-          </a:ln>
-        </p:spPr>
-        <p:txBody>
-          <a:bodyPr xmlns:a="http://schemas.openxmlformats.org/drawingml/2006/main" wrap="square" lIns="0" tIns="0" rIns="0" bIns="0" anchor="t">
-            <a:normAutofit fontScale="100000"/>
+          <a:prstGeom prst="rect">
+            <a:avLst/>
+          </a:prstGeom>
+          <a:noFill/>
+          <a:ln w="0">
+            <a:noFill/>
+            <a:prstDash val="solid"/>
+          </a:ln>
+        </p:spPr>
+        <p:txBody>
+          <a:bodyPr wrap="square" lIns="0" tIns="0" rIns="0" bIns="0" anchor="t">
+            <a:normAutofit/>
           </a:bodyPr>
-          <a:lstStyle xmlns:a="http://schemas.openxmlformats.org/drawingml/2006/main"/>
-          <a:p xmlns:a="http://schemas.openxmlformats.org/drawingml/2006/main">
+          <a:lstStyle/>
+          <a:p>
             <a:pPr algn="l">
               <a:defRPr sz="1350" b="1">
                 <a:solidFill>
@@ -2639,38 +2366,38 @@
       </p:sp>
       <p:sp>
         <p:nvSpPr>
-          <p:cNvPr id="6" name="">
-            <a:extLst xmlns:a="http://schemas.openxmlformats.org/drawingml/2006/main">
+          <p:cNvPr id="6" name="Rectangle 5">
+            <a:extLst>
               <a:ext uri="{FF2B5EF4-FFF2-40B4-BE49-F238E27FC236}">
                 <a16:creationId xmlns:a16="http://schemas.microsoft.com/office/drawing/2014/main" id="{BDB597B1-8D90-4695-BA04-39ECC0C09BBD}"/>
               </a:ext>
             </a:extLst>
           </p:cNvPr>
           <p:cNvSpPr>
-            <a:spLocks xmlns:a="http://schemas.openxmlformats.org/drawingml/2006/main" noGrp="1"/>
-          </p:cNvSpPr>
-          <p:nvPr/>
-        </p:nvSpPr>
-        <p:spPr>
-          <a:xfrm xmlns:a="http://schemas.openxmlformats.org/drawingml/2006/main">
+            <a:spLocks noGrp="1"/>
+          </p:cNvSpPr>
+          <p:nvPr/>
+        </p:nvSpPr>
+        <p:spPr>
+          <a:xfrm>
             <a:off x="857250" y="2781300"/>
             <a:ext cx="1562100" cy="381000"/>
           </a:xfrm>
-          <a:prstGeom xmlns:a="http://schemas.openxmlformats.org/drawingml/2006/main" prst="rect">
-            <a:avLst/>
-          </a:prstGeom>
-          <a:noFill xmlns:a="http://schemas.openxmlformats.org/drawingml/2006/main"/>
-          <a:ln xmlns:a="http://schemas.openxmlformats.org/drawingml/2006/main" w="0">
-            <a:noFill/>
-            <a:prstDash val="solid"/>
-          </a:ln>
-        </p:spPr>
-        <p:txBody>
-          <a:bodyPr xmlns:a="http://schemas.openxmlformats.org/drawingml/2006/main" wrap="square" lIns="0" tIns="0" rIns="0" bIns="0" anchor="t">
-            <a:normAutofit fontScale="100000"/>
+          <a:prstGeom prst="rect">
+            <a:avLst/>
+          </a:prstGeom>
+          <a:noFill/>
+          <a:ln w="0">
+            <a:noFill/>
+            <a:prstDash val="solid"/>
+          </a:ln>
+        </p:spPr>
+        <p:txBody>
+          <a:bodyPr wrap="square" lIns="0" tIns="0" rIns="0" bIns="0" anchor="t">
+            <a:normAutofit/>
           </a:bodyPr>
-          <a:lstStyle xmlns:a="http://schemas.openxmlformats.org/drawingml/2006/main"/>
-          <a:p xmlns:a="http://schemas.openxmlformats.org/drawingml/2006/main">
+          <a:lstStyle/>
+          <a:p>
             <a:pPr algn="l">
               <a:defRPr sz="2100" b="1">
                 <a:solidFill>
@@ -2697,38 +2424,38 @@
       </p:sp>
       <p:sp>
         <p:nvSpPr>
-          <p:cNvPr id="7" name="">
-            <a:extLst xmlns:a="http://schemas.openxmlformats.org/drawingml/2006/main">
+          <p:cNvPr id="7" name="Rectangle 6">
+            <a:extLst>
               <a:ext uri="{FF2B5EF4-FFF2-40B4-BE49-F238E27FC236}">
                 <a16:creationId xmlns:a16="http://schemas.microsoft.com/office/drawing/2014/main" id="{402CCB91-C067-48F5-B0A5-59C3FBC25597}"/>
               </a:ext>
             </a:extLst>
           </p:cNvPr>
           <p:cNvSpPr>
-            <a:spLocks xmlns:a="http://schemas.openxmlformats.org/drawingml/2006/main" noGrp="1"/>
-          </p:cNvSpPr>
-          <p:nvPr/>
-        </p:nvSpPr>
-        <p:spPr>
-          <a:xfrm xmlns:a="http://schemas.openxmlformats.org/drawingml/2006/main">
+            <a:spLocks noGrp="1"/>
+          </p:cNvSpPr>
+          <p:nvPr/>
+        </p:nvSpPr>
+        <p:spPr>
+          <a:xfrm>
             <a:off x="857250" y="3276600"/>
             <a:ext cx="1562100" cy="514350"/>
           </a:xfrm>
-          <a:prstGeom xmlns:a="http://schemas.openxmlformats.org/drawingml/2006/main" prst="rect">
-            <a:avLst/>
-          </a:prstGeom>
-          <a:noFill xmlns:a="http://schemas.openxmlformats.org/drawingml/2006/main"/>
-          <a:ln xmlns:a="http://schemas.openxmlformats.org/drawingml/2006/main" w="0">
-            <a:noFill/>
-            <a:prstDash val="solid"/>
-          </a:ln>
-        </p:spPr>
-        <p:txBody>
-          <a:bodyPr xmlns:a="http://schemas.openxmlformats.org/drawingml/2006/main" wrap="square" lIns="0" tIns="0" rIns="0" bIns="0" anchor="t">
+          <a:prstGeom prst="rect">
+            <a:avLst/>
+          </a:prstGeom>
+          <a:noFill/>
+          <a:ln w="0">
+            <a:noFill/>
+            <a:prstDash val="solid"/>
+          </a:ln>
+        </p:spPr>
+        <p:txBody>
+          <a:bodyPr wrap="square" lIns="0" tIns="0" rIns="0" bIns="0" anchor="t">
             <a:normAutofit fontScale="77122"/>
           </a:bodyPr>
-          <a:lstStyle xmlns:a="http://schemas.openxmlformats.org/drawingml/2006/main"/>
-          <a:p xmlns:a="http://schemas.openxmlformats.org/drawingml/2006/main">
+          <a:lstStyle/>
+          <a:p>
             <a:pPr algn="l">
               <a:defRPr sz="1500" b="0">
                 <a:solidFill>
@@ -2751,7 +2478,7 @@
               <a:t>Deal two private cards</a:t>
             </a:r>
           </a:p>
-          <a:p xmlns:a="http://schemas.openxmlformats.org/drawingml/2006/main">
+          <a:p>
             <a:pPr algn="l">
               <a:defRPr sz="1500" b="0">
                 <a:solidFill>
@@ -2779,29 +2506,29 @@
       <p:sp>
         <p:nvSpPr>
           <p:cNvPr id="8" name="stage-2">
-            <a:extLst xmlns:a="http://schemas.openxmlformats.org/drawingml/2006/main">
+            <a:extLst>
               <a:ext uri="{FF2B5EF4-FFF2-40B4-BE49-F238E27FC236}">
                 <a16:creationId xmlns:a16="http://schemas.microsoft.com/office/drawing/2014/main" id="{B2066A71-74C4-4770-9957-33F076B5981E}"/>
               </a:ext>
             </a:extLst>
           </p:cNvPr>
           <p:cNvSpPr>
-            <a:spLocks xmlns:a="http://schemas.openxmlformats.org/drawingml/2006/main" noGrp="1"/>
-          </p:cNvSpPr>
-          <p:nvPr/>
-        </p:nvSpPr>
-        <p:spPr>
-          <a:xfrm xmlns:a="http://schemas.openxmlformats.org/drawingml/2006/main">
+            <a:spLocks noGrp="1"/>
+          </p:cNvSpPr>
+          <p:nvPr/>
+        </p:nvSpPr>
+        <p:spPr>
+          <a:xfrm>
             <a:off x="2924175" y="2324100"/>
             <a:ext cx="1905000" cy="1485900"/>
           </a:xfrm>
-          <a:prstGeom xmlns:a="http://schemas.openxmlformats.org/drawingml/2006/main" prst="rect">
-            <a:avLst/>
-          </a:prstGeom>
-          <a:solidFill xmlns:a="http://schemas.openxmlformats.org/drawingml/2006/main">
+          <a:prstGeom prst="rect">
+            <a:avLst/>
+          </a:prstGeom>
+          <a:solidFill>
             <a:srgbClr val="E4EEE8"/>
           </a:solidFill>
-          <a:ln xmlns:a="http://schemas.openxmlformats.org/drawingml/2006/main" w="14288">
+          <a:ln w="14288">
             <a:solidFill>
               <a:srgbClr val="AFC3B8"/>
             </a:solidFill>
@@ -2811,38 +2538,38 @@
       </p:sp>
       <p:sp>
         <p:nvSpPr>
-          <p:cNvPr id="9" name="">
-            <a:extLst xmlns:a="http://schemas.openxmlformats.org/drawingml/2006/main">
+          <p:cNvPr id="9" name="Rectangle 8">
+            <a:extLst>
               <a:ext uri="{FF2B5EF4-FFF2-40B4-BE49-F238E27FC236}">
                 <a16:creationId xmlns:a16="http://schemas.microsoft.com/office/drawing/2014/main" id="{0E8A72C9-C974-4149-A068-FAB4639F8EFD}"/>
               </a:ext>
             </a:extLst>
           </p:cNvPr>
           <p:cNvSpPr>
-            <a:spLocks xmlns:a="http://schemas.openxmlformats.org/drawingml/2006/main" noGrp="1"/>
-          </p:cNvSpPr>
-          <p:nvPr/>
-        </p:nvSpPr>
-        <p:spPr>
-          <a:xfrm xmlns:a="http://schemas.openxmlformats.org/drawingml/2006/main">
+            <a:spLocks noGrp="1"/>
+          </p:cNvSpPr>
+          <p:nvPr/>
+        </p:nvSpPr>
+        <p:spPr>
+          <a:xfrm>
             <a:off x="3095625" y="2457450"/>
             <a:ext cx="400050" cy="266700"/>
           </a:xfrm>
-          <a:prstGeom xmlns:a="http://schemas.openxmlformats.org/drawingml/2006/main" prst="rect">
-            <a:avLst/>
-          </a:prstGeom>
-          <a:noFill xmlns:a="http://schemas.openxmlformats.org/drawingml/2006/main"/>
-          <a:ln xmlns:a="http://schemas.openxmlformats.org/drawingml/2006/main" w="0">
-            <a:noFill/>
-            <a:prstDash val="solid"/>
-          </a:ln>
-        </p:spPr>
-        <p:txBody>
-          <a:bodyPr xmlns:a="http://schemas.openxmlformats.org/drawingml/2006/main" wrap="square" lIns="0" tIns="0" rIns="0" bIns="0" anchor="t">
-            <a:normAutofit fontScale="100000"/>
+          <a:prstGeom prst="rect">
+            <a:avLst/>
+          </a:prstGeom>
+          <a:noFill/>
+          <a:ln w="0">
+            <a:noFill/>
+            <a:prstDash val="solid"/>
+          </a:ln>
+        </p:spPr>
+        <p:txBody>
+          <a:bodyPr wrap="square" lIns="0" tIns="0" rIns="0" bIns="0" anchor="t">
+            <a:normAutofit/>
           </a:bodyPr>
-          <a:lstStyle xmlns:a="http://schemas.openxmlformats.org/drawingml/2006/main"/>
-          <a:p xmlns:a="http://schemas.openxmlformats.org/drawingml/2006/main">
+          <a:lstStyle/>
+          <a:p>
             <a:pPr algn="l">
               <a:defRPr sz="1350" b="1">
                 <a:solidFill>
@@ -2869,38 +2596,38 @@
       </p:sp>
       <p:sp>
         <p:nvSpPr>
-          <p:cNvPr id="10" name="">
-            <a:extLst xmlns:a="http://schemas.openxmlformats.org/drawingml/2006/main">
+          <p:cNvPr id="10" name="Rectangle 9">
+            <a:extLst>
               <a:ext uri="{FF2B5EF4-FFF2-40B4-BE49-F238E27FC236}">
                 <a16:creationId xmlns:a16="http://schemas.microsoft.com/office/drawing/2014/main" id="{D444B99B-6A71-423D-B3AC-8D5C04E2C6D0}"/>
               </a:ext>
             </a:extLst>
           </p:cNvPr>
           <p:cNvSpPr>
-            <a:spLocks xmlns:a="http://schemas.openxmlformats.org/drawingml/2006/main" noGrp="1"/>
-          </p:cNvSpPr>
-          <p:nvPr/>
-        </p:nvSpPr>
-        <p:spPr>
-          <a:xfrm xmlns:a="http://schemas.openxmlformats.org/drawingml/2006/main">
+            <a:spLocks noGrp="1"/>
+          </p:cNvSpPr>
+          <p:nvPr/>
+        </p:nvSpPr>
+        <p:spPr>
+          <a:xfrm>
             <a:off x="3095625" y="2781300"/>
             <a:ext cx="1562100" cy="381000"/>
           </a:xfrm>
-          <a:prstGeom xmlns:a="http://schemas.openxmlformats.org/drawingml/2006/main" prst="rect">
-            <a:avLst/>
-          </a:prstGeom>
-          <a:noFill xmlns:a="http://schemas.openxmlformats.org/drawingml/2006/main"/>
-          <a:ln xmlns:a="http://schemas.openxmlformats.org/drawingml/2006/main" w="0">
-            <a:noFill/>
-            <a:prstDash val="solid"/>
-          </a:ln>
-        </p:spPr>
-        <p:txBody>
-          <a:bodyPr xmlns:a="http://schemas.openxmlformats.org/drawingml/2006/main" wrap="square" lIns="0" tIns="0" rIns="0" bIns="0" anchor="t">
-            <a:normAutofit fontScale="100000"/>
+          <a:prstGeom prst="rect">
+            <a:avLst/>
+          </a:prstGeom>
+          <a:noFill/>
+          <a:ln w="0">
+            <a:noFill/>
+            <a:prstDash val="solid"/>
+          </a:ln>
+        </p:spPr>
+        <p:txBody>
+          <a:bodyPr wrap="square" lIns="0" tIns="0" rIns="0" bIns="0" anchor="t">
+            <a:normAutofit/>
           </a:bodyPr>
-          <a:lstStyle xmlns:a="http://schemas.openxmlformats.org/drawingml/2006/main"/>
-          <a:p xmlns:a="http://schemas.openxmlformats.org/drawingml/2006/main">
+          <a:lstStyle/>
+          <a:p>
             <a:pPr algn="l">
               <a:defRPr sz="2100" b="1">
                 <a:solidFill>
@@ -2927,38 +2654,38 @@
       </p:sp>
       <p:sp>
         <p:nvSpPr>
-          <p:cNvPr id="11" name="">
-            <a:extLst xmlns:a="http://schemas.openxmlformats.org/drawingml/2006/main">
+          <p:cNvPr id="11" name="Rectangle 10">
+            <a:extLst>
               <a:ext uri="{FF2B5EF4-FFF2-40B4-BE49-F238E27FC236}">
                 <a16:creationId xmlns:a16="http://schemas.microsoft.com/office/drawing/2014/main" id="{E7C65B59-39B6-4712-8D27-C88D7C4FE53B}"/>
               </a:ext>
             </a:extLst>
           </p:cNvPr>
           <p:cNvSpPr>
-            <a:spLocks xmlns:a="http://schemas.openxmlformats.org/drawingml/2006/main" noGrp="1"/>
-          </p:cNvSpPr>
-          <p:nvPr/>
-        </p:nvSpPr>
-        <p:spPr>
-          <a:xfrm xmlns:a="http://schemas.openxmlformats.org/drawingml/2006/main">
+            <a:spLocks noGrp="1"/>
+          </p:cNvSpPr>
+          <p:nvPr/>
+        </p:nvSpPr>
+        <p:spPr>
+          <a:xfrm>
             <a:off x="3095625" y="3276600"/>
             <a:ext cx="1562100" cy="514350"/>
           </a:xfrm>
-          <a:prstGeom xmlns:a="http://schemas.openxmlformats.org/drawingml/2006/main" prst="rect">
-            <a:avLst/>
-          </a:prstGeom>
-          <a:noFill xmlns:a="http://schemas.openxmlformats.org/drawingml/2006/main"/>
-          <a:ln xmlns:a="http://schemas.openxmlformats.org/drawingml/2006/main" w="0">
-            <a:noFill/>
-            <a:prstDash val="solid"/>
-          </a:ln>
-        </p:spPr>
-        <p:txBody>
-          <a:bodyPr xmlns:a="http://schemas.openxmlformats.org/drawingml/2006/main" wrap="square" lIns="0" tIns="0" rIns="0" bIns="0" anchor="t">
+          <a:prstGeom prst="rect">
+            <a:avLst/>
+          </a:prstGeom>
+          <a:noFill/>
+          <a:ln w="0">
+            <a:noFill/>
+            <a:prstDash val="solid"/>
+          </a:ln>
+        </p:spPr>
+        <p:txBody>
+          <a:bodyPr wrap="square" lIns="0" tIns="0" rIns="0" bIns="0" anchor="t">
             <a:normAutofit fontScale="99492"/>
           </a:bodyPr>
-          <a:lstStyle xmlns:a="http://schemas.openxmlformats.org/drawingml/2006/main"/>
-          <a:p xmlns:a="http://schemas.openxmlformats.org/drawingml/2006/main">
+          <a:lstStyle/>
+          <a:p>
             <a:pPr algn="l">
               <a:defRPr sz="1500" b="0">
                 <a:solidFill>
@@ -2981,7 +2708,7 @@
               <a:t>Deal three</a:t>
             </a:r>
           </a:p>
-          <a:p xmlns:a="http://schemas.openxmlformats.org/drawingml/2006/main">
+          <a:p>
             <a:pPr algn="l">
               <a:defRPr sz="1500" b="0">
                 <a:solidFill>
@@ -3009,29 +2736,29 @@
       <p:sp>
         <p:nvSpPr>
           <p:cNvPr id="12" name="stage-3">
-            <a:extLst xmlns:a="http://schemas.openxmlformats.org/drawingml/2006/main">
+            <a:extLst>
               <a:ext uri="{FF2B5EF4-FFF2-40B4-BE49-F238E27FC236}">
                 <a16:creationId xmlns:a16="http://schemas.microsoft.com/office/drawing/2014/main" id="{FF8A7879-6A15-4537-819D-C1678639FE3E}"/>
               </a:ext>
             </a:extLst>
           </p:cNvPr>
           <p:cNvSpPr>
-            <a:spLocks xmlns:a="http://schemas.openxmlformats.org/drawingml/2006/main" noGrp="1"/>
-          </p:cNvSpPr>
-          <p:nvPr/>
-        </p:nvSpPr>
-        <p:spPr>
-          <a:xfrm xmlns:a="http://schemas.openxmlformats.org/drawingml/2006/main">
+            <a:spLocks noGrp="1"/>
+          </p:cNvSpPr>
+          <p:nvPr/>
+        </p:nvSpPr>
+        <p:spPr>
+          <a:xfrm>
             <a:off x="5162550" y="2324100"/>
             <a:ext cx="1905000" cy="1485900"/>
           </a:xfrm>
-          <a:prstGeom xmlns:a="http://schemas.openxmlformats.org/drawingml/2006/main" prst="rect">
-            <a:avLst/>
-          </a:prstGeom>
-          <a:solidFill xmlns:a="http://schemas.openxmlformats.org/drawingml/2006/main">
+          <a:prstGeom prst="rect">
+            <a:avLst/>
+          </a:prstGeom>
+          <a:solidFill>
             <a:srgbClr val="E4EEE8"/>
           </a:solidFill>
-          <a:ln xmlns:a="http://schemas.openxmlformats.org/drawingml/2006/main" w="14288">
+          <a:ln w="14288">
             <a:solidFill>
               <a:srgbClr val="AFC3B8"/>
             </a:solidFill>
@@ -3041,38 +2768,38 @@
       </p:sp>
       <p:sp>
         <p:nvSpPr>
-          <p:cNvPr id="13" name="">
-            <a:extLst xmlns:a="http://schemas.openxmlformats.org/drawingml/2006/main">
+          <p:cNvPr id="13" name="Rectangle 12">
+            <a:extLst>
               <a:ext uri="{FF2B5EF4-FFF2-40B4-BE49-F238E27FC236}">
                 <a16:creationId xmlns:a16="http://schemas.microsoft.com/office/drawing/2014/main" id="{3F6AAF78-756E-4A83-B513-9D64E9641743}"/>
               </a:ext>
             </a:extLst>
           </p:cNvPr>
           <p:cNvSpPr>
-            <a:spLocks xmlns:a="http://schemas.openxmlformats.org/drawingml/2006/main" noGrp="1"/>
-          </p:cNvSpPr>
-          <p:nvPr/>
-        </p:nvSpPr>
-        <p:spPr>
-          <a:xfrm xmlns:a="http://schemas.openxmlformats.org/drawingml/2006/main">
+            <a:spLocks noGrp="1"/>
+          </p:cNvSpPr>
+          <p:nvPr/>
+        </p:nvSpPr>
+        <p:spPr>
+          <a:xfrm>
             <a:off x="5334000" y="2457450"/>
             <a:ext cx="400050" cy="266700"/>
           </a:xfrm>
-          <a:prstGeom xmlns:a="http://schemas.openxmlformats.org/drawingml/2006/main" prst="rect">
-            <a:avLst/>
-          </a:prstGeom>
-          <a:noFill xmlns:a="http://schemas.openxmlformats.org/drawingml/2006/main"/>
-          <a:ln xmlns:a="http://schemas.openxmlformats.org/drawingml/2006/main" w="0">
-            <a:noFill/>
-            <a:prstDash val="solid"/>
-          </a:ln>
-        </p:spPr>
-        <p:txBody>
-          <a:bodyPr xmlns:a="http://schemas.openxmlformats.org/drawingml/2006/main" wrap="square" lIns="0" tIns="0" rIns="0" bIns="0" anchor="t">
-            <a:normAutofit fontScale="100000"/>
+          <a:prstGeom prst="rect">
+            <a:avLst/>
+          </a:prstGeom>
+          <a:noFill/>
+          <a:ln w="0">
+            <a:noFill/>
+            <a:prstDash val="solid"/>
+          </a:ln>
+        </p:spPr>
+        <p:txBody>
+          <a:bodyPr wrap="square" lIns="0" tIns="0" rIns="0" bIns="0" anchor="t">
+            <a:normAutofit/>
           </a:bodyPr>
-          <a:lstStyle xmlns:a="http://schemas.openxmlformats.org/drawingml/2006/main"/>
-          <a:p xmlns:a="http://schemas.openxmlformats.org/drawingml/2006/main">
+          <a:lstStyle/>
+          <a:p>
             <a:pPr algn="l">
               <a:defRPr sz="1350" b="1">
                 <a:solidFill>
@@ -3099,38 +2826,38 @@
       </p:sp>
       <p:sp>
         <p:nvSpPr>
-          <p:cNvPr id="14" name="">
-            <a:extLst xmlns:a="http://schemas.openxmlformats.org/drawingml/2006/main">
+          <p:cNvPr id="14" name="Rectangle 13">
+            <a:extLst>
               <a:ext uri="{FF2B5EF4-FFF2-40B4-BE49-F238E27FC236}">
                 <a16:creationId xmlns:a16="http://schemas.microsoft.com/office/drawing/2014/main" id="{0E161250-756F-48B2-BDCF-3B4DC6522BFC}"/>
               </a:ext>
             </a:extLst>
           </p:cNvPr>
           <p:cNvSpPr>
-            <a:spLocks xmlns:a="http://schemas.openxmlformats.org/drawingml/2006/main" noGrp="1"/>
-          </p:cNvSpPr>
-          <p:nvPr/>
-        </p:nvSpPr>
-        <p:spPr>
-          <a:xfrm xmlns:a="http://schemas.openxmlformats.org/drawingml/2006/main">
+            <a:spLocks noGrp="1"/>
+          </p:cNvSpPr>
+          <p:nvPr/>
+        </p:nvSpPr>
+        <p:spPr>
+          <a:xfrm>
             <a:off x="5334000" y="2781300"/>
             <a:ext cx="1562100" cy="381000"/>
           </a:xfrm>
-          <a:prstGeom xmlns:a="http://schemas.openxmlformats.org/drawingml/2006/main" prst="rect">
-            <a:avLst/>
-          </a:prstGeom>
-          <a:noFill xmlns:a="http://schemas.openxmlformats.org/drawingml/2006/main"/>
-          <a:ln xmlns:a="http://schemas.openxmlformats.org/drawingml/2006/main" w="0">
-            <a:noFill/>
-            <a:prstDash val="solid"/>
-          </a:ln>
-        </p:spPr>
-        <p:txBody>
-          <a:bodyPr xmlns:a="http://schemas.openxmlformats.org/drawingml/2006/main" wrap="square" lIns="0" tIns="0" rIns="0" bIns="0" anchor="t">
-            <a:normAutofit fontScale="100000"/>
+          <a:prstGeom prst="rect">
+            <a:avLst/>
+          </a:prstGeom>
+          <a:noFill/>
+          <a:ln w="0">
+            <a:noFill/>
+            <a:prstDash val="solid"/>
+          </a:ln>
+        </p:spPr>
+        <p:txBody>
+          <a:bodyPr wrap="square" lIns="0" tIns="0" rIns="0" bIns="0" anchor="t">
+            <a:normAutofit/>
           </a:bodyPr>
-          <a:lstStyle xmlns:a="http://schemas.openxmlformats.org/drawingml/2006/main"/>
-          <a:p xmlns:a="http://schemas.openxmlformats.org/drawingml/2006/main">
+          <a:lstStyle/>
+          <a:p>
             <a:pPr algn="l">
               <a:defRPr sz="2100" b="1">
                 <a:solidFill>
@@ -3157,38 +2884,38 @@
       </p:sp>
       <p:sp>
         <p:nvSpPr>
-          <p:cNvPr id="15" name="">
-            <a:extLst xmlns:a="http://schemas.openxmlformats.org/drawingml/2006/main">
+          <p:cNvPr id="15" name="Rectangle 14">
+            <a:extLst>
               <a:ext uri="{FF2B5EF4-FFF2-40B4-BE49-F238E27FC236}">
                 <a16:creationId xmlns:a16="http://schemas.microsoft.com/office/drawing/2014/main" id="{BC8F4A59-8CF2-42B3-BE3B-F3CCC203AA4A}"/>
               </a:ext>
             </a:extLst>
           </p:cNvPr>
           <p:cNvSpPr>
-            <a:spLocks xmlns:a="http://schemas.openxmlformats.org/drawingml/2006/main" noGrp="1"/>
-          </p:cNvSpPr>
-          <p:nvPr/>
-        </p:nvSpPr>
-        <p:spPr>
-          <a:xfrm xmlns:a="http://schemas.openxmlformats.org/drawingml/2006/main">
+            <a:spLocks noGrp="1"/>
+          </p:cNvSpPr>
+          <p:nvPr/>
+        </p:nvSpPr>
+        <p:spPr>
+          <a:xfrm>
             <a:off x="5334000" y="3276600"/>
             <a:ext cx="1562100" cy="514350"/>
           </a:xfrm>
-          <a:prstGeom xmlns:a="http://schemas.openxmlformats.org/drawingml/2006/main" prst="rect">
-            <a:avLst/>
-          </a:prstGeom>
-          <a:noFill xmlns:a="http://schemas.openxmlformats.org/drawingml/2006/main"/>
-          <a:ln xmlns:a="http://schemas.openxmlformats.org/drawingml/2006/main" w="0">
-            <a:noFill/>
-            <a:prstDash val="solid"/>
-          </a:ln>
-        </p:spPr>
-        <p:txBody>
-          <a:bodyPr xmlns:a="http://schemas.openxmlformats.org/drawingml/2006/main" wrap="square" lIns="0" tIns="0" rIns="0" bIns="0" anchor="t">
-            <a:normAutofit fontScale="100000"/>
+          <a:prstGeom prst="rect">
+            <a:avLst/>
+          </a:prstGeom>
+          <a:noFill/>
+          <a:ln w="0">
+            <a:noFill/>
+            <a:prstDash val="solid"/>
+          </a:ln>
+        </p:spPr>
+        <p:txBody>
+          <a:bodyPr wrap="square" lIns="0" tIns="0" rIns="0" bIns="0" anchor="t">
+            <a:normAutofit/>
           </a:bodyPr>
-          <a:lstStyle xmlns:a="http://schemas.openxmlformats.org/drawingml/2006/main"/>
-          <a:p xmlns:a="http://schemas.openxmlformats.org/drawingml/2006/main">
+          <a:lstStyle/>
+          <a:p>
             <a:pPr algn="l">
               <a:defRPr sz="1500" b="0">
                 <a:solidFill>
@@ -3211,7 +2938,7 @@
               <a:t>Deal one more</a:t>
             </a:r>
           </a:p>
-          <a:p xmlns:a="http://schemas.openxmlformats.org/drawingml/2006/main">
+          <a:p>
             <a:pPr algn="l">
               <a:defRPr sz="1500" b="0">
                 <a:solidFill>
@@ -3239,29 +2966,29 @@
       <p:sp>
         <p:nvSpPr>
           <p:cNvPr id="16" name="stage-4">
-            <a:extLst xmlns:a="http://schemas.openxmlformats.org/drawingml/2006/main">
+            <a:extLst>
               <a:ext uri="{FF2B5EF4-FFF2-40B4-BE49-F238E27FC236}">
                 <a16:creationId xmlns:a16="http://schemas.microsoft.com/office/drawing/2014/main" id="{296647DB-D493-4E72-BFAD-642B2C6F2500}"/>
               </a:ext>
             </a:extLst>
           </p:cNvPr>
           <p:cNvSpPr>
-            <a:spLocks xmlns:a="http://schemas.openxmlformats.org/drawingml/2006/main" noGrp="1"/>
-          </p:cNvSpPr>
-          <p:nvPr/>
-        </p:nvSpPr>
-        <p:spPr>
-          <a:xfrm xmlns:a="http://schemas.openxmlformats.org/drawingml/2006/main">
+            <a:spLocks noGrp="1"/>
+          </p:cNvSpPr>
+          <p:nvPr/>
+        </p:nvSpPr>
+        <p:spPr>
+          <a:xfrm>
             <a:off x="7400925" y="2324100"/>
             <a:ext cx="1905000" cy="1485900"/>
           </a:xfrm>
-          <a:prstGeom xmlns:a="http://schemas.openxmlformats.org/drawingml/2006/main" prst="rect">
-            <a:avLst/>
-          </a:prstGeom>
-          <a:solidFill xmlns:a="http://schemas.openxmlformats.org/drawingml/2006/main">
+          <a:prstGeom prst="rect">
+            <a:avLst/>
+          </a:prstGeom>
+          <a:solidFill>
             <a:srgbClr val="E4EEE8"/>
           </a:solidFill>
-          <a:ln xmlns:a="http://schemas.openxmlformats.org/drawingml/2006/main" w="14288">
+          <a:ln w="14288">
             <a:solidFill>
               <a:srgbClr val="AFC3B8"/>
             </a:solidFill>
@@ -3271,38 +2998,38 @@
       </p:sp>
       <p:sp>
         <p:nvSpPr>
-          <p:cNvPr id="17" name="">
-            <a:extLst xmlns:a="http://schemas.openxmlformats.org/drawingml/2006/main">
+          <p:cNvPr id="17" name="Rectangle 16">
+            <a:extLst>
               <a:ext uri="{FF2B5EF4-FFF2-40B4-BE49-F238E27FC236}">
                 <a16:creationId xmlns:a16="http://schemas.microsoft.com/office/drawing/2014/main" id="{3663820E-FDCF-41F9-8BD2-13D9B6EF91FE}"/>
               </a:ext>
             </a:extLst>
           </p:cNvPr>
           <p:cNvSpPr>
-            <a:spLocks xmlns:a="http://schemas.openxmlformats.org/drawingml/2006/main" noGrp="1"/>
-          </p:cNvSpPr>
-          <p:nvPr/>
-        </p:nvSpPr>
-        <p:spPr>
-          <a:xfrm xmlns:a="http://schemas.openxmlformats.org/drawingml/2006/main">
+            <a:spLocks noGrp="1"/>
+          </p:cNvSpPr>
+          <p:nvPr/>
+        </p:nvSpPr>
+        <p:spPr>
+          <a:xfrm>
             <a:off x="7572375" y="2457450"/>
             <a:ext cx="400050" cy="266700"/>
           </a:xfrm>
-          <a:prstGeom xmlns:a="http://schemas.openxmlformats.org/drawingml/2006/main" prst="rect">
-            <a:avLst/>
-          </a:prstGeom>
-          <a:noFill xmlns:a="http://schemas.openxmlformats.org/drawingml/2006/main"/>
-          <a:ln xmlns:a="http://schemas.openxmlformats.org/drawingml/2006/main" w="0">
-            <a:noFill/>
-            <a:prstDash val="solid"/>
-          </a:ln>
-        </p:spPr>
-        <p:txBody>
-          <a:bodyPr xmlns:a="http://schemas.openxmlformats.org/drawingml/2006/main" wrap="square" lIns="0" tIns="0" rIns="0" bIns="0" anchor="t">
-            <a:normAutofit fontScale="100000"/>
+          <a:prstGeom prst="rect">
+            <a:avLst/>
+          </a:prstGeom>
+          <a:noFill/>
+          <a:ln w="0">
+            <a:noFill/>
+            <a:prstDash val="solid"/>
+          </a:ln>
+        </p:spPr>
+        <p:txBody>
+          <a:bodyPr wrap="square" lIns="0" tIns="0" rIns="0" bIns="0" anchor="t">
+            <a:normAutofit/>
           </a:bodyPr>
-          <a:lstStyle xmlns:a="http://schemas.openxmlformats.org/drawingml/2006/main"/>
-          <a:p xmlns:a="http://schemas.openxmlformats.org/drawingml/2006/main">
+          <a:lstStyle/>
+          <a:p>
             <a:pPr algn="l">
               <a:defRPr sz="1350" b="1">
                 <a:solidFill>
@@ -3329,38 +3056,38 @@
       </p:sp>
       <p:sp>
         <p:nvSpPr>
-          <p:cNvPr id="18" name="">
-            <a:extLst xmlns:a="http://schemas.openxmlformats.org/drawingml/2006/main">
+          <p:cNvPr id="18" name="Rectangle 17">
+            <a:extLst>
               <a:ext uri="{FF2B5EF4-FFF2-40B4-BE49-F238E27FC236}">
                 <a16:creationId xmlns:a16="http://schemas.microsoft.com/office/drawing/2014/main" id="{93EC416A-261B-4ACC-9545-0760E17F44F5}"/>
               </a:ext>
             </a:extLst>
           </p:cNvPr>
           <p:cNvSpPr>
-            <a:spLocks xmlns:a="http://schemas.openxmlformats.org/drawingml/2006/main" noGrp="1"/>
-          </p:cNvSpPr>
-          <p:nvPr/>
-        </p:nvSpPr>
-        <p:spPr>
-          <a:xfrm xmlns:a="http://schemas.openxmlformats.org/drawingml/2006/main">
+            <a:spLocks noGrp="1"/>
+          </p:cNvSpPr>
+          <p:nvPr/>
+        </p:nvSpPr>
+        <p:spPr>
+          <a:xfrm>
             <a:off x="7572375" y="2781300"/>
             <a:ext cx="1562100" cy="381000"/>
           </a:xfrm>
-          <a:prstGeom xmlns:a="http://schemas.openxmlformats.org/drawingml/2006/main" prst="rect">
-            <a:avLst/>
-          </a:prstGeom>
-          <a:noFill xmlns:a="http://schemas.openxmlformats.org/drawingml/2006/main"/>
-          <a:ln xmlns:a="http://schemas.openxmlformats.org/drawingml/2006/main" w="0">
-            <a:noFill/>
-            <a:prstDash val="solid"/>
-          </a:ln>
-        </p:spPr>
-        <p:txBody>
-          <a:bodyPr xmlns:a="http://schemas.openxmlformats.org/drawingml/2006/main" wrap="square" lIns="0" tIns="0" rIns="0" bIns="0" anchor="t">
-            <a:normAutofit fontScale="100000"/>
+          <a:prstGeom prst="rect">
+            <a:avLst/>
+          </a:prstGeom>
+          <a:noFill/>
+          <a:ln w="0">
+            <a:noFill/>
+            <a:prstDash val="solid"/>
+          </a:ln>
+        </p:spPr>
+        <p:txBody>
+          <a:bodyPr wrap="square" lIns="0" tIns="0" rIns="0" bIns="0" anchor="t">
+            <a:normAutofit/>
           </a:bodyPr>
-          <a:lstStyle xmlns:a="http://schemas.openxmlformats.org/drawingml/2006/main"/>
-          <a:p xmlns:a="http://schemas.openxmlformats.org/drawingml/2006/main">
+          <a:lstStyle/>
+          <a:p>
             <a:pPr algn="l">
               <a:defRPr sz="2100" b="1">
                 <a:solidFill>
@@ -3387,38 +3114,38 @@
       </p:sp>
       <p:sp>
         <p:nvSpPr>
-          <p:cNvPr id="19" name="">
-            <a:extLst xmlns:a="http://schemas.openxmlformats.org/drawingml/2006/main">
+          <p:cNvPr id="19" name="Rectangle 18">
+            <a:extLst>
               <a:ext uri="{FF2B5EF4-FFF2-40B4-BE49-F238E27FC236}">
                 <a16:creationId xmlns:a16="http://schemas.microsoft.com/office/drawing/2014/main" id="{36B0F664-B959-42BF-ABBC-6980BA9782C7}"/>
               </a:ext>
             </a:extLst>
           </p:cNvPr>
           <p:cNvSpPr>
-            <a:spLocks xmlns:a="http://schemas.openxmlformats.org/drawingml/2006/main" noGrp="1"/>
-          </p:cNvSpPr>
-          <p:nvPr/>
-        </p:nvSpPr>
-        <p:spPr>
-          <a:xfrm xmlns:a="http://schemas.openxmlformats.org/drawingml/2006/main">
+            <a:spLocks noGrp="1"/>
+          </p:cNvSpPr>
+          <p:nvPr/>
+        </p:nvSpPr>
+        <p:spPr>
+          <a:xfrm>
             <a:off x="7572375" y="3276600"/>
             <a:ext cx="1562100" cy="514350"/>
           </a:xfrm>
-          <a:prstGeom xmlns:a="http://schemas.openxmlformats.org/drawingml/2006/main" prst="rect">
-            <a:avLst/>
-          </a:prstGeom>
-          <a:noFill xmlns:a="http://schemas.openxmlformats.org/drawingml/2006/main"/>
-          <a:ln xmlns:a="http://schemas.openxmlformats.org/drawingml/2006/main" w="0">
-            <a:noFill/>
-            <a:prstDash val="solid"/>
-          </a:ln>
-        </p:spPr>
-        <p:txBody>
-          <a:bodyPr xmlns:a="http://schemas.openxmlformats.org/drawingml/2006/main" wrap="square" lIns="0" tIns="0" rIns="0" bIns="0" anchor="t">
-            <a:normAutofit fontScale="100000"/>
+          <a:prstGeom prst="rect">
+            <a:avLst/>
+          </a:prstGeom>
+          <a:noFill/>
+          <a:ln w="0">
+            <a:noFill/>
+            <a:prstDash val="solid"/>
+          </a:ln>
+        </p:spPr>
+        <p:txBody>
+          <a:bodyPr wrap="square" lIns="0" tIns="0" rIns="0" bIns="0" anchor="t">
+            <a:normAutofit/>
           </a:bodyPr>
-          <a:lstStyle xmlns:a="http://schemas.openxmlformats.org/drawingml/2006/main"/>
-          <a:p xmlns:a="http://schemas.openxmlformats.org/drawingml/2006/main">
+          <a:lstStyle/>
+          <a:p>
             <a:pPr algn="l">
               <a:defRPr sz="1500" b="0">
                 <a:solidFill>
@@ -3441,7 +3168,7 @@
               <a:t>Deal the final</a:t>
             </a:r>
           </a:p>
-          <a:p xmlns:a="http://schemas.openxmlformats.org/drawingml/2006/main">
+          <a:p>
             <a:pPr algn="l">
               <a:defRPr sz="1500" b="0">
                 <a:solidFill>
@@ -3469,29 +3196,29 @@
       <p:sp>
         <p:nvSpPr>
           <p:cNvPr id="20" name="stage-5">
-            <a:extLst xmlns:a="http://schemas.openxmlformats.org/drawingml/2006/main">
+            <a:extLst>
               <a:ext uri="{FF2B5EF4-FFF2-40B4-BE49-F238E27FC236}">
                 <a16:creationId xmlns:a16="http://schemas.microsoft.com/office/drawing/2014/main" id="{212DFE6C-F16B-4BFF-A68E-A51EE8F49179}"/>
               </a:ext>
             </a:extLst>
           </p:cNvPr>
           <p:cNvSpPr>
-            <a:spLocks xmlns:a="http://schemas.openxmlformats.org/drawingml/2006/main" noGrp="1"/>
-          </p:cNvSpPr>
-          <p:nvPr/>
-        </p:nvSpPr>
-        <p:spPr>
-          <a:xfrm xmlns:a="http://schemas.openxmlformats.org/drawingml/2006/main">
+            <a:spLocks noGrp="1"/>
+          </p:cNvSpPr>
+          <p:nvPr/>
+        </p:nvSpPr>
+        <p:spPr>
+          <a:xfrm>
             <a:off x="9639300" y="2324100"/>
             <a:ext cx="1905000" cy="1485900"/>
           </a:xfrm>
-          <a:prstGeom xmlns:a="http://schemas.openxmlformats.org/drawingml/2006/main" prst="rect">
-            <a:avLst/>
-          </a:prstGeom>
-          <a:solidFill xmlns:a="http://schemas.openxmlformats.org/drawingml/2006/main">
+          <a:prstGeom prst="rect">
+            <a:avLst/>
+          </a:prstGeom>
+          <a:solidFill>
             <a:srgbClr val="163B32"/>
           </a:solidFill>
-          <a:ln xmlns:a="http://schemas.openxmlformats.org/drawingml/2006/main" w="14288">
+          <a:ln w="14288">
             <a:solidFill>
               <a:srgbClr val="163B32"/>
             </a:solidFill>
@@ -3501,38 +3228,38 @@
       </p:sp>
       <p:sp>
         <p:nvSpPr>
-          <p:cNvPr id="21" name="">
-            <a:extLst xmlns:a="http://schemas.openxmlformats.org/drawingml/2006/main">
+          <p:cNvPr id="21" name="Rectangle 20">
+            <a:extLst>
               <a:ext uri="{FF2B5EF4-FFF2-40B4-BE49-F238E27FC236}">
                 <a16:creationId xmlns:a16="http://schemas.microsoft.com/office/drawing/2014/main" id="{B8201D7E-8191-4CCA-9E45-D0595450DBE7}"/>
               </a:ext>
             </a:extLst>
           </p:cNvPr>
           <p:cNvSpPr>
-            <a:spLocks xmlns:a="http://schemas.openxmlformats.org/drawingml/2006/main" noGrp="1"/>
-          </p:cNvSpPr>
-          <p:nvPr/>
-        </p:nvSpPr>
-        <p:spPr>
-          <a:xfrm xmlns:a="http://schemas.openxmlformats.org/drawingml/2006/main">
+            <a:spLocks noGrp="1"/>
+          </p:cNvSpPr>
+          <p:nvPr/>
+        </p:nvSpPr>
+        <p:spPr>
+          <a:xfrm>
             <a:off x="9810750" y="2457450"/>
             <a:ext cx="400050" cy="266700"/>
           </a:xfrm>
-          <a:prstGeom xmlns:a="http://schemas.openxmlformats.org/drawingml/2006/main" prst="rect">
-            <a:avLst/>
-          </a:prstGeom>
-          <a:noFill xmlns:a="http://schemas.openxmlformats.org/drawingml/2006/main"/>
-          <a:ln xmlns:a="http://schemas.openxmlformats.org/drawingml/2006/main" w="0">
-            <a:noFill/>
-            <a:prstDash val="solid"/>
-          </a:ln>
-        </p:spPr>
-        <p:txBody>
-          <a:bodyPr xmlns:a="http://schemas.openxmlformats.org/drawingml/2006/main" wrap="square" lIns="0" tIns="0" rIns="0" bIns="0" anchor="t">
-            <a:normAutofit fontScale="100000"/>
+          <a:prstGeom prst="rect">
+            <a:avLst/>
+          </a:prstGeom>
+          <a:noFill/>
+          <a:ln w="0">
+            <a:noFill/>
+            <a:prstDash val="solid"/>
+          </a:ln>
+        </p:spPr>
+        <p:txBody>
+          <a:bodyPr wrap="square" lIns="0" tIns="0" rIns="0" bIns="0" anchor="t">
+            <a:normAutofit/>
           </a:bodyPr>
-          <a:lstStyle xmlns:a="http://schemas.openxmlformats.org/drawingml/2006/main"/>
-          <a:p xmlns:a="http://schemas.openxmlformats.org/drawingml/2006/main">
+          <a:lstStyle/>
+          <a:p>
             <a:pPr algn="l">
               <a:defRPr sz="1350" b="1">
                 <a:solidFill>
@@ -3559,38 +3286,38 @@
       </p:sp>
       <p:sp>
         <p:nvSpPr>
-          <p:cNvPr id="22" name="">
-            <a:extLst xmlns:a="http://schemas.openxmlformats.org/drawingml/2006/main">
+          <p:cNvPr id="22" name="Rectangle 21">
+            <a:extLst>
               <a:ext uri="{FF2B5EF4-FFF2-40B4-BE49-F238E27FC236}">
                 <a16:creationId xmlns:a16="http://schemas.microsoft.com/office/drawing/2014/main" id="{35866FFD-7C9E-49FC-AB2C-A8A1015F6494}"/>
               </a:ext>
             </a:extLst>
           </p:cNvPr>
           <p:cNvSpPr>
-            <a:spLocks xmlns:a="http://schemas.openxmlformats.org/drawingml/2006/main" noGrp="1"/>
-          </p:cNvSpPr>
-          <p:nvPr/>
-        </p:nvSpPr>
-        <p:spPr>
-          <a:xfrm xmlns:a="http://schemas.openxmlformats.org/drawingml/2006/main">
+            <a:spLocks noGrp="1"/>
+          </p:cNvSpPr>
+          <p:nvPr/>
+        </p:nvSpPr>
+        <p:spPr>
+          <a:xfrm>
             <a:off x="9810750" y="2781300"/>
             <a:ext cx="1562100" cy="381000"/>
           </a:xfrm>
-          <a:prstGeom xmlns:a="http://schemas.openxmlformats.org/drawingml/2006/main" prst="rect">
-            <a:avLst/>
-          </a:prstGeom>
-          <a:noFill xmlns:a="http://schemas.openxmlformats.org/drawingml/2006/main"/>
-          <a:ln xmlns:a="http://schemas.openxmlformats.org/drawingml/2006/main" w="0">
-            <a:noFill/>
-            <a:prstDash val="solid"/>
-          </a:ln>
-        </p:spPr>
-        <p:txBody>
-          <a:bodyPr xmlns:a="http://schemas.openxmlformats.org/drawingml/2006/main" wrap="square" lIns="0" tIns="0" rIns="0" bIns="0" anchor="t">
-            <a:normAutofit fontScale="100000"/>
+          <a:prstGeom prst="rect">
+            <a:avLst/>
+          </a:prstGeom>
+          <a:noFill/>
+          <a:ln w="0">
+            <a:noFill/>
+            <a:prstDash val="solid"/>
+          </a:ln>
+        </p:spPr>
+        <p:txBody>
+          <a:bodyPr wrap="square" lIns="0" tIns="0" rIns="0" bIns="0" anchor="t">
+            <a:normAutofit/>
           </a:bodyPr>
-          <a:lstStyle xmlns:a="http://schemas.openxmlformats.org/drawingml/2006/main"/>
-          <a:p xmlns:a="http://schemas.openxmlformats.org/drawingml/2006/main">
+          <a:lstStyle/>
+          <a:p>
             <a:pPr algn="l">
               <a:defRPr sz="2100" b="1">
                 <a:solidFill>
@@ -3617,38 +3344,38 @@
       </p:sp>
       <p:sp>
         <p:nvSpPr>
-          <p:cNvPr id="23" name="">
-            <a:extLst xmlns:a="http://schemas.openxmlformats.org/drawingml/2006/main">
+          <p:cNvPr id="23" name="Rectangle 22">
+            <a:extLst>
               <a:ext uri="{FF2B5EF4-FFF2-40B4-BE49-F238E27FC236}">
                 <a16:creationId xmlns:a16="http://schemas.microsoft.com/office/drawing/2014/main" id="{CA13CCC6-B980-460C-9D22-E9BE166F7FE0}"/>
               </a:ext>
             </a:extLst>
           </p:cNvPr>
           <p:cNvSpPr>
-            <a:spLocks xmlns:a="http://schemas.openxmlformats.org/drawingml/2006/main" noGrp="1"/>
-          </p:cNvSpPr>
-          <p:nvPr/>
-        </p:nvSpPr>
-        <p:spPr>
-          <a:xfrm xmlns:a="http://schemas.openxmlformats.org/drawingml/2006/main">
+            <a:spLocks noGrp="1"/>
+          </p:cNvSpPr>
+          <p:nvPr/>
+        </p:nvSpPr>
+        <p:spPr>
+          <a:xfrm>
             <a:off x="9810750" y="3276600"/>
             <a:ext cx="1562100" cy="514350"/>
           </a:xfrm>
-          <a:prstGeom xmlns:a="http://schemas.openxmlformats.org/drawingml/2006/main" prst="rect">
-            <a:avLst/>
-          </a:prstGeom>
-          <a:noFill xmlns:a="http://schemas.openxmlformats.org/drawingml/2006/main"/>
-          <a:ln xmlns:a="http://schemas.openxmlformats.org/drawingml/2006/main" w="0">
-            <a:noFill/>
-            <a:prstDash val="solid"/>
-          </a:ln>
-        </p:spPr>
-        <p:txBody>
-          <a:bodyPr xmlns:a="http://schemas.openxmlformats.org/drawingml/2006/main" wrap="square" lIns="0" tIns="0" rIns="0" bIns="0" anchor="t">
+          <a:prstGeom prst="rect">
+            <a:avLst/>
+          </a:prstGeom>
+          <a:noFill/>
+          <a:ln w="0">
+            <a:noFill/>
+            <a:prstDash val="solid"/>
+          </a:ln>
+        </p:spPr>
+        <p:txBody>
+          <a:bodyPr wrap="square" lIns="0" tIns="0" rIns="0" bIns="0" anchor="t">
             <a:normAutofit fontScale="69027"/>
           </a:bodyPr>
-          <a:lstStyle xmlns:a="http://schemas.openxmlformats.org/drawingml/2006/main"/>
-          <a:p xmlns:a="http://schemas.openxmlformats.org/drawingml/2006/main">
+          <a:lstStyle/>
+          <a:p>
             <a:pPr algn="l">
               <a:defRPr sz="1500" b="0">
                 <a:solidFill>
@@ -3671,7 +3398,7 @@
               <a:t>Select the best five cards</a:t>
             </a:r>
           </a:p>
-          <a:p xmlns:a="http://schemas.openxmlformats.org/drawingml/2006/main">
+          <a:p>
             <a:pPr algn="l">
               <a:defRPr sz="1500" b="0">
                 <a:solidFill>
@@ -3698,22 +3425,22 @@
       </p:sp>
       <p:cxnSp>
         <p:nvCxnSpPr>
-          <p:cNvPr id="52" name=""/>
+          <p:cNvPr id="52" name="Straight Arrow Connector 51"/>
           <p:cNvCxnSpPr>
-            <a:stCxn xmlns:a="http://schemas.openxmlformats.org/drawingml/2006/main" id="4" idx="3"/>
-            <a:endCxn xmlns:a="http://schemas.openxmlformats.org/drawingml/2006/main" id="8" idx="1"/>
+            <a:stCxn id="4" idx="3"/>
+            <a:endCxn id="8" idx="1"/>
           </p:cNvCxnSpPr>
           <p:nvPr/>
         </p:nvCxnSpPr>
         <p:spPr>
-          <a:xfrm xmlns:a="http://schemas.openxmlformats.org/drawingml/2006/main">
+          <a:xfrm>
             <a:off x="2590800" y="3067050"/>
             <a:ext cx="333375" cy="0"/>
           </a:xfrm>
-          <a:prstGeom xmlns:a="http://schemas.openxmlformats.org/drawingml/2006/main" prst="straightConnector1">
-            <a:avLst/>
-          </a:prstGeom>
-          <a:ln xmlns:a="http://schemas.openxmlformats.org/drawingml/2006/main" w="19050">
+          <a:prstGeom prst="straightConnector1">
+            <a:avLst/>
+          </a:prstGeom>
+          <a:ln w="19050">
             <a:solidFill>
               <a:srgbClr val="2F6656"/>
             </a:solidFill>
@@ -3724,22 +3451,22 @@
       </p:cxnSp>
       <p:cxnSp>
         <p:nvCxnSpPr>
-          <p:cNvPr id="53" name=""/>
+          <p:cNvPr id="53" name="Straight Arrow Connector 52"/>
           <p:cNvCxnSpPr>
-            <a:stCxn xmlns:a="http://schemas.openxmlformats.org/drawingml/2006/main" id="8" idx="3"/>
-            <a:endCxn xmlns:a="http://schemas.openxmlformats.org/drawingml/2006/main" id="12" idx="1"/>
+            <a:stCxn id="8" idx="3"/>
+            <a:endCxn id="12" idx="1"/>
           </p:cNvCxnSpPr>
           <p:nvPr/>
         </p:nvCxnSpPr>
         <p:spPr>
-          <a:xfrm xmlns:a="http://schemas.openxmlformats.org/drawingml/2006/main">
+          <a:xfrm>
             <a:off x="4829175" y="3067050"/>
             <a:ext cx="333375" cy="0"/>
           </a:xfrm>
-          <a:prstGeom xmlns:a="http://schemas.openxmlformats.org/drawingml/2006/main" prst="straightConnector1">
-            <a:avLst/>
-          </a:prstGeom>
-          <a:ln xmlns:a="http://schemas.openxmlformats.org/drawingml/2006/main" w="19050">
+          <a:prstGeom prst="straightConnector1">
+            <a:avLst/>
+          </a:prstGeom>
+          <a:ln w="19050">
             <a:solidFill>
               <a:srgbClr val="2F6656"/>
             </a:solidFill>
@@ -3750,22 +3477,22 @@
       </p:cxnSp>
       <p:cxnSp>
         <p:nvCxnSpPr>
-          <p:cNvPr id="54" name=""/>
+          <p:cNvPr id="54" name="Straight Arrow Connector 53"/>
           <p:cNvCxnSpPr>
-            <a:stCxn xmlns:a="http://schemas.openxmlformats.org/drawingml/2006/main" id="12" idx="3"/>
-            <a:endCxn xmlns:a="http://schemas.openxmlformats.org/drawingml/2006/main" id="16" idx="1"/>
+            <a:stCxn id="12" idx="3"/>
+            <a:endCxn id="16" idx="1"/>
           </p:cNvCxnSpPr>
           <p:nvPr/>
         </p:nvCxnSpPr>
         <p:spPr>
-          <a:xfrm xmlns:a="http://schemas.openxmlformats.org/drawingml/2006/main">
+          <a:xfrm>
             <a:off x="7067550" y="3067050"/>
             <a:ext cx="333375" cy="0"/>
           </a:xfrm>
-          <a:prstGeom xmlns:a="http://schemas.openxmlformats.org/drawingml/2006/main" prst="straightConnector1">
-            <a:avLst/>
-          </a:prstGeom>
-          <a:ln xmlns:a="http://schemas.openxmlformats.org/drawingml/2006/main" w="19050">
+          <a:prstGeom prst="straightConnector1">
+            <a:avLst/>
+          </a:prstGeom>
+          <a:ln w="19050">
             <a:solidFill>
               <a:srgbClr val="2F6656"/>
             </a:solidFill>
@@ -3776,22 +3503,22 @@
       </p:cxnSp>
       <p:cxnSp>
         <p:nvCxnSpPr>
-          <p:cNvPr id="55" name=""/>
+          <p:cNvPr id="55" name="Straight Arrow Connector 54"/>
           <p:cNvCxnSpPr>
-            <a:stCxn xmlns:a="http://schemas.openxmlformats.org/drawingml/2006/main" id="16" idx="3"/>
-            <a:endCxn xmlns:a="http://schemas.openxmlformats.org/drawingml/2006/main" id="20" idx="1"/>
+            <a:stCxn id="16" idx="3"/>
+            <a:endCxn id="20" idx="1"/>
           </p:cNvCxnSpPr>
           <p:nvPr/>
         </p:nvCxnSpPr>
         <p:spPr>
-          <a:xfrm xmlns:a="http://schemas.openxmlformats.org/drawingml/2006/main">
+          <a:xfrm>
             <a:off x="9305925" y="3067050"/>
             <a:ext cx="333375" cy="0"/>
           </a:xfrm>
-          <a:prstGeom xmlns:a="http://schemas.openxmlformats.org/drawingml/2006/main" prst="straightConnector1">
-            <a:avLst/>
-          </a:prstGeom>
-          <a:ln xmlns:a="http://schemas.openxmlformats.org/drawingml/2006/main" w="19050">
+          <a:prstGeom prst="straightConnector1">
+            <a:avLst/>
+          </a:prstGeom>
+          <a:ln w="19050">
             <a:solidFill>
               <a:srgbClr val="2F6656"/>
             </a:solidFill>
@@ -3802,38 +3529,38 @@
       </p:cxnSp>
       <p:sp>
         <p:nvSpPr>
-          <p:cNvPr id="28" name="">
-            <a:extLst xmlns:a="http://schemas.openxmlformats.org/drawingml/2006/main">
+          <p:cNvPr id="28" name="Rectangle 27">
+            <a:extLst>
               <a:ext uri="{FF2B5EF4-FFF2-40B4-BE49-F238E27FC236}">
                 <a16:creationId xmlns:a16="http://schemas.microsoft.com/office/drawing/2014/main" id="{8B38BBDE-1140-416F-BCF5-222932FFFD6A}"/>
               </a:ext>
             </a:extLst>
           </p:cNvPr>
           <p:cNvSpPr>
-            <a:spLocks xmlns:a="http://schemas.openxmlformats.org/drawingml/2006/main" noGrp="1"/>
-          </p:cNvSpPr>
-          <p:nvPr/>
-        </p:nvSpPr>
-        <p:spPr>
-          <a:xfrm xmlns:a="http://schemas.openxmlformats.org/drawingml/2006/main">
+            <a:spLocks noGrp="1"/>
+          </p:cNvSpPr>
+          <p:nvPr/>
+        </p:nvSpPr>
+        <p:spPr>
+          <a:xfrm>
             <a:off x="742950" y="4381500"/>
             <a:ext cx="10668000" cy="704850"/>
           </a:xfrm>
-          <a:prstGeom xmlns:a="http://schemas.openxmlformats.org/drawingml/2006/main" prst="rect">
-            <a:avLst/>
-          </a:prstGeom>
-          <a:noFill xmlns:a="http://schemas.openxmlformats.org/drawingml/2006/main"/>
-          <a:ln xmlns:a="http://schemas.openxmlformats.org/drawingml/2006/main" w="0">
-            <a:noFill/>
-            <a:prstDash val="solid"/>
-          </a:ln>
-        </p:spPr>
-        <p:txBody>
-          <a:bodyPr xmlns:a="http://schemas.openxmlformats.org/drawingml/2006/main" wrap="square" lIns="0" tIns="0" rIns="0" bIns="0" anchor="t">
-            <a:normAutofit fontScale="100000"/>
+          <a:prstGeom prst="rect">
+            <a:avLst/>
+          </a:prstGeom>
+          <a:noFill/>
+          <a:ln w="0">
+            <a:noFill/>
+            <a:prstDash val="solid"/>
+          </a:ln>
+        </p:spPr>
+        <p:txBody>
+          <a:bodyPr wrap="square" lIns="0" tIns="0" rIns="0" bIns="0" anchor="t">
+            <a:normAutofit/>
           </a:bodyPr>
-          <a:lstStyle xmlns:a="http://schemas.openxmlformats.org/drawingml/2006/main"/>
-          <a:p xmlns:a="http://schemas.openxmlformats.org/drawingml/2006/main">
+          <a:lstStyle/>
+          <a:p>
             <a:pPr algn="l">
               <a:defRPr sz="1800" b="0">
                 <a:solidFill>
@@ -3865,17 +3592,21 @@
       </p:ext>
     </p:extLst>
   </p:cSld>
+  <p:clrMapOvr>
+    <a:masterClrMapping/>
+  </p:clrMapOvr>
 </p:sld>
 </file>
 
 <file path=ppt/slides/slide4.xml><?xml version="1.0" encoding="utf-8"?>
-<p:sld xmlns:p="http://schemas.openxmlformats.org/presentationml/2006/main">
+<p:sld xmlns:a="http://schemas.openxmlformats.org/drawingml/2006/main" xmlns:r="http://schemas.openxmlformats.org/officeDocument/2006/relationships" xmlns:p="http://schemas.openxmlformats.org/presentationml/2006/main">
   <p:cSld>
     <p:bg>
       <p:bgPr>
-        <a:solidFill xmlns:a="http://schemas.openxmlformats.org/drawingml/2006/main">
+        <a:solidFill>
           <a:srgbClr val="F5F1E7"/>
         </a:solidFill>
+        <a:effectLst/>
       </p:bgPr>
     </p:bg>
     <p:spTree>
@@ -3885,42 +3616,47 @@
         <p:nvPr/>
       </p:nvGrpSpPr>
       <p:grpSpPr>
-        <a:xfrm xmlns:a="http://schemas.openxmlformats.org/drawingml/2006/main"/>
+        <a:xfrm>
+          <a:off x="0" y="0"/>
+          <a:ext cx="0" cy="0"/>
+          <a:chOff x="0" y="0"/>
+          <a:chExt cx="0" cy="0"/>
+        </a:xfrm>
       </p:grpSpPr>
       <p:sp>
         <p:nvSpPr>
-          <p:cNvPr id="20" name="">
-            <a:extLst xmlns:a="http://schemas.openxmlformats.org/drawingml/2006/main">
+          <p:cNvPr id="20" name="Rectangle 19">
+            <a:extLst>
               <a:ext uri="{FF2B5EF4-FFF2-40B4-BE49-F238E27FC236}">
                 <a16:creationId xmlns:a16="http://schemas.microsoft.com/office/drawing/2014/main" id="{400D1285-CE91-4DDA-9CE9-C36EEB465A4B}"/>
               </a:ext>
             </a:extLst>
           </p:cNvPr>
           <p:cNvSpPr>
-            <a:spLocks xmlns:a="http://schemas.openxmlformats.org/drawingml/2006/main" noGrp="1"/>
-          </p:cNvSpPr>
-          <p:nvPr/>
-        </p:nvSpPr>
-        <p:spPr>
-          <a:xfrm xmlns:a="http://schemas.openxmlformats.org/drawingml/2006/main">
+            <a:spLocks noGrp="1"/>
+          </p:cNvSpPr>
+          <p:nvPr/>
+        </p:nvSpPr>
+        <p:spPr>
+          <a:xfrm>
             <a:off x="685800" y="495300"/>
             <a:ext cx="10820400" cy="609600"/>
           </a:xfrm>
-          <a:prstGeom xmlns:a="http://schemas.openxmlformats.org/drawingml/2006/main" prst="rect">
-            <a:avLst/>
-          </a:prstGeom>
-          <a:noFill xmlns:a="http://schemas.openxmlformats.org/drawingml/2006/main"/>
-          <a:ln xmlns:a="http://schemas.openxmlformats.org/drawingml/2006/main" w="0">
-            <a:noFill/>
-            <a:prstDash val="solid"/>
-          </a:ln>
-        </p:spPr>
-        <p:txBody>
-          <a:bodyPr xmlns:a="http://schemas.openxmlformats.org/drawingml/2006/main" wrap="square" lIns="0" tIns="0" rIns="0" bIns="0" anchor="t">
-            <a:normAutofit fontScale="100000"/>
+          <a:prstGeom prst="rect">
+            <a:avLst/>
+          </a:prstGeom>
+          <a:noFill/>
+          <a:ln w="0">
+            <a:noFill/>
+            <a:prstDash val="solid"/>
+          </a:ln>
+        </p:spPr>
+        <p:txBody>
+          <a:bodyPr wrap="square" lIns="0" tIns="0" rIns="0" bIns="0" anchor="t">
+            <a:normAutofit/>
           </a:bodyPr>
-          <a:lstStyle xmlns:a="http://schemas.openxmlformats.org/drawingml/2006/main"/>
-          <a:p xmlns:a="http://schemas.openxmlformats.org/drawingml/2006/main">
+          <a:lstStyle/>
+          <a:p>
             <a:pPr algn="l">
               <a:defRPr sz="3300" b="1">
                 <a:solidFill>
@@ -3947,69 +3683,69 @@
       </p:sp>
       <p:sp>
         <p:nvSpPr>
-          <p:cNvPr id="2" name="">
-            <a:extLst xmlns:a="http://schemas.openxmlformats.org/drawingml/2006/main">
+          <p:cNvPr id="2" name="Rectangle 1">
+            <a:extLst>
               <a:ext uri="{FF2B5EF4-FFF2-40B4-BE49-F238E27FC236}">
                 <a16:creationId xmlns:a16="http://schemas.microsoft.com/office/drawing/2014/main" id="{ADDC3858-6B9B-4FFE-8E6C-513FD192AA56}"/>
               </a:ext>
             </a:extLst>
           </p:cNvPr>
           <p:cNvSpPr>
-            <a:spLocks xmlns:a="http://schemas.openxmlformats.org/drawingml/2006/main" noGrp="1"/>
-          </p:cNvSpPr>
-          <p:nvPr/>
-        </p:nvSpPr>
-        <p:spPr>
-          <a:xfrm xmlns:a="http://schemas.openxmlformats.org/drawingml/2006/main">
+            <a:spLocks noGrp="1"/>
+          </p:cNvSpPr>
+          <p:nvPr/>
+        </p:nvSpPr>
+        <p:spPr>
+          <a:xfrm>
             <a:off x="685800" y="1219200"/>
             <a:ext cx="800100" cy="38100"/>
           </a:xfrm>
-          <a:prstGeom xmlns:a="http://schemas.openxmlformats.org/drawingml/2006/main" prst="rect">
-            <a:avLst/>
-          </a:prstGeom>
-          <a:solidFill xmlns:a="http://schemas.openxmlformats.org/drawingml/2006/main">
+          <a:prstGeom prst="rect">
+            <a:avLst/>
+          </a:prstGeom>
+          <a:solidFill>
             <a:srgbClr val="D8B86A"/>
           </a:solidFill>
-          <a:ln xmlns:a="http://schemas.openxmlformats.org/drawingml/2006/main" w="0">
-            <a:noFill/>
-            <a:prstDash val="solid"/>
-          </a:ln>
-        </p:spPr>
-      </p:sp>
-      <p:sp>
-        <p:nvSpPr>
-          <p:cNvPr id="3" name="">
-            <a:extLst xmlns:a="http://schemas.openxmlformats.org/drawingml/2006/main">
+          <a:ln w="0">
+            <a:noFill/>
+            <a:prstDash val="solid"/>
+          </a:ln>
+        </p:spPr>
+      </p:sp>
+      <p:sp>
+        <p:nvSpPr>
+          <p:cNvPr id="3" name="Rectangle 2">
+            <a:extLst>
               <a:ext uri="{FF2B5EF4-FFF2-40B4-BE49-F238E27FC236}">
                 <a16:creationId xmlns:a16="http://schemas.microsoft.com/office/drawing/2014/main" id="{8F5B3AE5-7793-4866-9176-2AD64BCF59F9}"/>
               </a:ext>
             </a:extLst>
           </p:cNvPr>
           <p:cNvSpPr>
-            <a:spLocks xmlns:a="http://schemas.openxmlformats.org/drawingml/2006/main" noGrp="1"/>
-          </p:cNvSpPr>
-          <p:nvPr/>
-        </p:nvSpPr>
-        <p:spPr>
-          <a:xfrm xmlns:a="http://schemas.openxmlformats.org/drawingml/2006/main">
+            <a:spLocks noGrp="1"/>
+          </p:cNvSpPr>
+          <p:nvPr/>
+        </p:nvSpPr>
+        <p:spPr>
+          <a:xfrm>
             <a:off x="876300" y="1885950"/>
             <a:ext cx="4095750" cy="838200"/>
           </a:xfrm>
-          <a:prstGeom xmlns:a="http://schemas.openxmlformats.org/drawingml/2006/main" prst="rect">
-            <a:avLst/>
-          </a:prstGeom>
-          <a:noFill xmlns:a="http://schemas.openxmlformats.org/drawingml/2006/main"/>
-          <a:ln xmlns:a="http://schemas.openxmlformats.org/drawingml/2006/main" w="0">
-            <a:noFill/>
-            <a:prstDash val="solid"/>
-          </a:ln>
-        </p:spPr>
-        <p:txBody>
-          <a:bodyPr xmlns:a="http://schemas.openxmlformats.org/drawingml/2006/main" wrap="square" lIns="0" tIns="0" rIns="0" bIns="0" anchor="t">
-            <a:normAutofit fontScale="100000"/>
+          <a:prstGeom prst="rect">
+            <a:avLst/>
+          </a:prstGeom>
+          <a:noFill/>
+          <a:ln w="0">
+            <a:noFill/>
+            <a:prstDash val="solid"/>
+          </a:ln>
+        </p:spPr>
+        <p:txBody>
+          <a:bodyPr wrap="square" lIns="0" tIns="0" rIns="0" bIns="0" anchor="t">
+            <a:normAutofit/>
           </a:bodyPr>
-          <a:lstStyle xmlns:a="http://schemas.openxmlformats.org/drawingml/2006/main"/>
-          <a:p xmlns:a="http://schemas.openxmlformats.org/drawingml/2006/main">
+          <a:lstStyle/>
+          <a:p>
             <a:pPr algn="l">
               <a:defRPr sz="4350" b="1">
                 <a:solidFill>
@@ -4036,38 +3772,38 @@
       </p:sp>
       <p:sp>
         <p:nvSpPr>
-          <p:cNvPr id="4" name="">
-            <a:extLst xmlns:a="http://schemas.openxmlformats.org/drawingml/2006/main">
+          <p:cNvPr id="4" name="Rectangle 3">
+            <a:extLst>
               <a:ext uri="{FF2B5EF4-FFF2-40B4-BE49-F238E27FC236}">
                 <a16:creationId xmlns:a16="http://schemas.microsoft.com/office/drawing/2014/main" id="{C4FFD37A-BFF9-4378-ADCF-73DBB00C542A}"/>
               </a:ext>
             </a:extLst>
           </p:cNvPr>
           <p:cNvSpPr>
-            <a:spLocks xmlns:a="http://schemas.openxmlformats.org/drawingml/2006/main" noGrp="1"/>
-          </p:cNvSpPr>
-          <p:nvPr/>
-        </p:nvSpPr>
-        <p:spPr>
-          <a:xfrm xmlns:a="http://schemas.openxmlformats.org/drawingml/2006/main">
+            <a:spLocks noGrp="1"/>
+          </p:cNvSpPr>
+          <p:nvPr/>
+        </p:nvSpPr>
+        <p:spPr>
+          <a:xfrm>
             <a:off x="914400" y="2838450"/>
             <a:ext cx="4143375" cy="895350"/>
           </a:xfrm>
-          <a:prstGeom xmlns:a="http://schemas.openxmlformats.org/drawingml/2006/main" prst="rect">
-            <a:avLst/>
-          </a:prstGeom>
-          <a:noFill xmlns:a="http://schemas.openxmlformats.org/drawingml/2006/main"/>
-          <a:ln xmlns:a="http://schemas.openxmlformats.org/drawingml/2006/main" w="0">
-            <a:noFill/>
-            <a:prstDash val="solid"/>
-          </a:ln>
-        </p:spPr>
-        <p:txBody>
-          <a:bodyPr xmlns:a="http://schemas.openxmlformats.org/drawingml/2006/main" wrap="square" lIns="0" tIns="0" rIns="0" bIns="0" anchor="t">
-            <a:normAutofit fontScale="100000"/>
+          <a:prstGeom prst="rect">
+            <a:avLst/>
+          </a:prstGeom>
+          <a:noFill/>
+          <a:ln w="0">
+            <a:noFill/>
+            <a:prstDash val="solid"/>
+          </a:ln>
+        </p:spPr>
+        <p:txBody>
+          <a:bodyPr wrap="square" lIns="0" tIns="0" rIns="0" bIns="0" anchor="t">
+            <a:normAutofit/>
           </a:bodyPr>
-          <a:lstStyle xmlns:a="http://schemas.openxmlformats.org/drawingml/2006/main"/>
-          <a:p xmlns:a="http://schemas.openxmlformats.org/drawingml/2006/main">
+          <a:lstStyle/>
+          <a:p>
             <a:pPr algn="l">
               <a:defRPr sz="1875" b="0">
                 <a:solidFill>
@@ -4094,38 +3830,38 @@
       </p:sp>
       <p:sp>
         <p:nvSpPr>
-          <p:cNvPr id="5" name="">
-            <a:extLst xmlns:a="http://schemas.openxmlformats.org/drawingml/2006/main">
+          <p:cNvPr id="5" name="Rectangle 4">
+            <a:extLst>
               <a:ext uri="{FF2B5EF4-FFF2-40B4-BE49-F238E27FC236}">
                 <a16:creationId xmlns:a16="http://schemas.microsoft.com/office/drawing/2014/main" id="{F882CB0D-E436-4580-A36B-4D2E09AE824C}"/>
               </a:ext>
             </a:extLst>
           </p:cNvPr>
           <p:cNvSpPr>
-            <a:spLocks xmlns:a="http://schemas.openxmlformats.org/drawingml/2006/main" noGrp="1"/>
-          </p:cNvSpPr>
-          <p:nvPr/>
-        </p:nvSpPr>
-        <p:spPr>
-          <a:xfrm xmlns:a="http://schemas.openxmlformats.org/drawingml/2006/main">
+            <a:spLocks noGrp="1"/>
+          </p:cNvSpPr>
+          <p:nvPr/>
+        </p:nvSpPr>
+        <p:spPr>
+          <a:xfrm>
             <a:off x="5619750" y="1714500"/>
             <a:ext cx="4667250" cy="361950"/>
           </a:xfrm>
-          <a:prstGeom xmlns:a="http://schemas.openxmlformats.org/drawingml/2006/main" prst="rect">
-            <a:avLst/>
-          </a:prstGeom>
-          <a:noFill xmlns:a="http://schemas.openxmlformats.org/drawingml/2006/main"/>
-          <a:ln xmlns:a="http://schemas.openxmlformats.org/drawingml/2006/main" w="0">
-            <a:noFill/>
-            <a:prstDash val="solid"/>
-          </a:ln>
-        </p:spPr>
-        <p:txBody>
-          <a:bodyPr xmlns:a="http://schemas.openxmlformats.org/drawingml/2006/main" wrap="square" lIns="0" tIns="0" rIns="0" bIns="0" anchor="t">
+          <a:prstGeom prst="rect">
+            <a:avLst/>
+          </a:prstGeom>
+          <a:noFill/>
+          <a:ln w="0">
+            <a:noFill/>
+            <a:prstDash val="solid"/>
+          </a:ln>
+        </p:spPr>
+        <p:txBody>
+          <a:bodyPr wrap="square" lIns="0" tIns="0" rIns="0" bIns="0" anchor="t">
             <a:normAutofit fontScale="91846"/>
           </a:bodyPr>
-          <a:lstStyle xmlns:a="http://schemas.openxmlformats.org/drawingml/2006/main"/>
-          <a:p xmlns:a="http://schemas.openxmlformats.org/drawingml/2006/main">
+          <a:lstStyle/>
+          <a:p>
             <a:pPr algn="l">
               <a:defRPr sz="2025" b="1">
                 <a:solidFill>
@@ -4152,38 +3888,38 @@
       </p:sp>
       <p:sp>
         <p:nvSpPr>
-          <p:cNvPr id="6" name="">
-            <a:extLst xmlns:a="http://schemas.openxmlformats.org/drawingml/2006/main">
+          <p:cNvPr id="6" name="Rectangle 5">
+            <a:extLst>
               <a:ext uri="{FF2B5EF4-FFF2-40B4-BE49-F238E27FC236}">
                 <a16:creationId xmlns:a16="http://schemas.microsoft.com/office/drawing/2014/main" id="{693B91EA-F1A5-4808-983F-B9B7C8402C0D}"/>
               </a:ext>
             </a:extLst>
           </p:cNvPr>
           <p:cNvSpPr>
-            <a:spLocks xmlns:a="http://schemas.openxmlformats.org/drawingml/2006/main" noGrp="1"/>
-          </p:cNvSpPr>
-          <p:nvPr/>
-        </p:nvSpPr>
-        <p:spPr>
-          <a:xfrm xmlns:a="http://schemas.openxmlformats.org/drawingml/2006/main">
+            <a:spLocks noGrp="1"/>
+          </p:cNvSpPr>
+          <p:nvPr/>
+        </p:nvSpPr>
+        <p:spPr>
+          <a:xfrm>
             <a:off x="5638800" y="2238375"/>
             <a:ext cx="2095500" cy="323850"/>
           </a:xfrm>
-          <a:prstGeom xmlns:a="http://schemas.openxmlformats.org/drawingml/2006/main" prst="rect">
-            <a:avLst/>
-          </a:prstGeom>
-          <a:noFill xmlns:a="http://schemas.openxmlformats.org/drawingml/2006/main"/>
-          <a:ln xmlns:a="http://schemas.openxmlformats.org/drawingml/2006/main" w="0">
-            <a:noFill/>
-            <a:prstDash val="solid"/>
-          </a:ln>
-        </p:spPr>
-        <p:txBody>
-          <a:bodyPr xmlns:a="http://schemas.openxmlformats.org/drawingml/2006/main" wrap="square" lIns="0" tIns="0" rIns="0" bIns="0" anchor="t">
-            <a:normAutofit fontScale="100000"/>
+          <a:prstGeom prst="rect">
+            <a:avLst/>
+          </a:prstGeom>
+          <a:noFill/>
+          <a:ln w="0">
+            <a:noFill/>
+            <a:prstDash val="solid"/>
+          </a:ln>
+        </p:spPr>
+        <p:txBody>
+          <a:bodyPr wrap="square" lIns="0" tIns="0" rIns="0" bIns="0" anchor="t">
+            <a:normAutofit/>
           </a:bodyPr>
-          <a:lstStyle xmlns:a="http://schemas.openxmlformats.org/drawingml/2006/main"/>
-          <a:p xmlns:a="http://schemas.openxmlformats.org/drawingml/2006/main">
+          <a:lstStyle/>
+          <a:p>
             <a:pPr algn="l">
               <a:defRPr sz="1800" b="0">
                 <a:solidFill>
@@ -4195,6 +3931,17 @@
               </a:defRPr>
             </a:pPr>
             <a:r>
+              <a:rPr lang="en-US" altLang="zh-CN" sz="1800" b="0">
+                <a:solidFill>
+                  <a:srgbClr val="1C302B"/>
+                </a:solidFill>
+                <a:latin typeface="Microsoft YaHei"/>
+                <a:ea typeface="Microsoft YaHei"/>
+                <a:cs typeface="Microsoft YaHei"/>
+              </a:rPr>
+              <a:t>0</a:t>
+            </a:r>
+            <a:r>
               <a:rPr sz="1800" b="0">
                 <a:solidFill>
                   <a:srgbClr val="1C302B"/>
@@ -4203,45 +3950,45 @@
                 <a:ea typeface="Microsoft YaHei"/>
                 <a:cs typeface="Microsoft YaHei"/>
               </a:rPr>
-              <a:t>01  High Card</a:t>
-            </a:r>
-          </a:p>
-        </p:txBody>
-      </p:sp>
-      <p:sp>
-        <p:nvSpPr>
-          <p:cNvPr id="7" name="">
-            <a:extLst xmlns:a="http://schemas.openxmlformats.org/drawingml/2006/main">
+              <a:t>  High Card</a:t>
+            </a:r>
+          </a:p>
+        </p:txBody>
+      </p:sp>
+      <p:sp>
+        <p:nvSpPr>
+          <p:cNvPr id="7" name="Rectangle 6">
+            <a:extLst>
               <a:ext uri="{FF2B5EF4-FFF2-40B4-BE49-F238E27FC236}">
                 <a16:creationId xmlns:a16="http://schemas.microsoft.com/office/drawing/2014/main" id="{F80E6B7D-3093-468B-9629-0E7E510EB33A}"/>
               </a:ext>
             </a:extLst>
           </p:cNvPr>
           <p:cNvSpPr>
-            <a:spLocks xmlns:a="http://schemas.openxmlformats.org/drawingml/2006/main" noGrp="1"/>
-          </p:cNvSpPr>
-          <p:nvPr/>
-        </p:nvSpPr>
-        <p:spPr>
-          <a:xfrm xmlns:a="http://schemas.openxmlformats.org/drawingml/2006/main">
+            <a:spLocks noGrp="1"/>
+          </p:cNvSpPr>
+          <p:nvPr/>
+        </p:nvSpPr>
+        <p:spPr>
+          <a:xfrm>
             <a:off x="5638800" y="2638425"/>
             <a:ext cx="2095500" cy="323850"/>
           </a:xfrm>
-          <a:prstGeom xmlns:a="http://schemas.openxmlformats.org/drawingml/2006/main" prst="rect">
-            <a:avLst/>
-          </a:prstGeom>
-          <a:noFill xmlns:a="http://schemas.openxmlformats.org/drawingml/2006/main"/>
-          <a:ln xmlns:a="http://schemas.openxmlformats.org/drawingml/2006/main" w="0">
-            <a:noFill/>
-            <a:prstDash val="solid"/>
-          </a:ln>
-        </p:spPr>
-        <p:txBody>
-          <a:bodyPr xmlns:a="http://schemas.openxmlformats.org/drawingml/2006/main" wrap="square" lIns="0" tIns="0" rIns="0" bIns="0" anchor="t">
-            <a:normAutofit fontScale="100000"/>
+          <a:prstGeom prst="rect">
+            <a:avLst/>
+          </a:prstGeom>
+          <a:noFill/>
+          <a:ln w="0">
+            <a:noFill/>
+            <a:prstDash val="solid"/>
+          </a:ln>
+        </p:spPr>
+        <p:txBody>
+          <a:bodyPr wrap="square" lIns="0" tIns="0" rIns="0" bIns="0" anchor="t">
+            <a:normAutofit/>
           </a:bodyPr>
-          <a:lstStyle xmlns:a="http://schemas.openxmlformats.org/drawingml/2006/main"/>
-          <a:p xmlns:a="http://schemas.openxmlformats.org/drawingml/2006/main">
+          <a:lstStyle/>
+          <a:p>
             <a:pPr algn="l">
               <a:defRPr sz="1800" b="0">
                 <a:solidFill>
@@ -4253,6 +4000,17 @@
               </a:defRPr>
             </a:pPr>
             <a:r>
+              <a:rPr lang="en-US" altLang="zh-CN" sz="1800" b="0">
+                <a:solidFill>
+                  <a:srgbClr val="1C302B"/>
+                </a:solidFill>
+                <a:latin typeface="Microsoft YaHei"/>
+                <a:ea typeface="Microsoft YaHei"/>
+                <a:cs typeface="Microsoft YaHei"/>
+              </a:rPr>
+              <a:t>1</a:t>
+            </a:r>
+            <a:r>
               <a:rPr sz="1800" b="0">
                 <a:solidFill>
                   <a:srgbClr val="1C302B"/>
@@ -4261,45 +4019,45 @@
                 <a:ea typeface="Microsoft YaHei"/>
                 <a:cs typeface="Microsoft YaHei"/>
               </a:rPr>
-              <a:t>02  One Pair</a:t>
-            </a:r>
-          </a:p>
-        </p:txBody>
-      </p:sp>
-      <p:sp>
-        <p:nvSpPr>
-          <p:cNvPr id="8" name="">
-            <a:extLst xmlns:a="http://schemas.openxmlformats.org/drawingml/2006/main">
+              <a:t>  One Pair</a:t>
+            </a:r>
+          </a:p>
+        </p:txBody>
+      </p:sp>
+      <p:sp>
+        <p:nvSpPr>
+          <p:cNvPr id="8" name="Rectangle 7">
+            <a:extLst>
               <a:ext uri="{FF2B5EF4-FFF2-40B4-BE49-F238E27FC236}">
                 <a16:creationId xmlns:a16="http://schemas.microsoft.com/office/drawing/2014/main" id="{B7D2813F-1D93-4523-82AD-0F35303F6E0A}"/>
               </a:ext>
             </a:extLst>
           </p:cNvPr>
           <p:cNvSpPr>
-            <a:spLocks xmlns:a="http://schemas.openxmlformats.org/drawingml/2006/main" noGrp="1"/>
-          </p:cNvSpPr>
-          <p:nvPr/>
-        </p:nvSpPr>
-        <p:spPr>
-          <a:xfrm xmlns:a="http://schemas.openxmlformats.org/drawingml/2006/main">
+            <a:spLocks noGrp="1"/>
+          </p:cNvSpPr>
+          <p:nvPr/>
+        </p:nvSpPr>
+        <p:spPr>
+          <a:xfrm>
             <a:off x="5638800" y="3038475"/>
             <a:ext cx="2095500" cy="323850"/>
           </a:xfrm>
-          <a:prstGeom xmlns:a="http://schemas.openxmlformats.org/drawingml/2006/main" prst="rect">
-            <a:avLst/>
-          </a:prstGeom>
-          <a:noFill xmlns:a="http://schemas.openxmlformats.org/drawingml/2006/main"/>
-          <a:ln xmlns:a="http://schemas.openxmlformats.org/drawingml/2006/main" w="0">
-            <a:noFill/>
-            <a:prstDash val="solid"/>
-          </a:ln>
-        </p:spPr>
-        <p:txBody>
-          <a:bodyPr xmlns:a="http://schemas.openxmlformats.org/drawingml/2006/main" wrap="square" lIns="0" tIns="0" rIns="0" bIns="0" anchor="t">
-            <a:normAutofit fontScale="100000"/>
+          <a:prstGeom prst="rect">
+            <a:avLst/>
+          </a:prstGeom>
+          <a:noFill/>
+          <a:ln w="0">
+            <a:noFill/>
+            <a:prstDash val="solid"/>
+          </a:ln>
+        </p:spPr>
+        <p:txBody>
+          <a:bodyPr wrap="square" lIns="0" tIns="0" rIns="0" bIns="0" anchor="t">
+            <a:normAutofit/>
           </a:bodyPr>
-          <a:lstStyle xmlns:a="http://schemas.openxmlformats.org/drawingml/2006/main"/>
-          <a:p xmlns:a="http://schemas.openxmlformats.org/drawingml/2006/main">
+          <a:lstStyle/>
+          <a:p>
             <a:pPr algn="l">
               <a:defRPr sz="1800" b="0">
                 <a:solidFill>
@@ -4311,6 +4069,17 @@
               </a:defRPr>
             </a:pPr>
             <a:r>
+              <a:rPr lang="en-US" altLang="zh-CN" sz="1800" b="0">
+                <a:solidFill>
+                  <a:srgbClr val="1C302B"/>
+                </a:solidFill>
+                <a:latin typeface="Microsoft YaHei"/>
+                <a:ea typeface="Microsoft YaHei"/>
+                <a:cs typeface="Microsoft YaHei"/>
+              </a:rPr>
+              <a:t>2</a:t>
+            </a:r>
+            <a:r>
               <a:rPr sz="1800" b="0">
                 <a:solidFill>
                   <a:srgbClr val="1C302B"/>
@@ -4319,45 +4088,45 @@
                 <a:ea typeface="Microsoft YaHei"/>
                 <a:cs typeface="Microsoft YaHei"/>
               </a:rPr>
-              <a:t>03  Two Pair</a:t>
-            </a:r>
-          </a:p>
-        </p:txBody>
-      </p:sp>
-      <p:sp>
-        <p:nvSpPr>
-          <p:cNvPr id="9" name="">
-            <a:extLst xmlns:a="http://schemas.openxmlformats.org/drawingml/2006/main">
+              <a:t>  Two Pair</a:t>
+            </a:r>
+          </a:p>
+        </p:txBody>
+      </p:sp>
+      <p:sp>
+        <p:nvSpPr>
+          <p:cNvPr id="9" name="Rectangle 8">
+            <a:extLst>
               <a:ext uri="{FF2B5EF4-FFF2-40B4-BE49-F238E27FC236}">
                 <a16:creationId xmlns:a16="http://schemas.microsoft.com/office/drawing/2014/main" id="{8C011A82-3500-4E3B-B82B-EA532F153BE4}"/>
               </a:ext>
             </a:extLst>
           </p:cNvPr>
           <p:cNvSpPr>
-            <a:spLocks xmlns:a="http://schemas.openxmlformats.org/drawingml/2006/main" noGrp="1"/>
-          </p:cNvSpPr>
-          <p:nvPr/>
-        </p:nvSpPr>
-        <p:spPr>
-          <a:xfrm xmlns:a="http://schemas.openxmlformats.org/drawingml/2006/main">
+            <a:spLocks noGrp="1"/>
+          </p:cNvSpPr>
+          <p:nvPr/>
+        </p:nvSpPr>
+        <p:spPr>
+          <a:xfrm>
             <a:off x="5638800" y="3438525"/>
             <a:ext cx="2095500" cy="323850"/>
           </a:xfrm>
-          <a:prstGeom xmlns:a="http://schemas.openxmlformats.org/drawingml/2006/main" prst="rect">
-            <a:avLst/>
-          </a:prstGeom>
-          <a:noFill xmlns:a="http://schemas.openxmlformats.org/drawingml/2006/main"/>
-          <a:ln xmlns:a="http://schemas.openxmlformats.org/drawingml/2006/main" w="0">
-            <a:noFill/>
-            <a:prstDash val="solid"/>
-          </a:ln>
-        </p:spPr>
-        <p:txBody>
-          <a:bodyPr xmlns:a="http://schemas.openxmlformats.org/drawingml/2006/main" wrap="square" lIns="0" tIns="0" rIns="0" bIns="0" anchor="t">
-            <a:normAutofit fontScale="100000"/>
+          <a:prstGeom prst="rect">
+            <a:avLst/>
+          </a:prstGeom>
+          <a:noFill/>
+          <a:ln w="0">
+            <a:noFill/>
+            <a:prstDash val="solid"/>
+          </a:ln>
+        </p:spPr>
+        <p:txBody>
+          <a:bodyPr wrap="square" lIns="0" tIns="0" rIns="0" bIns="0" anchor="t">
+            <a:normAutofit/>
           </a:bodyPr>
-          <a:lstStyle xmlns:a="http://schemas.openxmlformats.org/drawingml/2006/main"/>
-          <a:p xmlns:a="http://schemas.openxmlformats.org/drawingml/2006/main">
+          <a:lstStyle/>
+          <a:p>
             <a:pPr algn="l">
               <a:defRPr sz="1800" b="0">
                 <a:solidFill>
@@ -4369,6 +4138,17 @@
               </a:defRPr>
             </a:pPr>
             <a:r>
+              <a:rPr lang="en-US" altLang="zh-CN" sz="1800" b="0">
+                <a:solidFill>
+                  <a:srgbClr val="1C302B"/>
+                </a:solidFill>
+                <a:latin typeface="Microsoft YaHei"/>
+                <a:ea typeface="Microsoft YaHei"/>
+                <a:cs typeface="Microsoft YaHei"/>
+              </a:rPr>
+              <a:t>3</a:t>
+            </a:r>
+            <a:r>
               <a:rPr sz="1800" b="0">
                 <a:solidFill>
                   <a:srgbClr val="1C302B"/>
@@ -4377,45 +4157,45 @@
                 <a:ea typeface="Microsoft YaHei"/>
                 <a:cs typeface="Microsoft YaHei"/>
               </a:rPr>
-              <a:t>04  Three of a Kind</a:t>
-            </a:r>
-          </a:p>
-        </p:txBody>
-      </p:sp>
-      <p:sp>
-        <p:nvSpPr>
-          <p:cNvPr id="10" name="">
-            <a:extLst xmlns:a="http://schemas.openxmlformats.org/drawingml/2006/main">
+              <a:t>  Three of a Kind</a:t>
+            </a:r>
+          </a:p>
+        </p:txBody>
+      </p:sp>
+      <p:sp>
+        <p:nvSpPr>
+          <p:cNvPr id="10" name="Rectangle 9">
+            <a:extLst>
               <a:ext uri="{FF2B5EF4-FFF2-40B4-BE49-F238E27FC236}">
                 <a16:creationId xmlns:a16="http://schemas.microsoft.com/office/drawing/2014/main" id="{E4044F14-CF68-444E-9DB0-522952624142}"/>
               </a:ext>
             </a:extLst>
           </p:cNvPr>
           <p:cNvSpPr>
-            <a:spLocks xmlns:a="http://schemas.openxmlformats.org/drawingml/2006/main" noGrp="1"/>
-          </p:cNvSpPr>
-          <p:nvPr/>
-        </p:nvSpPr>
-        <p:spPr>
-          <a:xfrm xmlns:a="http://schemas.openxmlformats.org/drawingml/2006/main">
+            <a:spLocks noGrp="1"/>
+          </p:cNvSpPr>
+          <p:nvPr/>
+        </p:nvSpPr>
+        <p:spPr>
+          <a:xfrm>
             <a:off x="5638800" y="3838575"/>
             <a:ext cx="2095500" cy="323850"/>
           </a:xfrm>
-          <a:prstGeom xmlns:a="http://schemas.openxmlformats.org/drawingml/2006/main" prst="rect">
-            <a:avLst/>
-          </a:prstGeom>
-          <a:noFill xmlns:a="http://schemas.openxmlformats.org/drawingml/2006/main"/>
-          <a:ln xmlns:a="http://schemas.openxmlformats.org/drawingml/2006/main" w="0">
-            <a:noFill/>
-            <a:prstDash val="solid"/>
-          </a:ln>
-        </p:spPr>
-        <p:txBody>
-          <a:bodyPr xmlns:a="http://schemas.openxmlformats.org/drawingml/2006/main" wrap="square" lIns="0" tIns="0" rIns="0" bIns="0" anchor="t">
-            <a:normAutofit fontScale="100000"/>
+          <a:prstGeom prst="rect">
+            <a:avLst/>
+          </a:prstGeom>
+          <a:noFill/>
+          <a:ln w="0">
+            <a:noFill/>
+            <a:prstDash val="solid"/>
+          </a:ln>
+        </p:spPr>
+        <p:txBody>
+          <a:bodyPr wrap="square" lIns="0" tIns="0" rIns="0" bIns="0" anchor="t">
+            <a:normAutofit/>
           </a:bodyPr>
-          <a:lstStyle xmlns:a="http://schemas.openxmlformats.org/drawingml/2006/main"/>
-          <a:p xmlns:a="http://schemas.openxmlformats.org/drawingml/2006/main">
+          <a:lstStyle/>
+          <a:p>
             <a:pPr algn="l">
               <a:defRPr sz="1800" b="0">
                 <a:solidFill>
@@ -4427,6 +4207,17 @@
               </a:defRPr>
             </a:pPr>
             <a:r>
+              <a:rPr lang="en-US" altLang="zh-CN" sz="1800" b="0">
+                <a:solidFill>
+                  <a:srgbClr val="1C302B"/>
+                </a:solidFill>
+                <a:latin typeface="Microsoft YaHei"/>
+                <a:ea typeface="Microsoft YaHei"/>
+                <a:cs typeface="Microsoft YaHei"/>
+              </a:rPr>
+              <a:t>4</a:t>
+            </a:r>
+            <a:r>
               <a:rPr sz="1800" b="0">
                 <a:solidFill>
                   <a:srgbClr val="1C302B"/>
@@ -4435,45 +4226,45 @@
                 <a:ea typeface="Microsoft YaHei"/>
                 <a:cs typeface="Microsoft YaHei"/>
               </a:rPr>
-              <a:t>05  Straight</a:t>
-            </a:r>
-          </a:p>
-        </p:txBody>
-      </p:sp>
-      <p:sp>
-        <p:nvSpPr>
-          <p:cNvPr id="11" name="">
-            <a:extLst xmlns:a="http://schemas.openxmlformats.org/drawingml/2006/main">
+              <a:t>  Straight</a:t>
+            </a:r>
+          </a:p>
+        </p:txBody>
+      </p:sp>
+      <p:sp>
+        <p:nvSpPr>
+          <p:cNvPr id="11" name="Rectangle 10">
+            <a:extLst>
               <a:ext uri="{FF2B5EF4-FFF2-40B4-BE49-F238E27FC236}">
                 <a16:creationId xmlns:a16="http://schemas.microsoft.com/office/drawing/2014/main" id="{981D5B2A-C51B-4FE7-AA26-71F2EF006446}"/>
               </a:ext>
             </a:extLst>
           </p:cNvPr>
           <p:cNvSpPr>
-            <a:spLocks xmlns:a="http://schemas.openxmlformats.org/drawingml/2006/main" noGrp="1"/>
-          </p:cNvSpPr>
-          <p:nvPr/>
-        </p:nvSpPr>
-        <p:spPr>
-          <a:xfrm xmlns:a="http://schemas.openxmlformats.org/drawingml/2006/main">
+            <a:spLocks noGrp="1"/>
+          </p:cNvSpPr>
+          <p:nvPr/>
+        </p:nvSpPr>
+        <p:spPr>
+          <a:xfrm>
             <a:off x="8172450" y="2238375"/>
             <a:ext cx="2238375" cy="323850"/>
           </a:xfrm>
-          <a:prstGeom xmlns:a="http://schemas.openxmlformats.org/drawingml/2006/main" prst="rect">
-            <a:avLst/>
-          </a:prstGeom>
-          <a:noFill xmlns:a="http://schemas.openxmlformats.org/drawingml/2006/main"/>
-          <a:ln xmlns:a="http://schemas.openxmlformats.org/drawingml/2006/main" w="0">
-            <a:noFill/>
-            <a:prstDash val="solid"/>
-          </a:ln>
-        </p:spPr>
-        <p:txBody>
-          <a:bodyPr xmlns:a="http://schemas.openxmlformats.org/drawingml/2006/main" wrap="square" lIns="0" tIns="0" rIns="0" bIns="0" anchor="t">
-            <a:normAutofit fontScale="100000"/>
+          <a:prstGeom prst="rect">
+            <a:avLst/>
+          </a:prstGeom>
+          <a:noFill/>
+          <a:ln w="0">
+            <a:noFill/>
+            <a:prstDash val="solid"/>
+          </a:ln>
+        </p:spPr>
+        <p:txBody>
+          <a:bodyPr wrap="square" lIns="0" tIns="0" rIns="0" bIns="0" anchor="t">
+            <a:normAutofit/>
           </a:bodyPr>
-          <a:lstStyle xmlns:a="http://schemas.openxmlformats.org/drawingml/2006/main"/>
-          <a:p xmlns:a="http://schemas.openxmlformats.org/drawingml/2006/main">
+          <a:lstStyle/>
+          <a:p>
             <a:pPr algn="l">
               <a:defRPr sz="1800" b="0">
                 <a:solidFill>
@@ -4485,6 +4276,17 @@
               </a:defRPr>
             </a:pPr>
             <a:r>
+              <a:rPr lang="en-US" altLang="zh-CN" sz="1800" b="0">
+                <a:solidFill>
+                  <a:srgbClr val="1C302B"/>
+                </a:solidFill>
+                <a:latin typeface="Microsoft YaHei"/>
+                <a:ea typeface="Microsoft YaHei"/>
+                <a:cs typeface="Microsoft YaHei"/>
+              </a:rPr>
+              <a:t>5</a:t>
+            </a:r>
+            <a:r>
               <a:rPr sz="1800" b="0">
                 <a:solidFill>
                   <a:srgbClr val="1C302B"/>
@@ -4493,45 +4295,45 @@
                 <a:ea typeface="Microsoft YaHei"/>
                 <a:cs typeface="Microsoft YaHei"/>
               </a:rPr>
-              <a:t>06  Flush</a:t>
-            </a:r>
-          </a:p>
-        </p:txBody>
-      </p:sp>
-      <p:sp>
-        <p:nvSpPr>
-          <p:cNvPr id="12" name="">
-            <a:extLst xmlns:a="http://schemas.openxmlformats.org/drawingml/2006/main">
+              <a:t>  Flush</a:t>
+            </a:r>
+          </a:p>
+        </p:txBody>
+      </p:sp>
+      <p:sp>
+        <p:nvSpPr>
+          <p:cNvPr id="12" name="Rectangle 11">
+            <a:extLst>
               <a:ext uri="{FF2B5EF4-FFF2-40B4-BE49-F238E27FC236}">
                 <a16:creationId xmlns:a16="http://schemas.microsoft.com/office/drawing/2014/main" id="{BBFC01AC-26B5-4CBA-B5DF-2EF3AFB0E576}"/>
               </a:ext>
             </a:extLst>
           </p:cNvPr>
           <p:cNvSpPr>
-            <a:spLocks xmlns:a="http://schemas.openxmlformats.org/drawingml/2006/main" noGrp="1"/>
-          </p:cNvSpPr>
-          <p:nvPr/>
-        </p:nvSpPr>
-        <p:spPr>
-          <a:xfrm xmlns:a="http://schemas.openxmlformats.org/drawingml/2006/main">
+            <a:spLocks noGrp="1"/>
+          </p:cNvSpPr>
+          <p:nvPr/>
+        </p:nvSpPr>
+        <p:spPr>
+          <a:xfrm>
             <a:off x="8172450" y="2638425"/>
             <a:ext cx="2238375" cy="323850"/>
           </a:xfrm>
-          <a:prstGeom xmlns:a="http://schemas.openxmlformats.org/drawingml/2006/main" prst="rect">
-            <a:avLst/>
-          </a:prstGeom>
-          <a:noFill xmlns:a="http://schemas.openxmlformats.org/drawingml/2006/main"/>
-          <a:ln xmlns:a="http://schemas.openxmlformats.org/drawingml/2006/main" w="0">
-            <a:noFill/>
-            <a:prstDash val="solid"/>
-          </a:ln>
-        </p:spPr>
-        <p:txBody>
-          <a:bodyPr xmlns:a="http://schemas.openxmlformats.org/drawingml/2006/main" wrap="square" lIns="0" tIns="0" rIns="0" bIns="0" anchor="t">
-            <a:normAutofit fontScale="100000"/>
+          <a:prstGeom prst="rect">
+            <a:avLst/>
+          </a:prstGeom>
+          <a:noFill/>
+          <a:ln w="0">
+            <a:noFill/>
+            <a:prstDash val="solid"/>
+          </a:ln>
+        </p:spPr>
+        <p:txBody>
+          <a:bodyPr wrap="square" lIns="0" tIns="0" rIns="0" bIns="0" anchor="t">
+            <a:normAutofit/>
           </a:bodyPr>
-          <a:lstStyle xmlns:a="http://schemas.openxmlformats.org/drawingml/2006/main"/>
-          <a:p xmlns:a="http://schemas.openxmlformats.org/drawingml/2006/main">
+          <a:lstStyle/>
+          <a:p>
             <a:pPr algn="l">
               <a:defRPr sz="1800" b="0">
                 <a:solidFill>
@@ -4543,6 +4345,17 @@
               </a:defRPr>
             </a:pPr>
             <a:r>
+              <a:rPr lang="en-US" altLang="zh-CN" sz="1800" b="0">
+                <a:solidFill>
+                  <a:srgbClr val="1C302B"/>
+                </a:solidFill>
+                <a:latin typeface="Microsoft YaHei"/>
+                <a:ea typeface="Microsoft YaHei"/>
+                <a:cs typeface="Microsoft YaHei"/>
+              </a:rPr>
+              <a:t>6</a:t>
+            </a:r>
+            <a:r>
               <a:rPr sz="1800" b="0">
                 <a:solidFill>
                   <a:srgbClr val="1C302B"/>
@@ -4551,45 +4364,45 @@
                 <a:ea typeface="Microsoft YaHei"/>
                 <a:cs typeface="Microsoft YaHei"/>
               </a:rPr>
-              <a:t>07  Full House</a:t>
-            </a:r>
-          </a:p>
-        </p:txBody>
-      </p:sp>
-      <p:sp>
-        <p:nvSpPr>
-          <p:cNvPr id="13" name="">
-            <a:extLst xmlns:a="http://schemas.openxmlformats.org/drawingml/2006/main">
+              <a:t>  Full House</a:t>
+            </a:r>
+          </a:p>
+        </p:txBody>
+      </p:sp>
+      <p:sp>
+        <p:nvSpPr>
+          <p:cNvPr id="13" name="Rectangle 12">
+            <a:extLst>
               <a:ext uri="{FF2B5EF4-FFF2-40B4-BE49-F238E27FC236}">
                 <a16:creationId xmlns:a16="http://schemas.microsoft.com/office/drawing/2014/main" id="{76C57AD0-F4DF-4060-BF57-D1790F9E8F20}"/>
               </a:ext>
             </a:extLst>
           </p:cNvPr>
           <p:cNvSpPr>
-            <a:spLocks xmlns:a="http://schemas.openxmlformats.org/drawingml/2006/main" noGrp="1"/>
-          </p:cNvSpPr>
-          <p:nvPr/>
-        </p:nvSpPr>
-        <p:spPr>
-          <a:xfrm xmlns:a="http://schemas.openxmlformats.org/drawingml/2006/main">
+            <a:spLocks noGrp="1"/>
+          </p:cNvSpPr>
+          <p:nvPr/>
+        </p:nvSpPr>
+        <p:spPr>
+          <a:xfrm>
             <a:off x="8172450" y="3038475"/>
             <a:ext cx="2238375" cy="323850"/>
           </a:xfrm>
-          <a:prstGeom xmlns:a="http://schemas.openxmlformats.org/drawingml/2006/main" prst="rect">
-            <a:avLst/>
-          </a:prstGeom>
-          <a:noFill xmlns:a="http://schemas.openxmlformats.org/drawingml/2006/main"/>
-          <a:ln xmlns:a="http://schemas.openxmlformats.org/drawingml/2006/main" w="0">
-            <a:noFill/>
-            <a:prstDash val="solid"/>
-          </a:ln>
-        </p:spPr>
-        <p:txBody>
-          <a:bodyPr xmlns:a="http://schemas.openxmlformats.org/drawingml/2006/main" wrap="square" lIns="0" tIns="0" rIns="0" bIns="0" anchor="t">
-            <a:normAutofit fontScale="100000"/>
+          <a:prstGeom prst="rect">
+            <a:avLst/>
+          </a:prstGeom>
+          <a:noFill/>
+          <a:ln w="0">
+            <a:noFill/>
+            <a:prstDash val="solid"/>
+          </a:ln>
+        </p:spPr>
+        <p:txBody>
+          <a:bodyPr wrap="square" lIns="0" tIns="0" rIns="0" bIns="0" anchor="t">
+            <a:normAutofit/>
           </a:bodyPr>
-          <a:lstStyle xmlns:a="http://schemas.openxmlformats.org/drawingml/2006/main"/>
-          <a:p xmlns:a="http://schemas.openxmlformats.org/drawingml/2006/main">
+          <a:lstStyle/>
+          <a:p>
             <a:pPr algn="l">
               <a:defRPr sz="1800" b="0">
                 <a:solidFill>
@@ -4601,6 +4414,17 @@
               </a:defRPr>
             </a:pPr>
             <a:r>
+              <a:rPr lang="en-US" altLang="zh-CN" sz="1800" b="0">
+                <a:solidFill>
+                  <a:srgbClr val="1C302B"/>
+                </a:solidFill>
+                <a:latin typeface="Microsoft YaHei"/>
+                <a:ea typeface="Microsoft YaHei"/>
+                <a:cs typeface="Microsoft YaHei"/>
+              </a:rPr>
+              <a:t>7</a:t>
+            </a:r>
+            <a:r>
               <a:rPr sz="1800" b="0">
                 <a:solidFill>
                   <a:srgbClr val="1C302B"/>
@@ -4609,45 +4433,45 @@
                 <a:ea typeface="Microsoft YaHei"/>
                 <a:cs typeface="Microsoft YaHei"/>
               </a:rPr>
-              <a:t>08  Four of a Kind</a:t>
-            </a:r>
-          </a:p>
-        </p:txBody>
-      </p:sp>
-      <p:sp>
-        <p:nvSpPr>
-          <p:cNvPr id="14" name="">
-            <a:extLst xmlns:a="http://schemas.openxmlformats.org/drawingml/2006/main">
+              <a:t>  Four of a Kind</a:t>
+            </a:r>
+          </a:p>
+        </p:txBody>
+      </p:sp>
+      <p:sp>
+        <p:nvSpPr>
+          <p:cNvPr id="14" name="Rectangle 13">
+            <a:extLst>
               <a:ext uri="{FF2B5EF4-FFF2-40B4-BE49-F238E27FC236}">
                 <a16:creationId xmlns:a16="http://schemas.microsoft.com/office/drawing/2014/main" id="{83DF6775-CB36-4A1C-901C-CFB7CE20BFF4}"/>
               </a:ext>
             </a:extLst>
           </p:cNvPr>
           <p:cNvSpPr>
-            <a:spLocks xmlns:a="http://schemas.openxmlformats.org/drawingml/2006/main" noGrp="1"/>
-          </p:cNvSpPr>
-          <p:nvPr/>
-        </p:nvSpPr>
-        <p:spPr>
-          <a:xfrm xmlns:a="http://schemas.openxmlformats.org/drawingml/2006/main">
+            <a:spLocks noGrp="1"/>
+          </p:cNvSpPr>
+          <p:nvPr/>
+        </p:nvSpPr>
+        <p:spPr>
+          <a:xfrm>
             <a:off x="8172450" y="3438525"/>
             <a:ext cx="2238375" cy="323850"/>
           </a:xfrm>
-          <a:prstGeom xmlns:a="http://schemas.openxmlformats.org/drawingml/2006/main" prst="rect">
-            <a:avLst/>
-          </a:prstGeom>
-          <a:noFill xmlns:a="http://schemas.openxmlformats.org/drawingml/2006/main"/>
-          <a:ln xmlns:a="http://schemas.openxmlformats.org/drawingml/2006/main" w="0">
-            <a:noFill/>
-            <a:prstDash val="solid"/>
-          </a:ln>
-        </p:spPr>
-        <p:txBody>
-          <a:bodyPr xmlns:a="http://schemas.openxmlformats.org/drawingml/2006/main" wrap="square" lIns="0" tIns="0" rIns="0" bIns="0" anchor="t">
-            <a:normAutofit fontScale="100000"/>
+          <a:prstGeom prst="rect">
+            <a:avLst/>
+          </a:prstGeom>
+          <a:noFill/>
+          <a:ln w="0">
+            <a:noFill/>
+            <a:prstDash val="solid"/>
+          </a:ln>
+        </p:spPr>
+        <p:txBody>
+          <a:bodyPr wrap="square" lIns="0" tIns="0" rIns="0" bIns="0" anchor="t">
+            <a:normAutofit/>
           </a:bodyPr>
-          <a:lstStyle xmlns:a="http://schemas.openxmlformats.org/drawingml/2006/main"/>
-          <a:p xmlns:a="http://schemas.openxmlformats.org/drawingml/2006/main">
+          <a:lstStyle/>
+          <a:p>
             <a:pPr algn="l">
               <a:defRPr sz="1800" b="0">
                 <a:solidFill>
@@ -4659,6 +4483,17 @@
               </a:defRPr>
             </a:pPr>
             <a:r>
+              <a:rPr lang="en-US" altLang="zh-CN" sz="1800" b="0">
+                <a:solidFill>
+                  <a:srgbClr val="1C302B"/>
+                </a:solidFill>
+                <a:latin typeface="Microsoft YaHei"/>
+                <a:ea typeface="Microsoft YaHei"/>
+                <a:cs typeface="Microsoft YaHei"/>
+              </a:rPr>
+              <a:t>8</a:t>
+            </a:r>
+            <a:r>
               <a:rPr sz="1800" b="0">
                 <a:solidFill>
                   <a:srgbClr val="1C302B"/>
@@ -4667,76 +4502,76 @@
                 <a:ea typeface="Microsoft YaHei"/>
                 <a:cs typeface="Microsoft YaHei"/>
               </a:rPr>
-              <a:t>09  Straight Flush</a:t>
-            </a:r>
-          </a:p>
-        </p:txBody>
-      </p:sp>
-      <p:sp>
-        <p:nvSpPr>
-          <p:cNvPr id="15" name="">
-            <a:extLst xmlns:a="http://schemas.openxmlformats.org/drawingml/2006/main">
+              <a:t>  Straight Flush</a:t>
+            </a:r>
+          </a:p>
+        </p:txBody>
+      </p:sp>
+      <p:sp>
+        <p:nvSpPr>
+          <p:cNvPr id="15" name="Rectangle 14">
+            <a:extLst>
               <a:ext uri="{FF2B5EF4-FFF2-40B4-BE49-F238E27FC236}">
                 <a16:creationId xmlns:a16="http://schemas.microsoft.com/office/drawing/2014/main" id="{BE628D72-8538-4210-8341-F7FB5305D9C7}"/>
               </a:ext>
             </a:extLst>
           </p:cNvPr>
           <p:cNvSpPr>
-            <a:spLocks xmlns:a="http://schemas.openxmlformats.org/drawingml/2006/main" noGrp="1"/>
-          </p:cNvSpPr>
-          <p:nvPr/>
-        </p:nvSpPr>
-        <p:spPr>
-          <a:xfrm xmlns:a="http://schemas.openxmlformats.org/drawingml/2006/main">
+            <a:spLocks noGrp="1"/>
+          </p:cNvSpPr>
+          <p:nvPr/>
+        </p:nvSpPr>
+        <p:spPr>
+          <a:xfrm>
             <a:off x="876300" y="4171950"/>
             <a:ext cx="10439400" cy="14288"/>
           </a:xfrm>
-          <a:prstGeom xmlns:a="http://schemas.openxmlformats.org/drawingml/2006/main" prst="rect">
-            <a:avLst/>
-          </a:prstGeom>
-          <a:solidFill xmlns:a="http://schemas.openxmlformats.org/drawingml/2006/main">
+          <a:prstGeom prst="rect">
+            <a:avLst/>
+          </a:prstGeom>
+          <a:solidFill>
             <a:srgbClr val="C9D2CB"/>
           </a:solidFill>
-          <a:ln xmlns:a="http://schemas.openxmlformats.org/drawingml/2006/main" w="0">
-            <a:noFill/>
-            <a:prstDash val="solid"/>
-          </a:ln>
-        </p:spPr>
-      </p:sp>
-      <p:sp>
-        <p:nvSpPr>
-          <p:cNvPr id="16" name="">
-            <a:extLst xmlns:a="http://schemas.openxmlformats.org/drawingml/2006/main">
+          <a:ln w="0">
+            <a:noFill/>
+            <a:prstDash val="solid"/>
+          </a:ln>
+        </p:spPr>
+      </p:sp>
+      <p:sp>
+        <p:nvSpPr>
+          <p:cNvPr id="16" name="Rectangle 15">
+            <a:extLst>
               <a:ext uri="{FF2B5EF4-FFF2-40B4-BE49-F238E27FC236}">
                 <a16:creationId xmlns:a16="http://schemas.microsoft.com/office/drawing/2014/main" id="{F0645CAF-EF42-4CA7-B9C5-228E20903E67}"/>
               </a:ext>
             </a:extLst>
           </p:cNvPr>
           <p:cNvSpPr>
-            <a:spLocks xmlns:a="http://schemas.openxmlformats.org/drawingml/2006/main" noGrp="1"/>
-          </p:cNvSpPr>
-          <p:nvPr/>
-        </p:nvSpPr>
-        <p:spPr>
-          <a:xfrm xmlns:a="http://schemas.openxmlformats.org/drawingml/2006/main">
+            <a:spLocks noGrp="1"/>
+          </p:cNvSpPr>
+          <p:nvPr/>
+        </p:nvSpPr>
+        <p:spPr>
+          <a:xfrm>
             <a:off x="895350" y="4438650"/>
             <a:ext cx="1619250" cy="323850"/>
           </a:xfrm>
-          <a:prstGeom xmlns:a="http://schemas.openxmlformats.org/drawingml/2006/main" prst="rect">
-            <a:avLst/>
-          </a:prstGeom>
-          <a:noFill xmlns:a="http://schemas.openxmlformats.org/drawingml/2006/main"/>
-          <a:ln xmlns:a="http://schemas.openxmlformats.org/drawingml/2006/main" w="0">
-            <a:noFill/>
-            <a:prstDash val="solid"/>
-          </a:ln>
-        </p:spPr>
-        <p:txBody>
-          <a:bodyPr xmlns:a="http://schemas.openxmlformats.org/drawingml/2006/main" wrap="square" lIns="0" tIns="0" rIns="0" bIns="0" anchor="t">
+          <a:prstGeom prst="rect">
+            <a:avLst/>
+          </a:prstGeom>
+          <a:noFill/>
+          <a:ln w="0">
+            <a:noFill/>
+            <a:prstDash val="solid"/>
+          </a:ln>
+        </p:spPr>
+        <p:txBody>
+          <a:bodyPr wrap="square" lIns="0" tIns="0" rIns="0" bIns="0" anchor="t">
             <a:normAutofit fontScale="61594"/>
           </a:bodyPr>
-          <a:lstStyle xmlns:a="http://schemas.openxmlformats.org/drawingml/2006/main"/>
-          <a:p xmlns:a="http://schemas.openxmlformats.org/drawingml/2006/main">
+          <a:lstStyle/>
+          <a:p>
             <a:pPr algn="l">
               <a:defRPr sz="1725" b="1">
                 <a:solidFill>
@@ -4763,38 +4598,38 @@
       </p:sp>
       <p:sp>
         <p:nvSpPr>
-          <p:cNvPr id="17" name="">
-            <a:extLst xmlns:a="http://schemas.openxmlformats.org/drawingml/2006/main">
+          <p:cNvPr id="17" name="Rectangle 16">
+            <a:extLst>
               <a:ext uri="{FF2B5EF4-FFF2-40B4-BE49-F238E27FC236}">
                 <a16:creationId xmlns:a16="http://schemas.microsoft.com/office/drawing/2014/main" id="{7C2CCE2C-0FDB-459A-A36C-344C78A8650D}"/>
               </a:ext>
             </a:extLst>
           </p:cNvPr>
           <p:cNvSpPr>
-            <a:spLocks xmlns:a="http://schemas.openxmlformats.org/drawingml/2006/main" noGrp="1"/>
-          </p:cNvSpPr>
-          <p:nvPr/>
-        </p:nvSpPr>
-        <p:spPr>
-          <a:xfrm xmlns:a="http://schemas.openxmlformats.org/drawingml/2006/main">
+            <a:spLocks noGrp="1"/>
+          </p:cNvSpPr>
+          <p:nvPr/>
+        </p:nvSpPr>
+        <p:spPr>
+          <a:xfrm>
             <a:off x="2647950" y="4381500"/>
             <a:ext cx="3143250" cy="419100"/>
           </a:xfrm>
-          <a:prstGeom xmlns:a="http://schemas.openxmlformats.org/drawingml/2006/main" prst="rect">
-            <a:avLst/>
-          </a:prstGeom>
-          <a:noFill xmlns:a="http://schemas.openxmlformats.org/drawingml/2006/main"/>
-          <a:ln xmlns:a="http://schemas.openxmlformats.org/drawingml/2006/main" w="0">
-            <a:noFill/>
-            <a:prstDash val="solid"/>
-          </a:ln>
-        </p:spPr>
-        <p:txBody>
-          <a:bodyPr xmlns:a="http://schemas.openxmlformats.org/drawingml/2006/main" wrap="square" lIns="0" tIns="0" rIns="0" bIns="0" anchor="t">
-            <a:normAutofit fontScale="100000"/>
+          <a:prstGeom prst="rect">
+            <a:avLst/>
+          </a:prstGeom>
+          <a:noFill/>
+          <a:ln w="0">
+            <a:noFill/>
+            <a:prstDash val="solid"/>
+          </a:ln>
+        </p:spPr>
+        <p:txBody>
+          <a:bodyPr wrap="square" lIns="0" tIns="0" rIns="0" bIns="0" anchor="t">
+            <a:normAutofit/>
           </a:bodyPr>
-          <a:lstStyle xmlns:a="http://schemas.openxmlformats.org/drawingml/2006/main"/>
-          <a:p xmlns:a="http://schemas.openxmlformats.org/drawingml/2006/main">
+          <a:lstStyle/>
+          <a:p>
             <a:pPr algn="l">
               <a:defRPr sz="2175" b="1">
                 <a:solidFill>
@@ -4821,38 +4656,38 @@
       </p:sp>
       <p:sp>
         <p:nvSpPr>
-          <p:cNvPr id="18" name="">
-            <a:extLst xmlns:a="http://schemas.openxmlformats.org/drawingml/2006/main">
+          <p:cNvPr id="18" name="Rectangle 17">
+            <a:extLst>
               <a:ext uri="{FF2B5EF4-FFF2-40B4-BE49-F238E27FC236}">
                 <a16:creationId xmlns:a16="http://schemas.microsoft.com/office/drawing/2014/main" id="{09E99202-D196-4406-8410-5F6E7C212069}"/>
               </a:ext>
             </a:extLst>
           </p:cNvPr>
           <p:cNvSpPr>
-            <a:spLocks xmlns:a="http://schemas.openxmlformats.org/drawingml/2006/main" noGrp="1"/>
-          </p:cNvSpPr>
-          <p:nvPr/>
-        </p:nvSpPr>
-        <p:spPr>
-          <a:xfrm xmlns:a="http://schemas.openxmlformats.org/drawingml/2006/main">
+            <a:spLocks noGrp="1"/>
+          </p:cNvSpPr>
+          <p:nvPr/>
+        </p:nvSpPr>
+        <p:spPr>
+          <a:xfrm>
             <a:off x="5905500" y="4438650"/>
             <a:ext cx="5334000" cy="533400"/>
           </a:xfrm>
-          <a:prstGeom xmlns:a="http://schemas.openxmlformats.org/drawingml/2006/main" prst="rect">
-            <a:avLst/>
-          </a:prstGeom>
-          <a:noFill xmlns:a="http://schemas.openxmlformats.org/drawingml/2006/main"/>
-          <a:ln xmlns:a="http://schemas.openxmlformats.org/drawingml/2006/main" w="0">
-            <a:noFill/>
-            <a:prstDash val="solid"/>
-          </a:ln>
-        </p:spPr>
-        <p:txBody>
-          <a:bodyPr xmlns:a="http://schemas.openxmlformats.org/drawingml/2006/main" wrap="square" lIns="0" tIns="0" rIns="0" bIns="0" anchor="t">
-            <a:normAutofit fontScale="100000"/>
+          <a:prstGeom prst="rect">
+            <a:avLst/>
+          </a:prstGeom>
+          <a:noFill/>
+          <a:ln w="0">
+            <a:noFill/>
+            <a:prstDash val="solid"/>
+          </a:ln>
+        </p:spPr>
+        <p:txBody>
+          <a:bodyPr wrap="square" lIns="0" tIns="0" rIns="0" bIns="0" anchor="t">
+            <a:normAutofit/>
           </a:bodyPr>
-          <a:lstStyle xmlns:a="http://schemas.openxmlformats.org/drawingml/2006/main"/>
-          <a:p xmlns:a="http://schemas.openxmlformats.org/drawingml/2006/main">
+          <a:lstStyle/>
+          <a:p>
             <a:pPr algn="l">
               <a:defRPr sz="1650" b="0">
                 <a:solidFill>
@@ -4879,38 +4714,38 @@
       </p:sp>
       <p:sp>
         <p:nvSpPr>
-          <p:cNvPr id="19" name="">
-            <a:extLst xmlns:a="http://schemas.openxmlformats.org/drawingml/2006/main">
+          <p:cNvPr id="19" name="Rectangle 18">
+            <a:extLst>
               <a:ext uri="{FF2B5EF4-FFF2-40B4-BE49-F238E27FC236}">
                 <a16:creationId xmlns:a16="http://schemas.microsoft.com/office/drawing/2014/main" id="{1C4E604A-A86B-4831-B37B-10BEF8C73B34}"/>
               </a:ext>
             </a:extLst>
           </p:cNvPr>
           <p:cNvSpPr>
-            <a:spLocks xmlns:a="http://schemas.openxmlformats.org/drawingml/2006/main" noGrp="1"/>
-          </p:cNvSpPr>
-          <p:nvPr/>
-        </p:nvSpPr>
-        <p:spPr>
-          <a:xfrm xmlns:a="http://schemas.openxmlformats.org/drawingml/2006/main">
+            <a:spLocks noGrp="1"/>
+          </p:cNvSpPr>
+          <p:nvPr/>
+        </p:nvSpPr>
+        <p:spPr>
+          <a:xfrm>
             <a:off x="895350" y="5295900"/>
             <a:ext cx="10382250" cy="400050"/>
           </a:xfrm>
-          <a:prstGeom xmlns:a="http://schemas.openxmlformats.org/drawingml/2006/main" prst="rect">
-            <a:avLst/>
-          </a:prstGeom>
-          <a:noFill xmlns:a="http://schemas.openxmlformats.org/drawingml/2006/main"/>
-          <a:ln xmlns:a="http://schemas.openxmlformats.org/drawingml/2006/main" w="0">
-            <a:noFill/>
-            <a:prstDash val="solid"/>
-          </a:ln>
-        </p:spPr>
-        <p:txBody>
-          <a:bodyPr xmlns:a="http://schemas.openxmlformats.org/drawingml/2006/main" wrap="square" lIns="0" tIns="0" rIns="0" bIns="0" anchor="t">
-            <a:normAutofit fontScale="100000"/>
+          <a:prstGeom prst="rect">
+            <a:avLst/>
+          </a:prstGeom>
+          <a:noFill/>
+          <a:ln w="0">
+            <a:noFill/>
+            <a:prstDash val="solid"/>
+          </a:ln>
+        </p:spPr>
+        <p:txBody>
+          <a:bodyPr wrap="square" lIns="0" tIns="0" rIns="0" bIns="0" anchor="t">
+            <a:normAutofit/>
           </a:bodyPr>
-          <a:lstStyle xmlns:a="http://schemas.openxmlformats.org/drawingml/2006/main"/>
-          <a:p xmlns:a="http://schemas.openxmlformats.org/drawingml/2006/main">
+          <a:lstStyle/>
+          <a:p>
             <a:pPr algn="l">
               <a:defRPr sz="1650" b="0">
                 <a:solidFill>
@@ -4942,17 +4777,21 @@
       </p:ext>
     </p:extLst>
   </p:cSld>
+  <p:clrMapOvr>
+    <a:masterClrMapping/>
+  </p:clrMapOvr>
 </p:sld>
 </file>
 
 <file path=ppt/slides/slide5.xml><?xml version="1.0" encoding="utf-8"?>
-<p:sld xmlns:p="http://schemas.openxmlformats.org/presentationml/2006/main">
+<p:sld xmlns:a="http://schemas.openxmlformats.org/drawingml/2006/main" xmlns:r="http://schemas.openxmlformats.org/officeDocument/2006/relationships" xmlns:p="http://schemas.openxmlformats.org/presentationml/2006/main">
   <p:cSld>
     <p:bg>
       <p:bgPr>
-        <a:solidFill xmlns:a="http://schemas.openxmlformats.org/drawingml/2006/main">
+        <a:solidFill>
           <a:srgbClr val="FFFDF8"/>
         </a:solidFill>
+        <a:effectLst/>
       </p:bgPr>
     </p:bg>
     <p:spTree>
@@ -4962,42 +4801,47 @@
         <p:nvPr/>
       </p:nvGrpSpPr>
       <p:grpSpPr>
-        <a:xfrm xmlns:a="http://schemas.openxmlformats.org/drawingml/2006/main"/>
+        <a:xfrm>
+          <a:off x="0" y="0"/>
+          <a:ext cx="0" cy="0"/>
+          <a:chOff x="0" y="0"/>
+          <a:chExt cx="0" cy="0"/>
+        </a:xfrm>
       </p:grpSpPr>
       <p:sp>
         <p:nvSpPr>
-          <p:cNvPr id="18" name="">
-            <a:extLst xmlns:a="http://schemas.openxmlformats.org/drawingml/2006/main">
+          <p:cNvPr id="18" name="Rectangle 17">
+            <a:extLst>
               <a:ext uri="{FF2B5EF4-FFF2-40B4-BE49-F238E27FC236}">
                 <a16:creationId xmlns:a16="http://schemas.microsoft.com/office/drawing/2014/main" id="{7812C6F2-F949-44A4-822E-54C4E731C883}"/>
               </a:ext>
             </a:extLst>
           </p:cNvPr>
           <p:cNvSpPr>
-            <a:spLocks xmlns:a="http://schemas.openxmlformats.org/drawingml/2006/main" noGrp="1"/>
-          </p:cNvSpPr>
-          <p:nvPr/>
-        </p:nvSpPr>
-        <p:spPr>
-          <a:xfrm xmlns:a="http://schemas.openxmlformats.org/drawingml/2006/main">
+            <a:spLocks noGrp="1"/>
+          </p:cNvSpPr>
+          <p:nvPr/>
+        </p:nvSpPr>
+        <p:spPr>
+          <a:xfrm>
             <a:off x="685800" y="495300"/>
             <a:ext cx="10820400" cy="609600"/>
           </a:xfrm>
-          <a:prstGeom xmlns:a="http://schemas.openxmlformats.org/drawingml/2006/main" prst="rect">
-            <a:avLst/>
-          </a:prstGeom>
-          <a:noFill xmlns:a="http://schemas.openxmlformats.org/drawingml/2006/main"/>
-          <a:ln xmlns:a="http://schemas.openxmlformats.org/drawingml/2006/main" w="0">
-            <a:noFill/>
-            <a:prstDash val="solid"/>
-          </a:ln>
-        </p:spPr>
-        <p:txBody>
-          <a:bodyPr xmlns:a="http://schemas.openxmlformats.org/drawingml/2006/main" wrap="square" lIns="0" tIns="0" rIns="0" bIns="0" anchor="t">
-            <a:normAutofit fontScale="100000"/>
+          <a:prstGeom prst="rect">
+            <a:avLst/>
+          </a:prstGeom>
+          <a:noFill/>
+          <a:ln w="0">
+            <a:noFill/>
+            <a:prstDash val="solid"/>
+          </a:ln>
+        </p:spPr>
+        <p:txBody>
+          <a:bodyPr wrap="square" lIns="0" tIns="0" rIns="0" bIns="0" anchor="t">
+            <a:normAutofit/>
           </a:bodyPr>
-          <a:lstStyle xmlns:a="http://schemas.openxmlformats.org/drawingml/2006/main"/>
-          <a:p xmlns:a="http://schemas.openxmlformats.org/drawingml/2006/main">
+          <a:lstStyle/>
+          <a:p>
             <a:pPr algn="l">
               <a:defRPr sz="3300" b="1">
                 <a:solidFill>
@@ -5024,61 +4868,61 @@
       </p:sp>
       <p:sp>
         <p:nvSpPr>
-          <p:cNvPr id="2" name="">
-            <a:extLst xmlns:a="http://schemas.openxmlformats.org/drawingml/2006/main">
+          <p:cNvPr id="2" name="Rectangle 1">
+            <a:extLst>
               <a:ext uri="{FF2B5EF4-FFF2-40B4-BE49-F238E27FC236}">
                 <a16:creationId xmlns:a16="http://schemas.microsoft.com/office/drawing/2014/main" id="{AE19782E-6221-4EA3-9FB2-8AB515D68A48}"/>
               </a:ext>
             </a:extLst>
           </p:cNvPr>
           <p:cNvSpPr>
-            <a:spLocks xmlns:a="http://schemas.openxmlformats.org/drawingml/2006/main" noGrp="1"/>
-          </p:cNvSpPr>
-          <p:nvPr/>
-        </p:nvSpPr>
-        <p:spPr>
-          <a:xfrm xmlns:a="http://schemas.openxmlformats.org/drawingml/2006/main">
+            <a:spLocks noGrp="1"/>
+          </p:cNvSpPr>
+          <p:nvPr/>
+        </p:nvSpPr>
+        <p:spPr>
+          <a:xfrm>
             <a:off x="685800" y="1219200"/>
             <a:ext cx="800100" cy="38100"/>
           </a:xfrm>
-          <a:prstGeom xmlns:a="http://schemas.openxmlformats.org/drawingml/2006/main" prst="rect">
-            <a:avLst/>
-          </a:prstGeom>
-          <a:solidFill xmlns:a="http://schemas.openxmlformats.org/drawingml/2006/main">
+          <a:prstGeom prst="rect">
+            <a:avLst/>
+          </a:prstGeom>
+          <a:solidFill>
             <a:srgbClr val="D8B86A"/>
           </a:solidFill>
-          <a:ln xmlns:a="http://schemas.openxmlformats.org/drawingml/2006/main" w="0">
-            <a:noFill/>
-            <a:prstDash val="solid"/>
-          </a:ln>
-        </p:spPr>
-      </p:sp>
-      <p:sp>
-        <p:nvSpPr>
-          <p:cNvPr id="3" name="">
-            <a:extLst xmlns:a="http://schemas.openxmlformats.org/drawingml/2006/main">
+          <a:ln w="0">
+            <a:noFill/>
+            <a:prstDash val="solid"/>
+          </a:ln>
+        </p:spPr>
+      </p:sp>
+      <p:sp>
+        <p:nvSpPr>
+          <p:cNvPr id="3" name="Rectangle 2">
+            <a:extLst>
               <a:ext uri="{FF2B5EF4-FFF2-40B4-BE49-F238E27FC236}">
                 <a16:creationId xmlns:a16="http://schemas.microsoft.com/office/drawing/2014/main" id="{E2D5F324-79B9-4DB4-9C06-E1E8891F2344}"/>
               </a:ext>
             </a:extLst>
           </p:cNvPr>
           <p:cNvSpPr>
-            <a:spLocks xmlns:a="http://schemas.openxmlformats.org/drawingml/2006/main" noGrp="1"/>
-          </p:cNvSpPr>
-          <p:nvPr/>
-        </p:nvSpPr>
-        <p:spPr>
-          <a:xfrm xmlns:a="http://schemas.openxmlformats.org/drawingml/2006/main">
+            <a:spLocks noGrp="1"/>
+          </p:cNvSpPr>
+          <p:nvPr/>
+        </p:nvSpPr>
+        <p:spPr>
+          <a:xfrm>
             <a:off x="2781300" y="1600200"/>
             <a:ext cx="6629400" cy="819150"/>
           </a:xfrm>
-          <a:prstGeom xmlns:a="http://schemas.openxmlformats.org/drawingml/2006/main" prst="rect">
-            <a:avLst/>
-          </a:prstGeom>
-          <a:solidFill xmlns:a="http://schemas.openxmlformats.org/drawingml/2006/main">
+          <a:prstGeom prst="rect">
+            <a:avLst/>
+          </a:prstGeom>
+          <a:solidFill>
             <a:srgbClr val="163B32"/>
           </a:solidFill>
-          <a:ln xmlns:a="http://schemas.openxmlformats.org/drawingml/2006/main" w="9525">
+          <a:ln w="9525">
             <a:solidFill>
               <a:srgbClr val="163B32"/>
             </a:solidFill>
@@ -5088,38 +4932,38 @@
       </p:sp>
       <p:sp>
         <p:nvSpPr>
-          <p:cNvPr id="4" name="">
-            <a:extLst xmlns:a="http://schemas.openxmlformats.org/drawingml/2006/main">
+          <p:cNvPr id="4" name="Rectangle 3">
+            <a:extLst>
               <a:ext uri="{FF2B5EF4-FFF2-40B4-BE49-F238E27FC236}">
                 <a16:creationId xmlns:a16="http://schemas.microsoft.com/office/drawing/2014/main" id="{C9213E54-2615-46BC-B95E-0FCFA24E451B}"/>
               </a:ext>
             </a:extLst>
           </p:cNvPr>
           <p:cNvSpPr>
-            <a:spLocks xmlns:a="http://schemas.openxmlformats.org/drawingml/2006/main" noGrp="1"/>
-          </p:cNvSpPr>
-          <p:nvPr/>
-        </p:nvSpPr>
-        <p:spPr>
-          <a:xfrm xmlns:a="http://schemas.openxmlformats.org/drawingml/2006/main">
+            <a:spLocks noGrp="1"/>
+          </p:cNvSpPr>
+          <p:nvPr/>
+        </p:nvSpPr>
+        <p:spPr>
+          <a:xfrm>
             <a:off x="3009900" y="1809750"/>
             <a:ext cx="6172200" cy="428625"/>
           </a:xfrm>
-          <a:prstGeom xmlns:a="http://schemas.openxmlformats.org/drawingml/2006/main" prst="rect">
-            <a:avLst/>
-          </a:prstGeom>
-          <a:noFill xmlns:a="http://schemas.openxmlformats.org/drawingml/2006/main"/>
-          <a:ln xmlns:a="http://schemas.openxmlformats.org/drawingml/2006/main" w="0">
-            <a:noFill/>
-            <a:prstDash val="solid"/>
-          </a:ln>
-        </p:spPr>
-        <p:txBody>
-          <a:bodyPr xmlns:a="http://schemas.openxmlformats.org/drawingml/2006/main" wrap="square" lIns="0" tIns="0" rIns="0" bIns="0" anchor="ctr">
+          <a:prstGeom prst="rect">
+            <a:avLst/>
+          </a:prstGeom>
+          <a:noFill/>
+          <a:ln w="0">
+            <a:noFill/>
+            <a:prstDash val="solid"/>
+          </a:ln>
+        </p:spPr>
+        <p:txBody>
+          <a:bodyPr wrap="square" lIns="0" tIns="0" rIns="0" bIns="0" anchor="ctr">
             <a:normAutofit fontScale="90582"/>
           </a:bodyPr>
-          <a:lstStyle xmlns:a="http://schemas.openxmlformats.org/drawingml/2006/main"/>
-          <a:p xmlns:a="http://schemas.openxmlformats.org/drawingml/2006/main">
+          <a:lstStyle/>
+          <a:p>
             <a:pPr algn="ctr">
               <a:defRPr sz="1875" b="1">
                 <a:solidFill>
@@ -5146,30 +4990,30 @@
       </p:sp>
       <p:sp>
         <p:nvSpPr>
-          <p:cNvPr id="5" name="">
-            <a:extLst xmlns:a="http://schemas.openxmlformats.org/drawingml/2006/main">
+          <p:cNvPr id="5" name="Rectangle 4">
+            <a:extLst>
               <a:ext uri="{FF2B5EF4-FFF2-40B4-BE49-F238E27FC236}">
                 <a16:creationId xmlns:a16="http://schemas.microsoft.com/office/drawing/2014/main" id="{7778AE0C-A0DB-4FFC-9F81-35B836758887}"/>
               </a:ext>
             </a:extLst>
           </p:cNvPr>
           <p:cNvSpPr>
-            <a:spLocks xmlns:a="http://schemas.openxmlformats.org/drawingml/2006/main" noGrp="1"/>
-          </p:cNvSpPr>
-          <p:nvPr/>
-        </p:nvSpPr>
-        <p:spPr>
-          <a:xfrm xmlns:a="http://schemas.openxmlformats.org/drawingml/2006/main">
+            <a:spLocks noGrp="1"/>
+          </p:cNvSpPr>
+          <p:nvPr/>
+        </p:nvSpPr>
+        <p:spPr>
+          <a:xfrm>
             <a:off x="781050" y="3352800"/>
             <a:ext cx="3143250" cy="1790700"/>
           </a:xfrm>
-          <a:prstGeom xmlns:a="http://schemas.openxmlformats.org/drawingml/2006/main" prst="rect">
-            <a:avLst/>
-          </a:prstGeom>
-          <a:solidFill xmlns:a="http://schemas.openxmlformats.org/drawingml/2006/main">
+          <a:prstGeom prst="rect">
+            <a:avLst/>
+          </a:prstGeom>
+          <a:solidFill>
             <a:srgbClr val="FFFDF8"/>
           </a:solidFill>
-          <a:ln xmlns:a="http://schemas.openxmlformats.org/drawingml/2006/main" w="14288">
+          <a:ln w="14288">
             <a:solidFill>
               <a:srgbClr val="C9D2CB"/>
             </a:solidFill>
@@ -5179,38 +5023,38 @@
       </p:sp>
       <p:sp>
         <p:nvSpPr>
-          <p:cNvPr id="6" name="">
-            <a:extLst xmlns:a="http://schemas.openxmlformats.org/drawingml/2006/main">
+          <p:cNvPr id="6" name="Rectangle 5">
+            <a:extLst>
               <a:ext uri="{FF2B5EF4-FFF2-40B4-BE49-F238E27FC236}">
                 <a16:creationId xmlns:a16="http://schemas.microsoft.com/office/drawing/2014/main" id="{42D77D98-A3E0-4AF4-BD0F-FBBEE4815081}"/>
               </a:ext>
             </a:extLst>
           </p:cNvPr>
           <p:cNvSpPr>
-            <a:spLocks xmlns:a="http://schemas.openxmlformats.org/drawingml/2006/main" noGrp="1"/>
-          </p:cNvSpPr>
-          <p:nvPr/>
-        </p:nvSpPr>
-        <p:spPr>
-          <a:xfrm xmlns:a="http://schemas.openxmlformats.org/drawingml/2006/main">
+            <a:spLocks noGrp="1"/>
+          </p:cNvSpPr>
+          <p:nvPr/>
+        </p:nvSpPr>
+        <p:spPr>
+          <a:xfrm>
             <a:off x="971550" y="3543300"/>
             <a:ext cx="2762250" cy="400050"/>
           </a:xfrm>
-          <a:prstGeom xmlns:a="http://schemas.openxmlformats.org/drawingml/2006/main" prst="rect">
-            <a:avLst/>
-          </a:prstGeom>
-          <a:noFill xmlns:a="http://schemas.openxmlformats.org/drawingml/2006/main"/>
-          <a:ln xmlns:a="http://schemas.openxmlformats.org/drawingml/2006/main" w="0">
-            <a:noFill/>
-            <a:prstDash val="solid"/>
-          </a:ln>
-        </p:spPr>
-        <p:txBody>
-          <a:bodyPr xmlns:a="http://schemas.openxmlformats.org/drawingml/2006/main" wrap="square" lIns="0" tIns="0" rIns="0" bIns="0" anchor="t">
-            <a:normAutofit fontScale="100000"/>
+          <a:prstGeom prst="rect">
+            <a:avLst/>
+          </a:prstGeom>
+          <a:noFill/>
+          <a:ln w="0">
+            <a:noFill/>
+            <a:prstDash val="solid"/>
+          </a:ln>
+        </p:spPr>
+        <p:txBody>
+          <a:bodyPr wrap="square" lIns="0" tIns="0" rIns="0" bIns="0" anchor="t">
+            <a:normAutofit/>
           </a:bodyPr>
-          <a:lstStyle xmlns:a="http://schemas.openxmlformats.org/drawingml/2006/main"/>
-          <a:p xmlns:a="http://schemas.openxmlformats.org/drawingml/2006/main">
+          <a:lstStyle/>
+          <a:p>
             <a:pPr algn="l">
               <a:defRPr sz="2100" b="1">
                 <a:solidFill>
@@ -5237,38 +5081,38 @@
       </p:sp>
       <p:sp>
         <p:nvSpPr>
-          <p:cNvPr id="7" name="">
-            <a:extLst xmlns:a="http://schemas.openxmlformats.org/drawingml/2006/main">
+          <p:cNvPr id="7" name="Rectangle 6">
+            <a:extLst>
               <a:ext uri="{FF2B5EF4-FFF2-40B4-BE49-F238E27FC236}">
                 <a16:creationId xmlns:a16="http://schemas.microsoft.com/office/drawing/2014/main" id="{E70AFA9E-68BF-407B-ACCE-6B0C64DDD88F}"/>
               </a:ext>
             </a:extLst>
           </p:cNvPr>
           <p:cNvSpPr>
-            <a:spLocks xmlns:a="http://schemas.openxmlformats.org/drawingml/2006/main" noGrp="1"/>
-          </p:cNvSpPr>
-          <p:nvPr/>
-        </p:nvSpPr>
-        <p:spPr>
-          <a:xfrm xmlns:a="http://schemas.openxmlformats.org/drawingml/2006/main">
+            <a:spLocks noGrp="1"/>
+          </p:cNvSpPr>
+          <p:nvPr/>
+        </p:nvSpPr>
+        <p:spPr>
+          <a:xfrm>
             <a:off x="971550" y="4057650"/>
             <a:ext cx="2762250" cy="914400"/>
           </a:xfrm>
-          <a:prstGeom xmlns:a="http://schemas.openxmlformats.org/drawingml/2006/main" prst="rect">
-            <a:avLst/>
-          </a:prstGeom>
-          <a:noFill xmlns:a="http://schemas.openxmlformats.org/drawingml/2006/main"/>
-          <a:ln xmlns:a="http://schemas.openxmlformats.org/drawingml/2006/main" w="0">
-            <a:noFill/>
-            <a:prstDash val="solid"/>
-          </a:ln>
-        </p:spPr>
-        <p:txBody>
-          <a:bodyPr xmlns:a="http://schemas.openxmlformats.org/drawingml/2006/main" wrap="square" lIns="0" tIns="0" rIns="0" bIns="0" anchor="t">
-            <a:normAutofit fontScale="100000"/>
+          <a:prstGeom prst="rect">
+            <a:avLst/>
+          </a:prstGeom>
+          <a:noFill/>
+          <a:ln w="0">
+            <a:noFill/>
+            <a:prstDash val="solid"/>
+          </a:ln>
+        </p:spPr>
+        <p:txBody>
+          <a:bodyPr wrap="square" lIns="0" tIns="0" rIns="0" bIns="0" anchor="t">
+            <a:normAutofit/>
           </a:bodyPr>
-          <a:lstStyle xmlns:a="http://schemas.openxmlformats.org/drawingml/2006/main"/>
-          <a:p xmlns:a="http://schemas.openxmlformats.org/drawingml/2006/main">
+          <a:lstStyle/>
+          <a:p>
             <a:pPr algn="l">
               <a:defRPr sz="1650" b="0">
                 <a:solidFill>
@@ -5291,7 +5135,7 @@
               <a:t>Build a 52-card deck</a:t>
             </a:r>
           </a:p>
-          <a:p xmlns:a="http://schemas.openxmlformats.org/drawingml/2006/main">
+          <a:p>
             <a:pPr algn="l">
               <a:defRPr sz="1650" b="0">
                 <a:solidFill>
@@ -5318,30 +5162,30 @@
       </p:sp>
       <p:sp>
         <p:nvSpPr>
-          <p:cNvPr id="8" name="">
-            <a:extLst xmlns:a="http://schemas.openxmlformats.org/drawingml/2006/main">
+          <p:cNvPr id="8" name="Rectangle 7">
+            <a:extLst>
               <a:ext uri="{FF2B5EF4-FFF2-40B4-BE49-F238E27FC236}">
                 <a16:creationId xmlns:a16="http://schemas.microsoft.com/office/drawing/2014/main" id="{AEE1D9B5-F943-45EF-8846-4B2EB0C5ABFF}"/>
               </a:ext>
             </a:extLst>
           </p:cNvPr>
           <p:cNvSpPr>
-            <a:spLocks xmlns:a="http://schemas.openxmlformats.org/drawingml/2006/main" noGrp="1"/>
-          </p:cNvSpPr>
-          <p:nvPr/>
-        </p:nvSpPr>
-        <p:spPr>
-          <a:xfrm xmlns:a="http://schemas.openxmlformats.org/drawingml/2006/main">
+            <a:spLocks noGrp="1"/>
+          </p:cNvSpPr>
+          <p:nvPr/>
+        </p:nvSpPr>
+        <p:spPr>
+          <a:xfrm>
             <a:off x="4524375" y="3352800"/>
             <a:ext cx="3143250" cy="1790700"/>
           </a:xfrm>
-          <a:prstGeom xmlns:a="http://schemas.openxmlformats.org/drawingml/2006/main" prst="rect">
-            <a:avLst/>
-          </a:prstGeom>
-          <a:solidFill xmlns:a="http://schemas.openxmlformats.org/drawingml/2006/main">
+          <a:prstGeom prst="rect">
+            <a:avLst/>
+          </a:prstGeom>
+          <a:solidFill>
             <a:srgbClr val="FFFDF8"/>
           </a:solidFill>
-          <a:ln xmlns:a="http://schemas.openxmlformats.org/drawingml/2006/main" w="14288">
+          <a:ln w="14288">
             <a:solidFill>
               <a:srgbClr val="C9D2CB"/>
             </a:solidFill>
@@ -5351,38 +5195,38 @@
       </p:sp>
       <p:sp>
         <p:nvSpPr>
-          <p:cNvPr id="9" name="">
-            <a:extLst xmlns:a="http://schemas.openxmlformats.org/drawingml/2006/main">
+          <p:cNvPr id="9" name="Rectangle 8">
+            <a:extLst>
               <a:ext uri="{FF2B5EF4-FFF2-40B4-BE49-F238E27FC236}">
                 <a16:creationId xmlns:a16="http://schemas.microsoft.com/office/drawing/2014/main" id="{5371B599-DEF0-4E39-B0A4-1A047EB3ADCE}"/>
               </a:ext>
             </a:extLst>
           </p:cNvPr>
           <p:cNvSpPr>
-            <a:spLocks xmlns:a="http://schemas.openxmlformats.org/drawingml/2006/main" noGrp="1"/>
-          </p:cNvSpPr>
-          <p:nvPr/>
-        </p:nvSpPr>
-        <p:spPr>
-          <a:xfrm xmlns:a="http://schemas.openxmlformats.org/drawingml/2006/main">
+            <a:spLocks noGrp="1"/>
+          </p:cNvSpPr>
+          <p:nvPr/>
+        </p:nvSpPr>
+        <p:spPr>
+          <a:xfrm>
             <a:off x="4714875" y="3543300"/>
             <a:ext cx="2762250" cy="400050"/>
           </a:xfrm>
-          <a:prstGeom xmlns:a="http://schemas.openxmlformats.org/drawingml/2006/main" prst="rect">
-            <a:avLst/>
-          </a:prstGeom>
-          <a:noFill xmlns:a="http://schemas.openxmlformats.org/drawingml/2006/main"/>
-          <a:ln xmlns:a="http://schemas.openxmlformats.org/drawingml/2006/main" w="0">
-            <a:noFill/>
-            <a:prstDash val="solid"/>
-          </a:ln>
-        </p:spPr>
-        <p:txBody>
-          <a:bodyPr xmlns:a="http://schemas.openxmlformats.org/drawingml/2006/main" wrap="square" lIns="0" tIns="0" rIns="0" bIns="0" anchor="t">
-            <a:normAutofit fontScale="100000"/>
+          <a:prstGeom prst="rect">
+            <a:avLst/>
+          </a:prstGeom>
+          <a:noFill/>
+          <a:ln w="0">
+            <a:noFill/>
+            <a:prstDash val="solid"/>
+          </a:ln>
+        </p:spPr>
+        <p:txBody>
+          <a:bodyPr wrap="square" lIns="0" tIns="0" rIns="0" bIns="0" anchor="t">
+            <a:normAutofit/>
           </a:bodyPr>
-          <a:lstStyle xmlns:a="http://schemas.openxmlformats.org/drawingml/2006/main"/>
-          <a:p xmlns:a="http://schemas.openxmlformats.org/drawingml/2006/main">
+          <a:lstStyle/>
+          <a:p>
             <a:pPr algn="l">
               <a:defRPr sz="1800" b="1">
                 <a:solidFill>
@@ -5409,38 +5253,38 @@
       </p:sp>
       <p:sp>
         <p:nvSpPr>
-          <p:cNvPr id="10" name="">
-            <a:extLst xmlns:a="http://schemas.openxmlformats.org/drawingml/2006/main">
+          <p:cNvPr id="10" name="Rectangle 9">
+            <a:extLst>
               <a:ext uri="{FF2B5EF4-FFF2-40B4-BE49-F238E27FC236}">
                 <a16:creationId xmlns:a16="http://schemas.microsoft.com/office/drawing/2014/main" id="{C4B7F4B4-617A-4B42-8FCD-3BA315306324}"/>
               </a:ext>
             </a:extLst>
           </p:cNvPr>
           <p:cNvSpPr>
-            <a:spLocks xmlns:a="http://schemas.openxmlformats.org/drawingml/2006/main" noGrp="1"/>
-          </p:cNvSpPr>
-          <p:nvPr/>
-        </p:nvSpPr>
-        <p:spPr>
-          <a:xfrm xmlns:a="http://schemas.openxmlformats.org/drawingml/2006/main">
+            <a:spLocks noGrp="1"/>
+          </p:cNvSpPr>
+          <p:nvPr/>
+        </p:nvSpPr>
+        <p:spPr>
+          <a:xfrm>
             <a:off x="4714875" y="4057650"/>
             <a:ext cx="2762250" cy="914400"/>
           </a:xfrm>
-          <a:prstGeom xmlns:a="http://schemas.openxmlformats.org/drawingml/2006/main" prst="rect">
-            <a:avLst/>
-          </a:prstGeom>
-          <a:noFill xmlns:a="http://schemas.openxmlformats.org/drawingml/2006/main"/>
-          <a:ln xmlns:a="http://schemas.openxmlformats.org/drawingml/2006/main" w="0">
-            <a:noFill/>
-            <a:prstDash val="solid"/>
-          </a:ln>
-        </p:spPr>
-        <p:txBody>
-          <a:bodyPr xmlns:a="http://schemas.openxmlformats.org/drawingml/2006/main" wrap="square" lIns="0" tIns="0" rIns="0" bIns="0" anchor="t">
-            <a:normAutofit fontScale="100000"/>
+          <a:prstGeom prst="rect">
+            <a:avLst/>
+          </a:prstGeom>
+          <a:noFill/>
+          <a:ln w="0">
+            <a:noFill/>
+            <a:prstDash val="solid"/>
+          </a:ln>
+        </p:spPr>
+        <p:txBody>
+          <a:bodyPr wrap="square" lIns="0" tIns="0" rIns="0" bIns="0" anchor="t">
+            <a:normAutofit/>
           </a:bodyPr>
-          <a:lstStyle xmlns:a="http://schemas.openxmlformats.org/drawingml/2006/main"/>
-          <a:p xmlns:a="http://schemas.openxmlformats.org/drawingml/2006/main">
+          <a:lstStyle/>
+          <a:p>
             <a:pPr algn="l">
               <a:defRPr sz="1650" b="0">
                 <a:solidFill>
@@ -5463,7 +5307,7 @@
               <a:t>Store a name and two private cards</a:t>
             </a:r>
           </a:p>
-          <a:p xmlns:a="http://schemas.openxmlformats.org/drawingml/2006/main">
+          <a:p>
             <a:pPr algn="l">
               <a:defRPr sz="1650" b="0">
                 <a:solidFill>
@@ -5490,30 +5334,30 @@
       </p:sp>
       <p:sp>
         <p:nvSpPr>
-          <p:cNvPr id="11" name="">
-            <a:extLst xmlns:a="http://schemas.openxmlformats.org/drawingml/2006/main">
+          <p:cNvPr id="11" name="Rectangle 10">
+            <a:extLst>
               <a:ext uri="{FF2B5EF4-FFF2-40B4-BE49-F238E27FC236}">
                 <a16:creationId xmlns:a16="http://schemas.microsoft.com/office/drawing/2014/main" id="{9046CA21-3CBB-4277-ACAF-A07B449F48EB}"/>
               </a:ext>
             </a:extLst>
           </p:cNvPr>
           <p:cNvSpPr>
-            <a:spLocks xmlns:a="http://schemas.openxmlformats.org/drawingml/2006/main" noGrp="1"/>
-          </p:cNvSpPr>
-          <p:nvPr/>
-        </p:nvSpPr>
-        <p:spPr>
-          <a:xfrm xmlns:a="http://schemas.openxmlformats.org/drawingml/2006/main">
+            <a:spLocks noGrp="1"/>
+          </p:cNvSpPr>
+          <p:nvPr/>
+        </p:nvSpPr>
+        <p:spPr>
+          <a:xfrm>
             <a:off x="8267700" y="3352800"/>
             <a:ext cx="3143250" cy="1790700"/>
           </a:xfrm>
-          <a:prstGeom xmlns:a="http://schemas.openxmlformats.org/drawingml/2006/main" prst="rect">
-            <a:avLst/>
-          </a:prstGeom>
-          <a:solidFill xmlns:a="http://schemas.openxmlformats.org/drawingml/2006/main">
+          <a:prstGeom prst="rect">
+            <a:avLst/>
+          </a:prstGeom>
+          <a:solidFill>
             <a:srgbClr val="FFFDF8"/>
           </a:solidFill>
-          <a:ln xmlns:a="http://schemas.openxmlformats.org/drawingml/2006/main" w="14288">
+          <a:ln w="14288">
             <a:solidFill>
               <a:srgbClr val="C9D2CB"/>
             </a:solidFill>
@@ -5523,38 +5367,38 @@
       </p:sp>
       <p:sp>
         <p:nvSpPr>
-          <p:cNvPr id="12" name="">
-            <a:extLst xmlns:a="http://schemas.openxmlformats.org/drawingml/2006/main">
+          <p:cNvPr id="12" name="Rectangle 11">
+            <a:extLst>
               <a:ext uri="{FF2B5EF4-FFF2-40B4-BE49-F238E27FC236}">
                 <a16:creationId xmlns:a16="http://schemas.microsoft.com/office/drawing/2014/main" id="{0262C5A8-7C1E-44AE-85F1-D9A43EFEC878}"/>
               </a:ext>
             </a:extLst>
           </p:cNvPr>
           <p:cNvSpPr>
-            <a:spLocks xmlns:a="http://schemas.openxmlformats.org/drawingml/2006/main" noGrp="1"/>
-          </p:cNvSpPr>
-          <p:nvPr/>
-        </p:nvSpPr>
-        <p:spPr>
-          <a:xfrm xmlns:a="http://schemas.openxmlformats.org/drawingml/2006/main">
+            <a:spLocks noGrp="1"/>
+          </p:cNvSpPr>
+          <p:nvPr/>
+        </p:nvSpPr>
+        <p:spPr>
+          <a:xfrm>
             <a:off x="8458200" y="3543300"/>
             <a:ext cx="2762250" cy="400050"/>
           </a:xfrm>
-          <a:prstGeom xmlns:a="http://schemas.openxmlformats.org/drawingml/2006/main" prst="rect">
-            <a:avLst/>
-          </a:prstGeom>
-          <a:noFill xmlns:a="http://schemas.openxmlformats.org/drawingml/2006/main"/>
-          <a:ln xmlns:a="http://schemas.openxmlformats.org/drawingml/2006/main" w="0">
-            <a:noFill/>
-            <a:prstDash val="solid"/>
-          </a:ln>
-        </p:spPr>
-        <p:txBody>
-          <a:bodyPr xmlns:a="http://schemas.openxmlformats.org/drawingml/2006/main" wrap="square" lIns="0" tIns="0" rIns="0" bIns="0" anchor="t">
-            <a:normAutofit fontScale="100000"/>
+          <a:prstGeom prst="rect">
+            <a:avLst/>
+          </a:prstGeom>
+          <a:noFill/>
+          <a:ln w="0">
+            <a:noFill/>
+            <a:prstDash val="solid"/>
+          </a:ln>
+        </p:spPr>
+        <p:txBody>
+          <a:bodyPr wrap="square" lIns="0" tIns="0" rIns="0" bIns="0" anchor="t">
+            <a:normAutofit/>
           </a:bodyPr>
-          <a:lstStyle xmlns:a="http://schemas.openxmlformats.org/drawingml/2006/main"/>
-          <a:p xmlns:a="http://schemas.openxmlformats.org/drawingml/2006/main">
+          <a:lstStyle/>
+          <a:p>
             <a:pPr algn="l">
               <a:defRPr sz="1950" b="1">
                 <a:solidFill>
@@ -5581,38 +5425,38 @@
       </p:sp>
       <p:sp>
         <p:nvSpPr>
-          <p:cNvPr id="13" name="">
-            <a:extLst xmlns:a="http://schemas.openxmlformats.org/drawingml/2006/main">
+          <p:cNvPr id="13" name="Rectangle 12">
+            <a:extLst>
               <a:ext uri="{FF2B5EF4-FFF2-40B4-BE49-F238E27FC236}">
                 <a16:creationId xmlns:a16="http://schemas.microsoft.com/office/drawing/2014/main" id="{F14A10F8-E912-437C-8EA9-266C7AC5641B}"/>
               </a:ext>
             </a:extLst>
           </p:cNvPr>
           <p:cNvSpPr>
-            <a:spLocks xmlns:a="http://schemas.openxmlformats.org/drawingml/2006/main" noGrp="1"/>
-          </p:cNvSpPr>
-          <p:nvPr/>
-        </p:nvSpPr>
-        <p:spPr>
-          <a:xfrm xmlns:a="http://schemas.openxmlformats.org/drawingml/2006/main">
+            <a:spLocks noGrp="1"/>
+          </p:cNvSpPr>
+          <p:nvPr/>
+        </p:nvSpPr>
+        <p:spPr>
+          <a:xfrm>
             <a:off x="8458200" y="4057650"/>
             <a:ext cx="2762250" cy="914400"/>
           </a:xfrm>
-          <a:prstGeom xmlns:a="http://schemas.openxmlformats.org/drawingml/2006/main" prst="rect">
-            <a:avLst/>
-          </a:prstGeom>
-          <a:noFill xmlns:a="http://schemas.openxmlformats.org/drawingml/2006/main"/>
-          <a:ln xmlns:a="http://schemas.openxmlformats.org/drawingml/2006/main" w="0">
-            <a:noFill/>
-            <a:prstDash val="solid"/>
-          </a:ln>
-        </p:spPr>
-        <p:txBody>
-          <a:bodyPr xmlns:a="http://schemas.openxmlformats.org/drawingml/2006/main" wrap="square" lIns="0" tIns="0" rIns="0" bIns="0" anchor="t">
-            <a:normAutofit fontScale="100000"/>
+          <a:prstGeom prst="rect">
+            <a:avLst/>
+          </a:prstGeom>
+          <a:noFill/>
+          <a:ln w="0">
+            <a:noFill/>
+            <a:prstDash val="solid"/>
+          </a:ln>
+        </p:spPr>
+        <p:txBody>
+          <a:bodyPr wrap="square" lIns="0" tIns="0" rIns="0" bIns="0" anchor="t">
+            <a:normAutofit/>
           </a:bodyPr>
-          <a:lstStyle xmlns:a="http://schemas.openxmlformats.org/drawingml/2006/main"/>
-          <a:p xmlns:a="http://schemas.openxmlformats.org/drawingml/2006/main">
+          <a:lstStyle/>
+          <a:p>
             <a:pPr algn="l">
               <a:defRPr sz="1650" b="0">
                 <a:solidFill>
@@ -5635,7 +5479,7 @@
               <a:t>Add hand evaluation</a:t>
             </a:r>
           </a:p>
-          <a:p xmlns:a="http://schemas.openxmlformats.org/drawingml/2006/main">
+          <a:p>
             <a:pPr algn="l">
               <a:defRPr sz="1650" b="0">
                 <a:solidFill>
@@ -5662,22 +5506,22 @@
       </p:sp>
       <p:cxnSp>
         <p:nvCxnSpPr>
-          <p:cNvPr id="31" name=""/>
+          <p:cNvPr id="31" name="Straight Arrow Connector 30"/>
           <p:cNvCxnSpPr>
-            <a:stCxn xmlns:a="http://schemas.openxmlformats.org/drawingml/2006/main" id="3" idx="2"/>
-            <a:endCxn xmlns:a="http://schemas.openxmlformats.org/drawingml/2006/main" id="5" idx="0"/>
+            <a:stCxn id="3" idx="2"/>
+            <a:endCxn id="5" idx="0"/>
           </p:cNvCxnSpPr>
           <p:nvPr/>
         </p:nvCxnSpPr>
         <p:spPr>
-          <a:xfrm xmlns:a="http://schemas.openxmlformats.org/drawingml/2006/main" flipH="1">
+          <a:xfrm flipH="1">
             <a:off x="2352675" y="2419350"/>
             <a:ext cx="3743325" cy="933450"/>
           </a:xfrm>
-          <a:prstGeom xmlns:a="http://schemas.openxmlformats.org/drawingml/2006/main" prst="straightConnector1">
-            <a:avLst/>
-          </a:prstGeom>
-          <a:ln xmlns:a="http://schemas.openxmlformats.org/drawingml/2006/main" w="16193">
+          <a:prstGeom prst="straightConnector1">
+            <a:avLst/>
+          </a:prstGeom>
+          <a:ln w="16193">
             <a:solidFill>
               <a:srgbClr val="2F6656"/>
             </a:solidFill>
@@ -5688,22 +5532,22 @@
       </p:cxnSp>
       <p:cxnSp>
         <p:nvCxnSpPr>
-          <p:cNvPr id="32" name=""/>
+          <p:cNvPr id="32" name="Straight Arrow Connector 31"/>
           <p:cNvCxnSpPr>
-            <a:stCxn xmlns:a="http://schemas.openxmlformats.org/drawingml/2006/main" id="3" idx="2"/>
-            <a:endCxn xmlns:a="http://schemas.openxmlformats.org/drawingml/2006/main" id="8" idx="0"/>
+            <a:stCxn id="3" idx="2"/>
+            <a:endCxn id="8" idx="0"/>
           </p:cNvCxnSpPr>
           <p:nvPr/>
         </p:nvCxnSpPr>
         <p:spPr>
-          <a:xfrm xmlns:a="http://schemas.openxmlformats.org/drawingml/2006/main">
+          <a:xfrm>
             <a:off x="6096000" y="2419350"/>
             <a:ext cx="0" cy="933450"/>
           </a:xfrm>
-          <a:prstGeom xmlns:a="http://schemas.openxmlformats.org/drawingml/2006/main" prst="straightConnector1">
-            <a:avLst/>
-          </a:prstGeom>
-          <a:ln xmlns:a="http://schemas.openxmlformats.org/drawingml/2006/main" w="16193">
+          <a:prstGeom prst="straightConnector1">
+            <a:avLst/>
+          </a:prstGeom>
+          <a:ln w="16193">
             <a:solidFill>
               <a:srgbClr val="2F6656"/>
             </a:solidFill>
@@ -5714,22 +5558,22 @@
       </p:cxnSp>
       <p:cxnSp>
         <p:nvCxnSpPr>
-          <p:cNvPr id="33" name=""/>
+          <p:cNvPr id="33" name="Straight Arrow Connector 32"/>
           <p:cNvCxnSpPr>
-            <a:stCxn xmlns:a="http://schemas.openxmlformats.org/drawingml/2006/main" id="3" idx="2"/>
-            <a:endCxn xmlns:a="http://schemas.openxmlformats.org/drawingml/2006/main" id="11" idx="0"/>
+            <a:stCxn id="3" idx="2"/>
+            <a:endCxn id="11" idx="0"/>
           </p:cNvCxnSpPr>
           <p:nvPr/>
         </p:nvCxnSpPr>
         <p:spPr>
-          <a:xfrm xmlns:a="http://schemas.openxmlformats.org/drawingml/2006/main">
+          <a:xfrm>
             <a:off x="6096000" y="2419350"/>
             <a:ext cx="3743325" cy="933450"/>
           </a:xfrm>
-          <a:prstGeom xmlns:a="http://schemas.openxmlformats.org/drawingml/2006/main" prst="straightConnector1">
-            <a:avLst/>
-          </a:prstGeom>
-          <a:ln xmlns:a="http://schemas.openxmlformats.org/drawingml/2006/main" w="16193">
+          <a:prstGeom prst="straightConnector1">
+            <a:avLst/>
+          </a:prstGeom>
+          <a:ln w="16193">
             <a:solidFill>
               <a:srgbClr val="2F6656"/>
             </a:solidFill>
@@ -5740,38 +5584,38 @@
       </p:cxnSp>
       <p:sp>
         <p:nvSpPr>
-          <p:cNvPr id="17" name="">
-            <a:extLst xmlns:a="http://schemas.openxmlformats.org/drawingml/2006/main">
+          <p:cNvPr id="17" name="Rectangle 16">
+            <a:extLst>
               <a:ext uri="{FF2B5EF4-FFF2-40B4-BE49-F238E27FC236}">
                 <a16:creationId xmlns:a16="http://schemas.microsoft.com/office/drawing/2014/main" id="{1B514CDF-8AB4-445A-B4D1-AE7D5320A889}"/>
               </a:ext>
             </a:extLst>
           </p:cNvPr>
           <p:cNvSpPr>
-            <a:spLocks xmlns:a="http://schemas.openxmlformats.org/drawingml/2006/main" noGrp="1"/>
-          </p:cNvSpPr>
-          <p:nvPr/>
-        </p:nvSpPr>
-        <p:spPr>
-          <a:xfrm xmlns:a="http://schemas.openxmlformats.org/drawingml/2006/main">
+            <a:spLocks noGrp="1"/>
+          </p:cNvSpPr>
+          <p:nvPr/>
+        </p:nvSpPr>
+        <p:spPr>
+          <a:xfrm>
             <a:off x="819150" y="5657850"/>
             <a:ext cx="10572750" cy="552450"/>
           </a:xfrm>
-          <a:prstGeom xmlns:a="http://schemas.openxmlformats.org/drawingml/2006/main" prst="rect">
-            <a:avLst/>
-          </a:prstGeom>
-          <a:noFill xmlns:a="http://schemas.openxmlformats.org/drawingml/2006/main"/>
-          <a:ln xmlns:a="http://schemas.openxmlformats.org/drawingml/2006/main" w="0">
-            <a:noFill/>
-            <a:prstDash val="solid"/>
-          </a:ln>
-        </p:spPr>
-        <p:txBody>
-          <a:bodyPr xmlns:a="http://schemas.openxmlformats.org/drawingml/2006/main" wrap="square" lIns="0" tIns="0" rIns="0" bIns="0" anchor="t">
-            <a:normAutofit fontScale="100000"/>
+          <a:prstGeom prst="rect">
+            <a:avLst/>
+          </a:prstGeom>
+          <a:noFill/>
+          <a:ln w="0">
+            <a:noFill/>
+            <a:prstDash val="solid"/>
+          </a:ln>
+        </p:spPr>
+        <p:txBody>
+          <a:bodyPr wrap="square" lIns="0" tIns="0" rIns="0" bIns="0" anchor="t">
+            <a:normAutofit/>
           </a:bodyPr>
-          <a:lstStyle xmlns:a="http://schemas.openxmlformats.org/drawingml/2006/main"/>
-          <a:p xmlns:a="http://schemas.openxmlformats.org/drawingml/2006/main">
+          <a:lstStyle/>
+          <a:p>
             <a:pPr algn="l">
               <a:defRPr sz="1650" b="0">
                 <a:solidFill>
@@ -5803,17 +5647,21 @@
       </p:ext>
     </p:extLst>
   </p:cSld>
+  <p:clrMapOvr>
+    <a:masterClrMapping/>
+  </p:clrMapOvr>
 </p:sld>
 </file>
 
 <file path=ppt/slides/slide6.xml><?xml version="1.0" encoding="utf-8"?>
-<p:sld xmlns:p="http://schemas.openxmlformats.org/presentationml/2006/main">
+<p:sld xmlns:a="http://schemas.openxmlformats.org/drawingml/2006/main" xmlns:r="http://schemas.openxmlformats.org/officeDocument/2006/relationships" xmlns:p="http://schemas.openxmlformats.org/presentationml/2006/main">
   <p:cSld>
     <p:bg>
       <p:bgPr>
-        <a:solidFill xmlns:a="http://schemas.openxmlformats.org/drawingml/2006/main">
+        <a:solidFill>
           <a:srgbClr val="F5F1E7"/>
         </a:solidFill>
+        <a:effectLst/>
       </p:bgPr>
     </p:bg>
     <p:spTree>
@@ -5823,42 +5671,47 @@
         <p:nvPr/>
       </p:nvGrpSpPr>
       <p:grpSpPr>
-        <a:xfrm xmlns:a="http://schemas.openxmlformats.org/drawingml/2006/main"/>
+        <a:xfrm>
+          <a:off x="0" y="0"/>
+          <a:ext cx="0" cy="0"/>
+          <a:chOff x="0" y="0"/>
+          <a:chExt cx="0" cy="0"/>
+        </a:xfrm>
       </p:grpSpPr>
       <p:sp>
         <p:nvSpPr>
-          <p:cNvPr id="10" name="">
-            <a:extLst xmlns:a="http://schemas.openxmlformats.org/drawingml/2006/main">
+          <p:cNvPr id="10" name="Rectangle 9">
+            <a:extLst>
               <a:ext uri="{FF2B5EF4-FFF2-40B4-BE49-F238E27FC236}">
                 <a16:creationId xmlns:a16="http://schemas.microsoft.com/office/drawing/2014/main" id="{9F7254ED-E745-45BE-B31B-E1C309D38C5B}"/>
               </a:ext>
             </a:extLst>
           </p:cNvPr>
           <p:cNvSpPr>
-            <a:spLocks xmlns:a="http://schemas.openxmlformats.org/drawingml/2006/main" noGrp="1"/>
-          </p:cNvSpPr>
-          <p:nvPr/>
-        </p:nvSpPr>
-        <p:spPr>
-          <a:xfrm xmlns:a="http://schemas.openxmlformats.org/drawingml/2006/main">
+            <a:spLocks noGrp="1"/>
+          </p:cNvSpPr>
+          <p:nvPr/>
+        </p:nvSpPr>
+        <p:spPr>
+          <a:xfrm>
             <a:off x="685800" y="495300"/>
             <a:ext cx="10820400" cy="609600"/>
           </a:xfrm>
-          <a:prstGeom xmlns:a="http://schemas.openxmlformats.org/drawingml/2006/main" prst="rect">
-            <a:avLst/>
-          </a:prstGeom>
-          <a:noFill xmlns:a="http://schemas.openxmlformats.org/drawingml/2006/main"/>
-          <a:ln xmlns:a="http://schemas.openxmlformats.org/drawingml/2006/main" w="0">
-            <a:noFill/>
-            <a:prstDash val="solid"/>
-          </a:ln>
-        </p:spPr>
-        <p:txBody>
-          <a:bodyPr xmlns:a="http://schemas.openxmlformats.org/drawingml/2006/main" wrap="square" lIns="0" tIns="0" rIns="0" bIns="0" anchor="t">
-            <a:normAutofit fontScale="100000"/>
+          <a:prstGeom prst="rect">
+            <a:avLst/>
+          </a:prstGeom>
+          <a:noFill/>
+          <a:ln w="0">
+            <a:noFill/>
+            <a:prstDash val="solid"/>
+          </a:ln>
+        </p:spPr>
+        <p:txBody>
+          <a:bodyPr wrap="square" lIns="0" tIns="0" rIns="0" bIns="0" anchor="t">
+            <a:normAutofit/>
           </a:bodyPr>
-          <a:lstStyle xmlns:a="http://schemas.openxmlformats.org/drawingml/2006/main"/>
-          <a:p xmlns:a="http://schemas.openxmlformats.org/drawingml/2006/main">
+          <a:lstStyle/>
+          <a:p>
             <a:pPr algn="l">
               <a:defRPr sz="3300" b="1">
                 <a:solidFill>
@@ -5885,69 +5738,69 @@
       </p:sp>
       <p:sp>
         <p:nvSpPr>
-          <p:cNvPr id="2" name="">
-            <a:extLst xmlns:a="http://schemas.openxmlformats.org/drawingml/2006/main">
+          <p:cNvPr id="2" name="Rectangle 1">
+            <a:extLst>
               <a:ext uri="{FF2B5EF4-FFF2-40B4-BE49-F238E27FC236}">
                 <a16:creationId xmlns:a16="http://schemas.microsoft.com/office/drawing/2014/main" id="{07E1F70B-70F4-498D-AC7F-0722600B6C3A}"/>
               </a:ext>
             </a:extLst>
           </p:cNvPr>
           <p:cNvSpPr>
-            <a:spLocks xmlns:a="http://schemas.openxmlformats.org/drawingml/2006/main" noGrp="1"/>
-          </p:cNvSpPr>
-          <p:nvPr/>
-        </p:nvSpPr>
-        <p:spPr>
-          <a:xfrm xmlns:a="http://schemas.openxmlformats.org/drawingml/2006/main">
+            <a:spLocks noGrp="1"/>
+          </p:cNvSpPr>
+          <p:nvPr/>
+        </p:nvSpPr>
+        <p:spPr>
+          <a:xfrm>
             <a:off x="685800" y="1219200"/>
             <a:ext cx="800100" cy="38100"/>
           </a:xfrm>
-          <a:prstGeom xmlns:a="http://schemas.openxmlformats.org/drawingml/2006/main" prst="rect">
-            <a:avLst/>
-          </a:prstGeom>
-          <a:solidFill xmlns:a="http://schemas.openxmlformats.org/drawingml/2006/main">
+          <a:prstGeom prst="rect">
+            <a:avLst/>
+          </a:prstGeom>
+          <a:solidFill>
             <a:srgbClr val="D8B86A"/>
           </a:solidFill>
-          <a:ln xmlns:a="http://schemas.openxmlformats.org/drawingml/2006/main" w="0">
-            <a:noFill/>
-            <a:prstDash val="solid"/>
-          </a:ln>
-        </p:spPr>
-      </p:sp>
-      <p:sp>
-        <p:nvSpPr>
-          <p:cNvPr id="3" name="">
-            <a:extLst xmlns:a="http://schemas.openxmlformats.org/drawingml/2006/main">
+          <a:ln w="0">
+            <a:noFill/>
+            <a:prstDash val="solid"/>
+          </a:ln>
+        </p:spPr>
+      </p:sp>
+      <p:sp>
+        <p:nvSpPr>
+          <p:cNvPr id="3" name="Rectangle 2">
+            <a:extLst>
               <a:ext uri="{FF2B5EF4-FFF2-40B4-BE49-F238E27FC236}">
                 <a16:creationId xmlns:a16="http://schemas.microsoft.com/office/drawing/2014/main" id="{EC9C9D64-ADE1-4FDB-B44A-6B59AC2DA303}"/>
               </a:ext>
             </a:extLst>
           </p:cNvPr>
           <p:cNvSpPr>
-            <a:spLocks xmlns:a="http://schemas.openxmlformats.org/drawingml/2006/main" noGrp="1"/>
-          </p:cNvSpPr>
-          <p:nvPr/>
-        </p:nvSpPr>
-        <p:spPr>
-          <a:xfrm xmlns:a="http://schemas.openxmlformats.org/drawingml/2006/main">
+            <a:spLocks noGrp="1"/>
+          </p:cNvSpPr>
+          <p:nvPr/>
+        </p:nvSpPr>
+        <p:spPr>
+          <a:xfrm>
             <a:off x="819150" y="1752600"/>
             <a:ext cx="4667250" cy="381000"/>
           </a:xfrm>
-          <a:prstGeom xmlns:a="http://schemas.openxmlformats.org/drawingml/2006/main" prst="rect">
-            <a:avLst/>
-          </a:prstGeom>
-          <a:noFill xmlns:a="http://schemas.openxmlformats.org/drawingml/2006/main"/>
-          <a:ln xmlns:a="http://schemas.openxmlformats.org/drawingml/2006/main" w="0">
-            <a:noFill/>
-            <a:prstDash val="solid"/>
-          </a:ln>
-        </p:spPr>
-        <p:txBody>
-          <a:bodyPr xmlns:a="http://schemas.openxmlformats.org/drawingml/2006/main" wrap="square" lIns="0" tIns="0" rIns="0" bIns="0" anchor="t">
-            <a:normAutofit fontScale="100000"/>
+          <a:prstGeom prst="rect">
+            <a:avLst/>
+          </a:prstGeom>
+          <a:noFill/>
+          <a:ln w="0">
+            <a:noFill/>
+            <a:prstDash val="solid"/>
+          </a:ln>
+        </p:spPr>
+        <p:txBody>
+          <a:bodyPr wrap="square" lIns="0" tIns="0" rIns="0" bIns="0" anchor="t">
+            <a:normAutofit/>
           </a:bodyPr>
-          <a:lstStyle xmlns:a="http://schemas.openxmlformats.org/drawingml/2006/main"/>
-          <a:p xmlns:a="http://schemas.openxmlformats.org/drawingml/2006/main">
+          <a:lstStyle/>
+          <a:p>
             <a:pPr algn="l">
               <a:defRPr sz="2175" b="1">
                 <a:solidFill>
@@ -5974,38 +5827,38 @@
       </p:sp>
       <p:sp>
         <p:nvSpPr>
-          <p:cNvPr id="4" name="">
-            <a:extLst xmlns:a="http://schemas.openxmlformats.org/drawingml/2006/main">
+          <p:cNvPr id="4" name="Rectangle 3">
+            <a:extLst>
               <a:ext uri="{FF2B5EF4-FFF2-40B4-BE49-F238E27FC236}">
                 <a16:creationId xmlns:a16="http://schemas.microsoft.com/office/drawing/2014/main" id="{AB1AE247-F382-4914-AEE2-266DF410E73A}"/>
               </a:ext>
             </a:extLst>
           </p:cNvPr>
           <p:cNvSpPr>
-            <a:spLocks xmlns:a="http://schemas.openxmlformats.org/drawingml/2006/main" noGrp="1"/>
-          </p:cNvSpPr>
-          <p:nvPr/>
-        </p:nvSpPr>
-        <p:spPr>
-          <a:xfrm xmlns:a="http://schemas.openxmlformats.org/drawingml/2006/main">
+            <a:spLocks noGrp="1"/>
+          </p:cNvSpPr>
+          <p:nvPr/>
+        </p:nvSpPr>
+        <p:spPr>
+          <a:xfrm>
             <a:off x="819150" y="2286000"/>
             <a:ext cx="4762500" cy="1257300"/>
           </a:xfrm>
-          <a:prstGeom xmlns:a="http://schemas.openxmlformats.org/drawingml/2006/main" prst="rect">
-            <a:avLst/>
-          </a:prstGeom>
-          <a:noFill xmlns:a="http://schemas.openxmlformats.org/drawingml/2006/main"/>
-          <a:ln xmlns:a="http://schemas.openxmlformats.org/drawingml/2006/main" w="0">
-            <a:noFill/>
-            <a:prstDash val="solid"/>
-          </a:ln>
-        </p:spPr>
-        <p:txBody>
-          <a:bodyPr xmlns:a="http://schemas.openxmlformats.org/drawingml/2006/main" wrap="square" lIns="0" tIns="0" rIns="0" bIns="0" anchor="t">
-            <a:normAutofit fontScale="100000"/>
+          <a:prstGeom prst="rect">
+            <a:avLst/>
+          </a:prstGeom>
+          <a:noFill/>
+          <a:ln w="0">
+            <a:noFill/>
+            <a:prstDash val="solid"/>
+          </a:ln>
+        </p:spPr>
+        <p:txBody>
+          <a:bodyPr wrap="square" lIns="0" tIns="0" rIns="0" bIns="0" anchor="t">
+            <a:normAutofit/>
           </a:bodyPr>
-          <a:lstStyle xmlns:a="http://schemas.openxmlformats.org/drawingml/2006/main"/>
-          <a:p xmlns:a="http://schemas.openxmlformats.org/drawingml/2006/main">
+          <a:lstStyle/>
+          <a:p>
             <a:pPr algn="l">
               <a:defRPr sz="1875" b="0">
                 <a:solidFill>
@@ -6028,7 +5881,7 @@
               <a:t>A later computer player could estimate starting-hand strength before the Flop.</a:t>
             </a:r>
           </a:p>
-          <a:p xmlns:a="http://schemas.openxmlformats.org/drawingml/2006/main">
+          <a:p>
             <a:pPr algn="l">
               <a:defRPr sz="1875" b="0">
                 <a:solidFill>
@@ -6055,69 +5908,69 @@
       </p:sp>
       <p:sp>
         <p:nvSpPr>
-          <p:cNvPr id="5" name="">
-            <a:extLst xmlns:a="http://schemas.openxmlformats.org/drawingml/2006/main">
+          <p:cNvPr id="5" name="Rectangle 4">
+            <a:extLst>
               <a:ext uri="{FF2B5EF4-FFF2-40B4-BE49-F238E27FC236}">
                 <a16:creationId xmlns:a16="http://schemas.microsoft.com/office/drawing/2014/main" id="{EAFC0CA1-CA2A-4635-88C2-9C527DAF5E54}"/>
               </a:ext>
             </a:extLst>
           </p:cNvPr>
           <p:cNvSpPr>
-            <a:spLocks xmlns:a="http://schemas.openxmlformats.org/drawingml/2006/main" noGrp="1"/>
-          </p:cNvSpPr>
-          <p:nvPr/>
-        </p:nvSpPr>
-        <p:spPr>
-          <a:xfrm xmlns:a="http://schemas.openxmlformats.org/drawingml/2006/main">
+            <a:spLocks noGrp="1"/>
+          </p:cNvSpPr>
+          <p:nvPr/>
+        </p:nvSpPr>
+        <p:spPr>
+          <a:xfrm>
             <a:off x="6000750" y="1752600"/>
             <a:ext cx="19050" cy="3467100"/>
           </a:xfrm>
-          <a:prstGeom xmlns:a="http://schemas.openxmlformats.org/drawingml/2006/main" prst="rect">
-            <a:avLst/>
-          </a:prstGeom>
-          <a:solidFill xmlns:a="http://schemas.openxmlformats.org/drawingml/2006/main">
+          <a:prstGeom prst="rect">
+            <a:avLst/>
+          </a:prstGeom>
+          <a:solidFill>
             <a:srgbClr val="C9D2CB"/>
           </a:solidFill>
-          <a:ln xmlns:a="http://schemas.openxmlformats.org/drawingml/2006/main" w="0">
-            <a:noFill/>
-            <a:prstDash val="solid"/>
-          </a:ln>
-        </p:spPr>
-      </p:sp>
-      <p:sp>
-        <p:nvSpPr>
-          <p:cNvPr id="6" name="">
-            <a:extLst xmlns:a="http://schemas.openxmlformats.org/drawingml/2006/main">
+          <a:ln w="0">
+            <a:noFill/>
+            <a:prstDash val="solid"/>
+          </a:ln>
+        </p:spPr>
+      </p:sp>
+      <p:sp>
+        <p:nvSpPr>
+          <p:cNvPr id="6" name="Rectangle 5">
+            <a:extLst>
               <a:ext uri="{FF2B5EF4-FFF2-40B4-BE49-F238E27FC236}">
                 <a16:creationId xmlns:a16="http://schemas.microsoft.com/office/drawing/2014/main" id="{530F5385-DFF2-4CF8-8386-32A06A33AF1E}"/>
               </a:ext>
             </a:extLst>
           </p:cNvPr>
           <p:cNvSpPr>
-            <a:spLocks xmlns:a="http://schemas.openxmlformats.org/drawingml/2006/main" noGrp="1"/>
-          </p:cNvSpPr>
-          <p:nvPr/>
-        </p:nvSpPr>
-        <p:spPr>
-          <a:xfrm xmlns:a="http://schemas.openxmlformats.org/drawingml/2006/main">
+            <a:spLocks noGrp="1"/>
+          </p:cNvSpPr>
+          <p:nvPr/>
+        </p:nvSpPr>
+        <p:spPr>
+          <a:xfrm>
             <a:off x="6515100" y="1752600"/>
             <a:ext cx="4286250" cy="381000"/>
           </a:xfrm>
-          <a:prstGeom xmlns:a="http://schemas.openxmlformats.org/drawingml/2006/main" prst="rect">
-            <a:avLst/>
-          </a:prstGeom>
-          <a:noFill xmlns:a="http://schemas.openxmlformats.org/drawingml/2006/main"/>
-          <a:ln xmlns:a="http://schemas.openxmlformats.org/drawingml/2006/main" w="0">
-            <a:noFill/>
-            <a:prstDash val="solid"/>
-          </a:ln>
-        </p:spPr>
-        <p:txBody>
-          <a:bodyPr xmlns:a="http://schemas.openxmlformats.org/drawingml/2006/main" wrap="square" lIns="0" tIns="0" rIns="0" bIns="0" anchor="t">
-            <a:normAutofit fontScale="100000"/>
+          <a:prstGeom prst="rect">
+            <a:avLst/>
+          </a:prstGeom>
+          <a:noFill/>
+          <a:ln w="0">
+            <a:noFill/>
+            <a:prstDash val="solid"/>
+          </a:ln>
+        </p:spPr>
+        <p:txBody>
+          <a:bodyPr wrap="square" lIns="0" tIns="0" rIns="0" bIns="0" anchor="t">
+            <a:normAutofit/>
           </a:bodyPr>
-          <a:lstStyle xmlns:a="http://schemas.openxmlformats.org/drawingml/2006/main"/>
-          <a:p xmlns:a="http://schemas.openxmlformats.org/drawingml/2006/main">
+          <a:lstStyle/>
+          <a:p>
             <a:pPr algn="l">
               <a:defRPr sz="2175" b="1">
                 <a:solidFill>
@@ -6144,38 +5997,38 @@
       </p:sp>
       <p:sp>
         <p:nvSpPr>
-          <p:cNvPr id="7" name="">
-            <a:extLst xmlns:a="http://schemas.openxmlformats.org/drawingml/2006/main">
+          <p:cNvPr id="7" name="Rectangle 6">
+            <a:extLst>
               <a:ext uri="{FF2B5EF4-FFF2-40B4-BE49-F238E27FC236}">
                 <a16:creationId xmlns:a16="http://schemas.microsoft.com/office/drawing/2014/main" id="{AC3D8C51-5828-4268-A982-50FCF924BB60}"/>
               </a:ext>
             </a:extLst>
           </p:cNvPr>
           <p:cNvSpPr>
-            <a:spLocks xmlns:a="http://schemas.openxmlformats.org/drawingml/2006/main" noGrp="1"/>
-          </p:cNvSpPr>
-          <p:nvPr/>
-        </p:nvSpPr>
-        <p:spPr>
-          <a:xfrm xmlns:a="http://schemas.openxmlformats.org/drawingml/2006/main">
+            <a:spLocks noGrp="1"/>
+          </p:cNvSpPr>
+          <p:nvPr/>
+        </p:nvSpPr>
+        <p:spPr>
+          <a:xfrm>
             <a:off x="6515100" y="2286000"/>
             <a:ext cx="4953000" cy="685800"/>
           </a:xfrm>
-          <a:prstGeom xmlns:a="http://schemas.openxmlformats.org/drawingml/2006/main" prst="rect">
-            <a:avLst/>
-          </a:prstGeom>
-          <a:noFill xmlns:a="http://schemas.openxmlformats.org/drawingml/2006/main"/>
-          <a:ln xmlns:a="http://schemas.openxmlformats.org/drawingml/2006/main" w="0">
-            <a:noFill/>
-            <a:prstDash val="solid"/>
-          </a:ln>
-        </p:spPr>
-        <p:txBody>
-          <a:bodyPr xmlns:a="http://schemas.openxmlformats.org/drawingml/2006/main" wrap="square" lIns="0" tIns="0" rIns="0" bIns="0" anchor="t">
-            <a:normAutofit fontScale="100000"/>
+          <a:prstGeom prst="rect">
+            <a:avLst/>
+          </a:prstGeom>
+          <a:noFill/>
+          <a:ln w="0">
+            <a:noFill/>
+            <a:prstDash val="solid"/>
+          </a:ln>
+        </p:spPr>
+        <p:txBody>
+          <a:bodyPr wrap="square" lIns="0" tIns="0" rIns="0" bIns="0" anchor="t">
+            <a:normAutofit/>
           </a:bodyPr>
-          <a:lstStyle xmlns:a="http://schemas.openxmlformats.org/drawingml/2006/main"/>
-          <a:p xmlns:a="http://schemas.openxmlformats.org/drawingml/2006/main">
+          <a:lstStyle/>
+          <a:p>
             <a:pPr algn="l">
               <a:defRPr sz="2025" b="1">
                 <a:solidFill>
@@ -6202,38 +6055,38 @@
       </p:sp>
       <p:sp>
         <p:nvSpPr>
-          <p:cNvPr id="8" name="">
-            <a:extLst xmlns:a="http://schemas.openxmlformats.org/drawingml/2006/main">
+          <p:cNvPr id="8" name="Rectangle 7">
+            <a:extLst>
               <a:ext uri="{FF2B5EF4-FFF2-40B4-BE49-F238E27FC236}">
                 <a16:creationId xmlns:a16="http://schemas.microsoft.com/office/drawing/2014/main" id="{FD010EF3-344F-439A-A5EF-327CF1D48384}"/>
               </a:ext>
             </a:extLst>
           </p:cNvPr>
           <p:cNvSpPr>
-            <a:spLocks xmlns:a="http://schemas.openxmlformats.org/drawingml/2006/main" noGrp="1"/>
-          </p:cNvSpPr>
-          <p:nvPr/>
-        </p:nvSpPr>
-        <p:spPr>
-          <a:xfrm xmlns:a="http://schemas.openxmlformats.org/drawingml/2006/main">
+            <a:spLocks noGrp="1"/>
+          </p:cNvSpPr>
+          <p:nvPr/>
+        </p:nvSpPr>
+        <p:spPr>
+          <a:xfrm>
             <a:off x="6515100" y="3162300"/>
             <a:ext cx="4953000" cy="1123950"/>
           </a:xfrm>
-          <a:prstGeom xmlns:a="http://schemas.openxmlformats.org/drawingml/2006/main" prst="rect">
-            <a:avLst/>
-          </a:prstGeom>
-          <a:noFill xmlns:a="http://schemas.openxmlformats.org/drawingml/2006/main"/>
-          <a:ln xmlns:a="http://schemas.openxmlformats.org/drawingml/2006/main" w="0">
-            <a:noFill/>
-            <a:prstDash val="solid"/>
-          </a:ln>
-        </p:spPr>
-        <p:txBody>
-          <a:bodyPr xmlns:a="http://schemas.openxmlformats.org/drawingml/2006/main" wrap="square" lIns="0" tIns="0" rIns="0" bIns="0" anchor="t">
-            <a:normAutofit fontScale="100000"/>
+          <a:prstGeom prst="rect">
+            <a:avLst/>
+          </a:prstGeom>
+          <a:noFill/>
+          <a:ln w="0">
+            <a:noFill/>
+            <a:prstDash val="solid"/>
+          </a:ln>
+        </p:spPr>
+        <p:txBody>
+          <a:bodyPr wrap="square" lIns="0" tIns="0" rIns="0" bIns="0" anchor="t">
+            <a:normAutofit/>
           </a:bodyPr>
-          <a:lstStyle xmlns:a="http://schemas.openxmlformats.org/drawingml/2006/main"/>
-          <a:p xmlns:a="http://schemas.openxmlformats.org/drawingml/2006/main">
+          <a:lstStyle/>
+          <a:p>
             <a:pPr algn="l">
               <a:defRPr sz="1725" b="0">
                 <a:solidFill>
@@ -6260,38 +6113,38 @@
       </p:sp>
       <p:sp>
         <p:nvSpPr>
-          <p:cNvPr id="9" name="">
-            <a:extLst xmlns:a="http://schemas.openxmlformats.org/drawingml/2006/main">
+          <p:cNvPr id="9" name="Rectangle 8">
+            <a:extLst>
               <a:ext uri="{FF2B5EF4-FFF2-40B4-BE49-F238E27FC236}">
                 <a16:creationId xmlns:a16="http://schemas.microsoft.com/office/drawing/2014/main" id="{508AC2D9-90EA-4C63-AF24-B2BD1B3AFDF6}"/>
               </a:ext>
             </a:extLst>
           </p:cNvPr>
           <p:cNvSpPr>
-            <a:spLocks xmlns:a="http://schemas.openxmlformats.org/drawingml/2006/main" noGrp="1"/>
-          </p:cNvSpPr>
-          <p:nvPr/>
-        </p:nvSpPr>
-        <p:spPr>
-          <a:xfrm xmlns:a="http://schemas.openxmlformats.org/drawingml/2006/main">
+            <a:spLocks noGrp="1"/>
+          </p:cNvSpPr>
+          <p:nvPr/>
+        </p:nvSpPr>
+        <p:spPr>
+          <a:xfrm>
             <a:off x="819150" y="4762500"/>
             <a:ext cx="10572750" cy="419100"/>
           </a:xfrm>
-          <a:prstGeom xmlns:a="http://schemas.openxmlformats.org/drawingml/2006/main" prst="rect">
-            <a:avLst/>
-          </a:prstGeom>
-          <a:noFill xmlns:a="http://schemas.openxmlformats.org/drawingml/2006/main"/>
-          <a:ln xmlns:a="http://schemas.openxmlformats.org/drawingml/2006/main" w="0">
-            <a:noFill/>
-            <a:prstDash val="solid"/>
-          </a:ln>
-        </p:spPr>
-        <p:txBody>
-          <a:bodyPr xmlns:a="http://schemas.openxmlformats.org/drawingml/2006/main" wrap="square" lIns="0" tIns="0" rIns="0" bIns="0" anchor="t">
-            <a:normAutofit fontScale="100000"/>
+          <a:prstGeom prst="rect">
+            <a:avLst/>
+          </a:prstGeom>
+          <a:noFill/>
+          <a:ln w="0">
+            <a:noFill/>
+            <a:prstDash val="solid"/>
+          </a:ln>
+        </p:spPr>
+        <p:txBody>
+          <a:bodyPr wrap="square" lIns="0" tIns="0" rIns="0" bIns="0" anchor="t">
+            <a:normAutofit/>
           </a:bodyPr>
-          <a:lstStyle xmlns:a="http://schemas.openxmlformats.org/drawingml/2006/main"/>
-          <a:p xmlns:a="http://schemas.openxmlformats.org/drawingml/2006/main">
+          <a:lstStyle/>
+          <a:p>
             <a:pPr algn="l">
               <a:defRPr sz="1650" b="0">
                 <a:solidFill>
@@ -6323,17 +6176,21 @@
       </p:ext>
     </p:extLst>
   </p:cSld>
+  <p:clrMapOvr>
+    <a:masterClrMapping/>
+  </p:clrMapOvr>
 </p:sld>
 </file>
 
 <file path=ppt/slides/slide7.xml><?xml version="1.0" encoding="utf-8"?>
-<p:sld xmlns:p="http://schemas.openxmlformats.org/presentationml/2006/main">
+<p:sld xmlns:a="http://schemas.openxmlformats.org/drawingml/2006/main" xmlns:r="http://schemas.openxmlformats.org/officeDocument/2006/relationships" xmlns:p="http://schemas.openxmlformats.org/presentationml/2006/main">
   <p:cSld>
     <p:bg>
       <p:bgPr>
-        <a:solidFill xmlns:a="http://schemas.openxmlformats.org/drawingml/2006/main">
+        <a:solidFill>
           <a:srgbClr val="FFFDF8"/>
         </a:solidFill>
+        <a:effectLst/>
       </p:bgPr>
     </p:bg>
     <p:spTree>
@@ -6343,42 +6200,47 @@
         <p:nvPr/>
       </p:nvGrpSpPr>
       <p:grpSpPr>
-        <a:xfrm xmlns:a="http://schemas.openxmlformats.org/drawingml/2006/main"/>
+        <a:xfrm>
+          <a:off x="0" y="0"/>
+          <a:ext cx="0" cy="0"/>
+          <a:chOff x="0" y="0"/>
+          <a:chExt cx="0" cy="0"/>
+        </a:xfrm>
       </p:grpSpPr>
       <p:sp>
         <p:nvSpPr>
-          <p:cNvPr id="14" name="">
-            <a:extLst xmlns:a="http://schemas.openxmlformats.org/drawingml/2006/main">
+          <p:cNvPr id="14" name="Rectangle 13">
+            <a:extLst>
               <a:ext uri="{FF2B5EF4-FFF2-40B4-BE49-F238E27FC236}">
                 <a16:creationId xmlns:a16="http://schemas.microsoft.com/office/drawing/2014/main" id="{9A16F96D-0209-4F01-89D6-99717F7ED687}"/>
               </a:ext>
             </a:extLst>
           </p:cNvPr>
           <p:cNvSpPr>
-            <a:spLocks xmlns:a="http://schemas.openxmlformats.org/drawingml/2006/main" noGrp="1"/>
-          </p:cNvSpPr>
-          <p:nvPr/>
-        </p:nvSpPr>
-        <p:spPr>
-          <a:xfrm xmlns:a="http://schemas.openxmlformats.org/drawingml/2006/main">
+            <a:spLocks noGrp="1"/>
+          </p:cNvSpPr>
+          <p:nvPr/>
+        </p:nvSpPr>
+        <p:spPr>
+          <a:xfrm>
             <a:off x="685800" y="495300"/>
             <a:ext cx="10820400" cy="609600"/>
           </a:xfrm>
-          <a:prstGeom xmlns:a="http://schemas.openxmlformats.org/drawingml/2006/main" prst="rect">
-            <a:avLst/>
-          </a:prstGeom>
-          <a:noFill xmlns:a="http://schemas.openxmlformats.org/drawingml/2006/main"/>
-          <a:ln xmlns:a="http://schemas.openxmlformats.org/drawingml/2006/main" w="0">
-            <a:noFill/>
-            <a:prstDash val="solid"/>
-          </a:ln>
-        </p:spPr>
-        <p:txBody>
-          <a:bodyPr xmlns:a="http://schemas.openxmlformats.org/drawingml/2006/main" wrap="square" lIns="0" tIns="0" rIns="0" bIns="0" anchor="t">
-            <a:normAutofit fontScale="100000"/>
+          <a:prstGeom prst="rect">
+            <a:avLst/>
+          </a:prstGeom>
+          <a:noFill/>
+          <a:ln w="0">
+            <a:noFill/>
+            <a:prstDash val="solid"/>
+          </a:ln>
+        </p:spPr>
+        <p:txBody>
+          <a:bodyPr wrap="square" lIns="0" tIns="0" rIns="0" bIns="0" anchor="t">
+            <a:normAutofit/>
           </a:bodyPr>
-          <a:lstStyle xmlns:a="http://schemas.openxmlformats.org/drawingml/2006/main"/>
-          <a:p xmlns:a="http://schemas.openxmlformats.org/drawingml/2006/main">
+          <a:lstStyle/>
+          <a:p>
             <a:pPr algn="l">
               <a:defRPr sz="3300" b="1">
                 <a:solidFill>
@@ -6405,69 +6267,69 @@
       </p:sp>
       <p:sp>
         <p:nvSpPr>
-          <p:cNvPr id="2" name="">
-            <a:extLst xmlns:a="http://schemas.openxmlformats.org/drawingml/2006/main">
+          <p:cNvPr id="2" name="Rectangle 1">
+            <a:extLst>
               <a:ext uri="{FF2B5EF4-FFF2-40B4-BE49-F238E27FC236}">
                 <a16:creationId xmlns:a16="http://schemas.microsoft.com/office/drawing/2014/main" id="{B4393ED4-3E56-444E-8B88-236059CDC2BC}"/>
               </a:ext>
             </a:extLst>
           </p:cNvPr>
           <p:cNvSpPr>
-            <a:spLocks xmlns:a="http://schemas.openxmlformats.org/drawingml/2006/main" noGrp="1"/>
-          </p:cNvSpPr>
-          <p:nvPr/>
-        </p:nvSpPr>
-        <p:spPr>
-          <a:xfrm xmlns:a="http://schemas.openxmlformats.org/drawingml/2006/main">
+            <a:spLocks noGrp="1"/>
+          </p:cNvSpPr>
+          <p:nvPr/>
+        </p:nvSpPr>
+        <p:spPr>
+          <a:xfrm>
             <a:off x="685800" y="1219200"/>
             <a:ext cx="800100" cy="38100"/>
           </a:xfrm>
-          <a:prstGeom xmlns:a="http://schemas.openxmlformats.org/drawingml/2006/main" prst="rect">
-            <a:avLst/>
-          </a:prstGeom>
-          <a:solidFill xmlns:a="http://schemas.openxmlformats.org/drawingml/2006/main">
+          <a:prstGeom prst="rect">
+            <a:avLst/>
+          </a:prstGeom>
+          <a:solidFill>
             <a:srgbClr val="D8B86A"/>
           </a:solidFill>
-          <a:ln xmlns:a="http://schemas.openxmlformats.org/drawingml/2006/main" w="0">
-            <a:noFill/>
-            <a:prstDash val="solid"/>
-          </a:ln>
-        </p:spPr>
-      </p:sp>
-      <p:sp>
-        <p:nvSpPr>
-          <p:cNvPr id="3" name="">
-            <a:extLst xmlns:a="http://schemas.openxmlformats.org/drawingml/2006/main">
+          <a:ln w="0">
+            <a:noFill/>
+            <a:prstDash val="solid"/>
+          </a:ln>
+        </p:spPr>
+      </p:sp>
+      <p:sp>
+        <p:nvSpPr>
+          <p:cNvPr id="3" name="Rectangle 2">
+            <a:extLst>
               <a:ext uri="{FF2B5EF4-FFF2-40B4-BE49-F238E27FC236}">
                 <a16:creationId xmlns:a16="http://schemas.microsoft.com/office/drawing/2014/main" id="{7438A394-4D07-469E-9B6A-80A5FC73B61C}"/>
               </a:ext>
             </a:extLst>
           </p:cNvPr>
           <p:cNvSpPr>
-            <a:spLocks xmlns:a="http://schemas.openxmlformats.org/drawingml/2006/main" noGrp="1"/>
-          </p:cNvSpPr>
-          <p:nvPr/>
-        </p:nvSpPr>
-        <p:spPr>
-          <a:xfrm xmlns:a="http://schemas.openxmlformats.org/drawingml/2006/main">
+            <a:spLocks noGrp="1"/>
+          </p:cNvSpPr>
+          <p:nvPr/>
+        </p:nvSpPr>
+        <p:spPr>
+          <a:xfrm>
             <a:off x="819150" y="1609725"/>
             <a:ext cx="2381250" cy="361950"/>
           </a:xfrm>
-          <a:prstGeom xmlns:a="http://schemas.openxmlformats.org/drawingml/2006/main" prst="rect">
-            <a:avLst/>
-          </a:prstGeom>
-          <a:noFill xmlns:a="http://schemas.openxmlformats.org/drawingml/2006/main"/>
-          <a:ln xmlns:a="http://schemas.openxmlformats.org/drawingml/2006/main" w="0">
-            <a:noFill/>
-            <a:prstDash val="solid"/>
-          </a:ln>
-        </p:spPr>
-        <p:txBody>
-          <a:bodyPr xmlns:a="http://schemas.openxmlformats.org/drawingml/2006/main" wrap="square" lIns="0" tIns="0" rIns="0" bIns="0" anchor="t">
-            <a:normAutofit fontScale="100000"/>
+          <a:prstGeom prst="rect">
+            <a:avLst/>
+          </a:prstGeom>
+          <a:noFill/>
+          <a:ln w="0">
+            <a:noFill/>
+            <a:prstDash val="solid"/>
+          </a:ln>
+        </p:spPr>
+        <p:txBody>
+          <a:bodyPr wrap="square" lIns="0" tIns="0" rIns="0" bIns="0" anchor="t">
+            <a:normAutofit/>
           </a:bodyPr>
-          <a:lstStyle xmlns:a="http://schemas.openxmlformats.org/drawingml/2006/main"/>
-          <a:p xmlns:a="http://schemas.openxmlformats.org/drawingml/2006/main">
+          <a:lstStyle/>
+          <a:p>
             <a:pPr algn="l">
               <a:defRPr sz="1875" b="1">
                 <a:solidFill>
@@ -6494,30 +6356,30 @@
       </p:sp>
       <p:sp>
         <p:nvSpPr>
-          <p:cNvPr id="4" name="">
-            <a:extLst xmlns:a="http://schemas.openxmlformats.org/drawingml/2006/main">
+          <p:cNvPr id="4" name="Rectangle 3">
+            <a:extLst>
               <a:ext uri="{FF2B5EF4-FFF2-40B4-BE49-F238E27FC236}">
                 <a16:creationId xmlns:a16="http://schemas.microsoft.com/office/drawing/2014/main" id="{429A7D90-4616-4341-B703-E37450B77AA4}"/>
               </a:ext>
             </a:extLst>
           </p:cNvPr>
           <p:cNvSpPr>
-            <a:spLocks xmlns:a="http://schemas.openxmlformats.org/drawingml/2006/main" noGrp="1"/>
-          </p:cNvSpPr>
-          <p:nvPr/>
-        </p:nvSpPr>
-        <p:spPr>
-          <a:xfrm xmlns:a="http://schemas.openxmlformats.org/drawingml/2006/main">
+            <a:spLocks noGrp="1"/>
+          </p:cNvSpPr>
+          <p:nvPr/>
+        </p:nvSpPr>
+        <p:spPr>
+          <a:xfrm>
             <a:off x="819150" y="2114550"/>
             <a:ext cx="10553700" cy="647700"/>
           </a:xfrm>
-          <a:prstGeom xmlns:a="http://schemas.openxmlformats.org/drawingml/2006/main" prst="rect">
-            <a:avLst/>
-          </a:prstGeom>
-          <a:solidFill xmlns:a="http://schemas.openxmlformats.org/drawingml/2006/main">
+          <a:prstGeom prst="rect">
+            <a:avLst/>
+          </a:prstGeom>
+          <a:solidFill>
             <a:srgbClr val="102B26"/>
           </a:solidFill>
-          <a:ln xmlns:a="http://schemas.openxmlformats.org/drawingml/2006/main" w="9525">
+          <a:ln w="9525">
             <a:solidFill>
               <a:srgbClr val="102B26"/>
             </a:solidFill>
@@ -6527,38 +6389,38 @@
       </p:sp>
       <p:sp>
         <p:nvSpPr>
-          <p:cNvPr id="5" name="">
-            <a:extLst xmlns:a="http://schemas.openxmlformats.org/drawingml/2006/main">
+          <p:cNvPr id="5" name="Rectangle 4">
+            <a:extLst>
               <a:ext uri="{FF2B5EF4-FFF2-40B4-BE49-F238E27FC236}">
                 <a16:creationId xmlns:a16="http://schemas.microsoft.com/office/drawing/2014/main" id="{509EAE4E-954F-414D-A91E-A77B4263BFFC}"/>
               </a:ext>
             </a:extLst>
           </p:cNvPr>
           <p:cNvSpPr>
-            <a:spLocks xmlns:a="http://schemas.openxmlformats.org/drawingml/2006/main" noGrp="1"/>
-          </p:cNvSpPr>
-          <p:nvPr/>
-        </p:nvSpPr>
-        <p:spPr>
-          <a:xfrm xmlns:a="http://schemas.openxmlformats.org/drawingml/2006/main">
+            <a:spLocks noGrp="1"/>
+          </p:cNvSpPr>
+          <p:nvPr/>
+        </p:nvSpPr>
+        <p:spPr>
+          <a:xfrm>
             <a:off x="1066800" y="2266950"/>
             <a:ext cx="9791700" cy="400050"/>
           </a:xfrm>
-          <a:prstGeom xmlns:a="http://schemas.openxmlformats.org/drawingml/2006/main" prst="rect">
-            <a:avLst/>
-          </a:prstGeom>
-          <a:noFill xmlns:a="http://schemas.openxmlformats.org/drawingml/2006/main"/>
-          <a:ln xmlns:a="http://schemas.openxmlformats.org/drawingml/2006/main" w="0">
-            <a:noFill/>
-            <a:prstDash val="solid"/>
-          </a:ln>
-        </p:spPr>
-        <p:txBody>
-          <a:bodyPr xmlns:a="http://schemas.openxmlformats.org/drawingml/2006/main" wrap="square" lIns="0" tIns="0" rIns="0" bIns="0" anchor="ctr">
-            <a:normAutofit fontScale="100000"/>
+          <a:prstGeom prst="rect">
+            <a:avLst/>
+          </a:prstGeom>
+          <a:noFill/>
+          <a:ln w="0">
+            <a:noFill/>
+            <a:prstDash val="solid"/>
+          </a:ln>
+        </p:spPr>
+        <p:txBody>
+          <a:bodyPr wrap="square" lIns="0" tIns="0" rIns="0" bIns="0" anchor="ctr">
+            <a:normAutofit/>
           </a:bodyPr>
-          <a:lstStyle xmlns:a="http://schemas.openxmlformats.org/drawingml/2006/main"/>
-          <a:p xmlns:a="http://schemas.openxmlformats.org/drawingml/2006/main">
+          <a:lstStyle/>
+          <a:p>
             <a:pPr algn="l">
               <a:defRPr sz="1950" b="1">
                 <a:solidFill>
@@ -6585,38 +6447,38 @@
       </p:sp>
       <p:sp>
         <p:nvSpPr>
-          <p:cNvPr id="6" name="">
-            <a:extLst xmlns:a="http://schemas.openxmlformats.org/drawingml/2006/main">
+          <p:cNvPr id="6" name="Rectangle 5">
+            <a:extLst>
               <a:ext uri="{FF2B5EF4-FFF2-40B4-BE49-F238E27FC236}">
                 <a16:creationId xmlns:a16="http://schemas.microsoft.com/office/drawing/2014/main" id="{F1456566-A7F6-4F97-BE01-0074C950BCAA}"/>
               </a:ext>
             </a:extLst>
           </p:cNvPr>
           <p:cNvSpPr>
-            <a:spLocks xmlns:a="http://schemas.openxmlformats.org/drawingml/2006/main" noGrp="1"/>
-          </p:cNvSpPr>
-          <p:nvPr/>
-        </p:nvSpPr>
-        <p:spPr>
-          <a:xfrm xmlns:a="http://schemas.openxmlformats.org/drawingml/2006/main">
+            <a:spLocks noGrp="1"/>
+          </p:cNvSpPr>
+          <p:nvPr/>
+        </p:nvSpPr>
+        <p:spPr>
+          <a:xfrm>
             <a:off x="914400" y="3238500"/>
             <a:ext cx="514350" cy="361950"/>
           </a:xfrm>
-          <a:prstGeom xmlns:a="http://schemas.openxmlformats.org/drawingml/2006/main" prst="rect">
-            <a:avLst/>
-          </a:prstGeom>
-          <a:noFill xmlns:a="http://schemas.openxmlformats.org/drawingml/2006/main"/>
-          <a:ln xmlns:a="http://schemas.openxmlformats.org/drawingml/2006/main" w="0">
-            <a:noFill/>
-            <a:prstDash val="solid"/>
-          </a:ln>
-        </p:spPr>
-        <p:txBody>
-          <a:bodyPr xmlns:a="http://schemas.openxmlformats.org/drawingml/2006/main" wrap="square" lIns="0" tIns="0" rIns="0" bIns="0" anchor="t">
-            <a:normAutofit fontScale="100000"/>
+          <a:prstGeom prst="rect">
+            <a:avLst/>
+          </a:prstGeom>
+          <a:noFill/>
+          <a:ln w="0">
+            <a:noFill/>
+            <a:prstDash val="solid"/>
+          </a:ln>
+        </p:spPr>
+        <p:txBody>
+          <a:bodyPr wrap="square" lIns="0" tIns="0" rIns="0" bIns="0" anchor="t">
+            <a:normAutofit/>
           </a:bodyPr>
-          <a:lstStyle xmlns:a="http://schemas.openxmlformats.org/drawingml/2006/main"/>
-          <a:p xmlns:a="http://schemas.openxmlformats.org/drawingml/2006/main">
+          <a:lstStyle/>
+          <a:p>
             <a:pPr algn="l">
               <a:defRPr sz="1800" b="1">
                 <a:solidFill>
@@ -6643,38 +6505,38 @@
       </p:sp>
       <p:sp>
         <p:nvSpPr>
-          <p:cNvPr id="7" name="">
-            <a:extLst xmlns:a="http://schemas.openxmlformats.org/drawingml/2006/main">
+          <p:cNvPr id="7" name="Rectangle 6">
+            <a:extLst>
               <a:ext uri="{FF2B5EF4-FFF2-40B4-BE49-F238E27FC236}">
                 <a16:creationId xmlns:a16="http://schemas.microsoft.com/office/drawing/2014/main" id="{6248EA0D-31C9-499C-9A9D-E75FC6DC088E}"/>
               </a:ext>
             </a:extLst>
           </p:cNvPr>
           <p:cNvSpPr>
-            <a:spLocks xmlns:a="http://schemas.openxmlformats.org/drawingml/2006/main" noGrp="1"/>
-          </p:cNvSpPr>
-          <p:nvPr/>
-        </p:nvSpPr>
-        <p:spPr>
-          <a:xfrm xmlns:a="http://schemas.openxmlformats.org/drawingml/2006/main">
+            <a:spLocks noGrp="1"/>
+          </p:cNvSpPr>
+          <p:nvPr/>
+        </p:nvSpPr>
+        <p:spPr>
+          <a:xfrm>
             <a:off x="1562100" y="3238500"/>
             <a:ext cx="9763125" cy="476250"/>
           </a:xfrm>
-          <a:prstGeom xmlns:a="http://schemas.openxmlformats.org/drawingml/2006/main" prst="rect">
-            <a:avLst/>
-          </a:prstGeom>
-          <a:noFill xmlns:a="http://schemas.openxmlformats.org/drawingml/2006/main"/>
-          <a:ln xmlns:a="http://schemas.openxmlformats.org/drawingml/2006/main" w="0">
-            <a:noFill/>
-            <a:prstDash val="solid"/>
-          </a:ln>
-        </p:spPr>
-        <p:txBody>
-          <a:bodyPr xmlns:a="http://schemas.openxmlformats.org/drawingml/2006/main" wrap="square" lIns="0" tIns="0" rIns="0" bIns="0" anchor="t">
+          <a:prstGeom prst="rect">
+            <a:avLst/>
+          </a:prstGeom>
+          <a:noFill/>
+          <a:ln w="0">
+            <a:noFill/>
+            <a:prstDash val="solid"/>
+          </a:ln>
+        </p:spPr>
+        <p:txBody>
+          <a:bodyPr wrap="square" lIns="0" tIns="0" rIns="0" bIns="0" anchor="t">
             <a:normAutofit fontScale="96989"/>
           </a:bodyPr>
-          <a:lstStyle xmlns:a="http://schemas.openxmlformats.org/drawingml/2006/main"/>
-          <a:p xmlns:a="http://schemas.openxmlformats.org/drawingml/2006/main">
+          <a:lstStyle/>
+          <a:p>
             <a:pPr algn="l">
               <a:defRPr sz="1725" b="0">
                 <a:solidFill>
@@ -6701,38 +6563,38 @@
       </p:sp>
       <p:sp>
         <p:nvSpPr>
-          <p:cNvPr id="8" name="">
-            <a:extLst xmlns:a="http://schemas.openxmlformats.org/drawingml/2006/main">
+          <p:cNvPr id="8" name="Rectangle 7">
+            <a:extLst>
               <a:ext uri="{FF2B5EF4-FFF2-40B4-BE49-F238E27FC236}">
                 <a16:creationId xmlns:a16="http://schemas.microsoft.com/office/drawing/2014/main" id="{43809A07-CDB7-4F8B-98A3-F3B8A9AF7B67}"/>
               </a:ext>
             </a:extLst>
           </p:cNvPr>
           <p:cNvSpPr>
-            <a:spLocks xmlns:a="http://schemas.openxmlformats.org/drawingml/2006/main" noGrp="1"/>
-          </p:cNvSpPr>
-          <p:nvPr/>
-        </p:nvSpPr>
-        <p:spPr>
-          <a:xfrm xmlns:a="http://schemas.openxmlformats.org/drawingml/2006/main">
+            <a:spLocks noGrp="1"/>
+          </p:cNvSpPr>
+          <p:nvPr/>
+        </p:nvSpPr>
+        <p:spPr>
+          <a:xfrm>
             <a:off x="914400" y="3943350"/>
             <a:ext cx="514350" cy="361950"/>
           </a:xfrm>
-          <a:prstGeom xmlns:a="http://schemas.openxmlformats.org/drawingml/2006/main" prst="rect">
-            <a:avLst/>
-          </a:prstGeom>
-          <a:noFill xmlns:a="http://schemas.openxmlformats.org/drawingml/2006/main"/>
-          <a:ln xmlns:a="http://schemas.openxmlformats.org/drawingml/2006/main" w="0">
-            <a:noFill/>
-            <a:prstDash val="solid"/>
-          </a:ln>
-        </p:spPr>
-        <p:txBody>
-          <a:bodyPr xmlns:a="http://schemas.openxmlformats.org/drawingml/2006/main" wrap="square" lIns="0" tIns="0" rIns="0" bIns="0" anchor="t">
-            <a:normAutofit fontScale="100000"/>
+          <a:prstGeom prst="rect">
+            <a:avLst/>
+          </a:prstGeom>
+          <a:noFill/>
+          <a:ln w="0">
+            <a:noFill/>
+            <a:prstDash val="solid"/>
+          </a:ln>
+        </p:spPr>
+        <p:txBody>
+          <a:bodyPr wrap="square" lIns="0" tIns="0" rIns="0" bIns="0" anchor="t">
+            <a:normAutofit/>
           </a:bodyPr>
-          <a:lstStyle xmlns:a="http://schemas.openxmlformats.org/drawingml/2006/main"/>
-          <a:p xmlns:a="http://schemas.openxmlformats.org/drawingml/2006/main">
+          <a:lstStyle/>
+          <a:p>
             <a:pPr algn="l">
               <a:defRPr sz="1800" b="1">
                 <a:solidFill>
@@ -6759,38 +6621,38 @@
       </p:sp>
       <p:sp>
         <p:nvSpPr>
-          <p:cNvPr id="9" name="">
-            <a:extLst xmlns:a="http://schemas.openxmlformats.org/drawingml/2006/main">
+          <p:cNvPr id="9" name="Rectangle 8">
+            <a:extLst>
               <a:ext uri="{FF2B5EF4-FFF2-40B4-BE49-F238E27FC236}">
                 <a16:creationId xmlns:a16="http://schemas.microsoft.com/office/drawing/2014/main" id="{8B5AEE3D-BC1E-4EB1-8F30-3E387DB5100E}"/>
               </a:ext>
             </a:extLst>
           </p:cNvPr>
           <p:cNvSpPr>
-            <a:spLocks xmlns:a="http://schemas.openxmlformats.org/drawingml/2006/main" noGrp="1"/>
-          </p:cNvSpPr>
-          <p:nvPr/>
-        </p:nvSpPr>
-        <p:spPr>
-          <a:xfrm xmlns:a="http://schemas.openxmlformats.org/drawingml/2006/main">
+            <a:spLocks noGrp="1"/>
+          </p:cNvSpPr>
+          <p:nvPr/>
+        </p:nvSpPr>
+        <p:spPr>
+          <a:xfrm>
             <a:off x="1562100" y="3943350"/>
             <a:ext cx="9763125" cy="476250"/>
           </a:xfrm>
-          <a:prstGeom xmlns:a="http://schemas.openxmlformats.org/drawingml/2006/main" prst="rect">
-            <a:avLst/>
-          </a:prstGeom>
-          <a:noFill xmlns:a="http://schemas.openxmlformats.org/drawingml/2006/main"/>
-          <a:ln xmlns:a="http://schemas.openxmlformats.org/drawingml/2006/main" w="0">
-            <a:noFill/>
-            <a:prstDash val="solid"/>
-          </a:ln>
-        </p:spPr>
-        <p:txBody>
-          <a:bodyPr xmlns:a="http://schemas.openxmlformats.org/drawingml/2006/main" wrap="square" lIns="0" tIns="0" rIns="0" bIns="0" anchor="t">
-            <a:normAutofit fontScale="100000"/>
+          <a:prstGeom prst="rect">
+            <a:avLst/>
+          </a:prstGeom>
+          <a:noFill/>
+          <a:ln w="0">
+            <a:noFill/>
+            <a:prstDash val="solid"/>
+          </a:ln>
+        </p:spPr>
+        <p:txBody>
+          <a:bodyPr wrap="square" lIns="0" tIns="0" rIns="0" bIns="0" anchor="t">
+            <a:normAutofit/>
           </a:bodyPr>
-          <a:lstStyle xmlns:a="http://schemas.openxmlformats.org/drawingml/2006/main"/>
-          <a:p xmlns:a="http://schemas.openxmlformats.org/drawingml/2006/main">
+          <a:lstStyle/>
+          <a:p>
             <a:pPr algn="l">
               <a:defRPr sz="1725" b="0">
                 <a:solidFill>
@@ -6817,38 +6679,38 @@
       </p:sp>
       <p:sp>
         <p:nvSpPr>
-          <p:cNvPr id="10" name="">
-            <a:extLst xmlns:a="http://schemas.openxmlformats.org/drawingml/2006/main">
+          <p:cNvPr id="10" name="Rectangle 9">
+            <a:extLst>
               <a:ext uri="{FF2B5EF4-FFF2-40B4-BE49-F238E27FC236}">
                 <a16:creationId xmlns:a16="http://schemas.microsoft.com/office/drawing/2014/main" id="{A15739D3-31E0-4677-BAF5-956AEF4C8E98}"/>
               </a:ext>
             </a:extLst>
           </p:cNvPr>
           <p:cNvSpPr>
-            <a:spLocks xmlns:a="http://schemas.openxmlformats.org/drawingml/2006/main" noGrp="1"/>
-          </p:cNvSpPr>
-          <p:nvPr/>
-        </p:nvSpPr>
-        <p:spPr>
-          <a:xfrm xmlns:a="http://schemas.openxmlformats.org/drawingml/2006/main">
+            <a:spLocks noGrp="1"/>
+          </p:cNvSpPr>
+          <p:nvPr/>
+        </p:nvSpPr>
+        <p:spPr>
+          <a:xfrm>
             <a:off x="914400" y="4648200"/>
             <a:ext cx="514350" cy="361950"/>
           </a:xfrm>
-          <a:prstGeom xmlns:a="http://schemas.openxmlformats.org/drawingml/2006/main" prst="rect">
-            <a:avLst/>
-          </a:prstGeom>
-          <a:noFill xmlns:a="http://schemas.openxmlformats.org/drawingml/2006/main"/>
-          <a:ln xmlns:a="http://schemas.openxmlformats.org/drawingml/2006/main" w="0">
-            <a:noFill/>
-            <a:prstDash val="solid"/>
-          </a:ln>
-        </p:spPr>
-        <p:txBody>
-          <a:bodyPr xmlns:a="http://schemas.openxmlformats.org/drawingml/2006/main" wrap="square" lIns="0" tIns="0" rIns="0" bIns="0" anchor="t">
-            <a:normAutofit fontScale="100000"/>
+          <a:prstGeom prst="rect">
+            <a:avLst/>
+          </a:prstGeom>
+          <a:noFill/>
+          <a:ln w="0">
+            <a:noFill/>
+            <a:prstDash val="solid"/>
+          </a:ln>
+        </p:spPr>
+        <p:txBody>
+          <a:bodyPr wrap="square" lIns="0" tIns="0" rIns="0" bIns="0" anchor="t">
+            <a:normAutofit/>
           </a:bodyPr>
-          <a:lstStyle xmlns:a="http://schemas.openxmlformats.org/drawingml/2006/main"/>
-          <a:p xmlns:a="http://schemas.openxmlformats.org/drawingml/2006/main">
+          <a:lstStyle/>
+          <a:p>
             <a:pPr algn="l">
               <a:defRPr sz="1800" b="1">
                 <a:solidFill>
@@ -6875,38 +6737,38 @@
       </p:sp>
       <p:sp>
         <p:nvSpPr>
-          <p:cNvPr id="11" name="">
-            <a:extLst xmlns:a="http://schemas.openxmlformats.org/drawingml/2006/main">
+          <p:cNvPr id="11" name="Rectangle 10">
+            <a:extLst>
               <a:ext uri="{FF2B5EF4-FFF2-40B4-BE49-F238E27FC236}">
                 <a16:creationId xmlns:a16="http://schemas.microsoft.com/office/drawing/2014/main" id="{9D063ABC-0747-41F4-A137-DF3FD112E7BC}"/>
               </a:ext>
             </a:extLst>
           </p:cNvPr>
           <p:cNvSpPr>
-            <a:spLocks xmlns:a="http://schemas.openxmlformats.org/drawingml/2006/main" noGrp="1"/>
-          </p:cNvSpPr>
-          <p:nvPr/>
-        </p:nvSpPr>
-        <p:spPr>
-          <a:xfrm xmlns:a="http://schemas.openxmlformats.org/drawingml/2006/main">
+            <a:spLocks noGrp="1"/>
+          </p:cNvSpPr>
+          <p:nvPr/>
+        </p:nvSpPr>
+        <p:spPr>
+          <a:xfrm>
             <a:off x="1562100" y="4648200"/>
             <a:ext cx="9763125" cy="476250"/>
           </a:xfrm>
-          <a:prstGeom xmlns:a="http://schemas.openxmlformats.org/drawingml/2006/main" prst="rect">
-            <a:avLst/>
-          </a:prstGeom>
-          <a:noFill xmlns:a="http://schemas.openxmlformats.org/drawingml/2006/main"/>
-          <a:ln xmlns:a="http://schemas.openxmlformats.org/drawingml/2006/main" w="0">
-            <a:noFill/>
-            <a:prstDash val="solid"/>
-          </a:ln>
-        </p:spPr>
-        <p:txBody>
-          <a:bodyPr xmlns:a="http://schemas.openxmlformats.org/drawingml/2006/main" wrap="square" lIns="0" tIns="0" rIns="0" bIns="0" anchor="t">
-            <a:normAutofit fontScale="100000"/>
+          <a:prstGeom prst="rect">
+            <a:avLst/>
+          </a:prstGeom>
+          <a:noFill/>
+          <a:ln w="0">
+            <a:noFill/>
+            <a:prstDash val="solid"/>
+          </a:ln>
+        </p:spPr>
+        <p:txBody>
+          <a:bodyPr wrap="square" lIns="0" tIns="0" rIns="0" bIns="0" anchor="t">
+            <a:normAutofit/>
           </a:bodyPr>
-          <a:lstStyle xmlns:a="http://schemas.openxmlformats.org/drawingml/2006/main"/>
-          <a:p xmlns:a="http://schemas.openxmlformats.org/drawingml/2006/main">
+          <a:lstStyle/>
+          <a:p>
             <a:pPr algn="l">
               <a:defRPr sz="1725" b="0">
                 <a:solidFill>
@@ -6933,38 +6795,38 @@
       </p:sp>
       <p:sp>
         <p:nvSpPr>
-          <p:cNvPr id="12" name="">
-            <a:extLst xmlns:a="http://schemas.openxmlformats.org/drawingml/2006/main">
+          <p:cNvPr id="12" name="Rectangle 11">
+            <a:extLst>
               <a:ext uri="{FF2B5EF4-FFF2-40B4-BE49-F238E27FC236}">
                 <a16:creationId xmlns:a16="http://schemas.microsoft.com/office/drawing/2014/main" id="{A6C51541-B1FA-42C9-8316-179E80F4DAED}"/>
               </a:ext>
             </a:extLst>
           </p:cNvPr>
           <p:cNvSpPr>
-            <a:spLocks xmlns:a="http://schemas.openxmlformats.org/drawingml/2006/main" noGrp="1"/>
-          </p:cNvSpPr>
-          <p:nvPr/>
-        </p:nvSpPr>
-        <p:spPr>
-          <a:xfrm xmlns:a="http://schemas.openxmlformats.org/drawingml/2006/main">
+            <a:spLocks noGrp="1"/>
+          </p:cNvSpPr>
+          <p:nvPr/>
+        </p:nvSpPr>
+        <p:spPr>
+          <a:xfrm>
             <a:off x="914400" y="5353050"/>
             <a:ext cx="514350" cy="361950"/>
           </a:xfrm>
-          <a:prstGeom xmlns:a="http://schemas.openxmlformats.org/drawingml/2006/main" prst="rect">
-            <a:avLst/>
-          </a:prstGeom>
-          <a:noFill xmlns:a="http://schemas.openxmlformats.org/drawingml/2006/main"/>
-          <a:ln xmlns:a="http://schemas.openxmlformats.org/drawingml/2006/main" w="0">
-            <a:noFill/>
-            <a:prstDash val="solid"/>
-          </a:ln>
-        </p:spPr>
-        <p:txBody>
-          <a:bodyPr xmlns:a="http://schemas.openxmlformats.org/drawingml/2006/main" wrap="square" lIns="0" tIns="0" rIns="0" bIns="0" anchor="t">
-            <a:normAutofit fontScale="100000"/>
+          <a:prstGeom prst="rect">
+            <a:avLst/>
+          </a:prstGeom>
+          <a:noFill/>
+          <a:ln w="0">
+            <a:noFill/>
+            <a:prstDash val="solid"/>
+          </a:ln>
+        </p:spPr>
+        <p:txBody>
+          <a:bodyPr wrap="square" lIns="0" tIns="0" rIns="0" bIns="0" anchor="t">
+            <a:normAutofit/>
           </a:bodyPr>
-          <a:lstStyle xmlns:a="http://schemas.openxmlformats.org/drawingml/2006/main"/>
-          <a:p xmlns:a="http://schemas.openxmlformats.org/drawingml/2006/main">
+          <a:lstStyle/>
+          <a:p>
             <a:pPr algn="l">
               <a:defRPr sz="1800" b="1">
                 <a:solidFill>
@@ -6991,38 +6853,38 @@
       </p:sp>
       <p:sp>
         <p:nvSpPr>
-          <p:cNvPr id="13" name="">
-            <a:extLst xmlns:a="http://schemas.openxmlformats.org/drawingml/2006/main">
+          <p:cNvPr id="13" name="Rectangle 12">
+            <a:extLst>
               <a:ext uri="{FF2B5EF4-FFF2-40B4-BE49-F238E27FC236}">
                 <a16:creationId xmlns:a16="http://schemas.microsoft.com/office/drawing/2014/main" id="{F7AD9970-8451-4ED7-A9FD-AFE79E145514}"/>
               </a:ext>
             </a:extLst>
           </p:cNvPr>
           <p:cNvSpPr>
-            <a:spLocks xmlns:a="http://schemas.openxmlformats.org/drawingml/2006/main" noGrp="1"/>
-          </p:cNvSpPr>
-          <p:nvPr/>
-        </p:nvSpPr>
-        <p:spPr>
-          <a:xfrm xmlns:a="http://schemas.openxmlformats.org/drawingml/2006/main">
+            <a:spLocks noGrp="1"/>
+          </p:cNvSpPr>
+          <p:nvPr/>
+        </p:nvSpPr>
+        <p:spPr>
+          <a:xfrm>
             <a:off x="1562100" y="5353050"/>
             <a:ext cx="9763125" cy="476250"/>
           </a:xfrm>
-          <a:prstGeom xmlns:a="http://schemas.openxmlformats.org/drawingml/2006/main" prst="rect">
-            <a:avLst/>
-          </a:prstGeom>
-          <a:noFill xmlns:a="http://schemas.openxmlformats.org/drawingml/2006/main"/>
-          <a:ln xmlns:a="http://schemas.openxmlformats.org/drawingml/2006/main" w="0">
-            <a:noFill/>
-            <a:prstDash val="solid"/>
-          </a:ln>
-        </p:spPr>
-        <p:txBody>
-          <a:bodyPr xmlns:a="http://schemas.openxmlformats.org/drawingml/2006/main" wrap="square" lIns="0" tIns="0" rIns="0" bIns="0" anchor="t">
-            <a:normAutofit fontScale="100000"/>
+          <a:prstGeom prst="rect">
+            <a:avLst/>
+          </a:prstGeom>
+          <a:noFill/>
+          <a:ln w="0">
+            <a:noFill/>
+            <a:prstDash val="solid"/>
+          </a:ln>
+        </p:spPr>
+        <p:txBody>
+          <a:bodyPr wrap="square" lIns="0" tIns="0" rIns="0" bIns="0" anchor="t">
+            <a:normAutofit/>
           </a:bodyPr>
-          <a:lstStyle xmlns:a="http://schemas.openxmlformats.org/drawingml/2006/main"/>
-          <a:p xmlns:a="http://schemas.openxmlformats.org/drawingml/2006/main">
+          <a:lstStyle/>
+          <a:p>
             <a:pPr algn="l">
               <a:defRPr sz="1725" b="0">
                 <a:solidFill>
@@ -7054,17 +6916,21 @@
       </p:ext>
     </p:extLst>
   </p:cSld>
+  <p:clrMapOvr>
+    <a:masterClrMapping/>
+  </p:clrMapOvr>
 </p:sld>
 </file>
 
 <file path=ppt/slides/slide8.xml><?xml version="1.0" encoding="utf-8"?>
-<p:sld xmlns:p="http://schemas.openxmlformats.org/presentationml/2006/main">
+<p:sld xmlns:a="http://schemas.openxmlformats.org/drawingml/2006/main" xmlns:r="http://schemas.openxmlformats.org/officeDocument/2006/relationships" xmlns:p="http://schemas.openxmlformats.org/presentationml/2006/main">
   <p:cSld>
     <p:bg>
       <p:bgPr>
-        <a:solidFill xmlns:a="http://schemas.openxmlformats.org/drawingml/2006/main">
+        <a:solidFill>
           <a:srgbClr val="163B32"/>
         </a:solidFill>
+        <a:effectLst/>
       </p:bgPr>
     </p:bg>
     <p:spTree>
@@ -7074,42 +6940,47 @@
         <p:nvPr/>
       </p:nvGrpSpPr>
       <p:grpSpPr>
-        <a:xfrm xmlns:a="http://schemas.openxmlformats.org/drawingml/2006/main"/>
+        <a:xfrm>
+          <a:off x="0" y="0"/>
+          <a:ext cx="0" cy="0"/>
+          <a:chOff x="0" y="0"/>
+          <a:chExt cx="0" cy="0"/>
+        </a:xfrm>
       </p:grpSpPr>
       <p:sp>
         <p:nvSpPr>
-          <p:cNvPr id="9" name="">
-            <a:extLst xmlns:a="http://schemas.openxmlformats.org/drawingml/2006/main">
+          <p:cNvPr id="9" name="Rectangle 8">
+            <a:extLst>
               <a:ext uri="{FF2B5EF4-FFF2-40B4-BE49-F238E27FC236}">
                 <a16:creationId xmlns:a16="http://schemas.microsoft.com/office/drawing/2014/main" id="{07E3F294-B86C-4782-963F-91FA603D4D89}"/>
               </a:ext>
             </a:extLst>
           </p:cNvPr>
           <p:cNvSpPr>
-            <a:spLocks xmlns:a="http://schemas.openxmlformats.org/drawingml/2006/main" noGrp="1"/>
-          </p:cNvSpPr>
-          <p:nvPr/>
-        </p:nvSpPr>
-        <p:spPr>
-          <a:xfrm xmlns:a="http://schemas.openxmlformats.org/drawingml/2006/main">
+            <a:spLocks noGrp="1"/>
+          </p:cNvSpPr>
+          <p:nvPr/>
+        </p:nvSpPr>
+        <p:spPr>
+          <a:xfrm>
             <a:off x="685800" y="552450"/>
             <a:ext cx="10820400" cy="609600"/>
           </a:xfrm>
-          <a:prstGeom xmlns:a="http://schemas.openxmlformats.org/drawingml/2006/main" prst="rect">
-            <a:avLst/>
-          </a:prstGeom>
-          <a:noFill xmlns:a="http://schemas.openxmlformats.org/drawingml/2006/main"/>
-          <a:ln xmlns:a="http://schemas.openxmlformats.org/drawingml/2006/main" w="0">
-            <a:noFill/>
-            <a:prstDash val="solid"/>
-          </a:ln>
-        </p:spPr>
-        <p:txBody>
-          <a:bodyPr xmlns:a="http://schemas.openxmlformats.org/drawingml/2006/main" wrap="square" lIns="0" tIns="0" rIns="0" bIns="0" anchor="t">
-            <a:normAutofit fontScale="100000"/>
+          <a:prstGeom prst="rect">
+            <a:avLst/>
+          </a:prstGeom>
+          <a:noFill/>
+          <a:ln w="0">
+            <a:noFill/>
+            <a:prstDash val="solid"/>
+          </a:ln>
+        </p:spPr>
+        <p:txBody>
+          <a:bodyPr wrap="square" lIns="0" tIns="0" rIns="0" bIns="0" anchor="t">
+            <a:normAutofit/>
           </a:bodyPr>
-          <a:lstStyle xmlns:a="http://schemas.openxmlformats.org/drawingml/2006/main"/>
-          <a:p xmlns:a="http://schemas.openxmlformats.org/drawingml/2006/main">
+          <a:lstStyle/>
+          <a:p>
             <a:pPr algn="l">
               <a:defRPr sz="3300" b="1">
                 <a:solidFill>
@@ -7136,69 +7007,69 @@
       </p:sp>
       <p:sp>
         <p:nvSpPr>
-          <p:cNvPr id="2" name="">
-            <a:extLst xmlns:a="http://schemas.openxmlformats.org/drawingml/2006/main">
+          <p:cNvPr id="2" name="Rectangle 1">
+            <a:extLst>
               <a:ext uri="{FF2B5EF4-FFF2-40B4-BE49-F238E27FC236}">
                 <a16:creationId xmlns:a16="http://schemas.microsoft.com/office/drawing/2014/main" id="{075B217C-E345-4BC2-9DC3-59A2E7E8DBC9}"/>
               </a:ext>
             </a:extLst>
           </p:cNvPr>
           <p:cNvSpPr>
-            <a:spLocks xmlns:a="http://schemas.openxmlformats.org/drawingml/2006/main" noGrp="1"/>
-          </p:cNvSpPr>
-          <p:nvPr/>
-        </p:nvSpPr>
-        <p:spPr>
-          <a:xfrm xmlns:a="http://schemas.openxmlformats.org/drawingml/2006/main">
+            <a:spLocks noGrp="1"/>
+          </p:cNvSpPr>
+          <p:nvPr/>
+        </p:nvSpPr>
+        <p:spPr>
+          <a:xfrm>
             <a:off x="685800" y="1257300"/>
             <a:ext cx="800100" cy="38100"/>
           </a:xfrm>
-          <a:prstGeom xmlns:a="http://schemas.openxmlformats.org/drawingml/2006/main" prst="rect">
-            <a:avLst/>
-          </a:prstGeom>
-          <a:solidFill xmlns:a="http://schemas.openxmlformats.org/drawingml/2006/main">
+          <a:prstGeom prst="rect">
+            <a:avLst/>
+          </a:prstGeom>
+          <a:solidFill>
             <a:srgbClr val="D8B86A"/>
           </a:solidFill>
-          <a:ln xmlns:a="http://schemas.openxmlformats.org/drawingml/2006/main" w="0">
-            <a:noFill/>
-            <a:prstDash val="solid"/>
-          </a:ln>
-        </p:spPr>
-      </p:sp>
-      <p:sp>
-        <p:nvSpPr>
-          <p:cNvPr id="3" name="">
-            <a:extLst xmlns:a="http://schemas.openxmlformats.org/drawingml/2006/main">
+          <a:ln w="0">
+            <a:noFill/>
+            <a:prstDash val="solid"/>
+          </a:ln>
+        </p:spPr>
+      </p:sp>
+      <p:sp>
+        <p:nvSpPr>
+          <p:cNvPr id="3" name="Rectangle 2">
+            <a:extLst>
               <a:ext uri="{FF2B5EF4-FFF2-40B4-BE49-F238E27FC236}">
                 <a16:creationId xmlns:a16="http://schemas.microsoft.com/office/drawing/2014/main" id="{69105104-D2FB-41B2-9322-90A2BB1F26ED}"/>
               </a:ext>
             </a:extLst>
           </p:cNvPr>
           <p:cNvSpPr>
-            <a:spLocks xmlns:a="http://schemas.openxmlformats.org/drawingml/2006/main" noGrp="1"/>
-          </p:cNvSpPr>
-          <p:nvPr/>
-        </p:nvSpPr>
-        <p:spPr>
-          <a:xfrm xmlns:a="http://schemas.openxmlformats.org/drawingml/2006/main">
+            <a:spLocks noGrp="1"/>
+          </p:cNvSpPr>
+          <p:nvPr/>
+        </p:nvSpPr>
+        <p:spPr>
+          <a:xfrm>
             <a:off x="838200" y="1828800"/>
             <a:ext cx="4286250" cy="400050"/>
           </a:xfrm>
-          <a:prstGeom xmlns:a="http://schemas.openxmlformats.org/drawingml/2006/main" prst="rect">
-            <a:avLst/>
-          </a:prstGeom>
-          <a:noFill xmlns:a="http://schemas.openxmlformats.org/drawingml/2006/main"/>
-          <a:ln xmlns:a="http://schemas.openxmlformats.org/drawingml/2006/main" w="0">
-            <a:noFill/>
-            <a:prstDash val="solid"/>
-          </a:ln>
-        </p:spPr>
-        <p:txBody>
-          <a:bodyPr xmlns:a="http://schemas.openxmlformats.org/drawingml/2006/main" wrap="square" lIns="0" tIns="0" rIns="0" bIns="0" anchor="t">
-            <a:normAutofit fontScale="100000"/>
+          <a:prstGeom prst="rect">
+            <a:avLst/>
+          </a:prstGeom>
+          <a:noFill/>
+          <a:ln w="0">
+            <a:noFill/>
+            <a:prstDash val="solid"/>
+          </a:ln>
+        </p:spPr>
+        <p:txBody>
+          <a:bodyPr wrap="square" lIns="0" tIns="0" rIns="0" bIns="0" anchor="t">
+            <a:normAutofit/>
           </a:bodyPr>
-          <a:lstStyle xmlns:a="http://schemas.openxmlformats.org/drawingml/2006/main"/>
-          <a:p xmlns:a="http://schemas.openxmlformats.org/drawingml/2006/main">
+          <a:lstStyle/>
+          <a:p>
             <a:pPr algn="l">
               <a:defRPr sz="2175" b="1">
                 <a:solidFill>
@@ -7225,38 +7096,38 @@
       </p:sp>
       <p:sp>
         <p:nvSpPr>
-          <p:cNvPr id="4" name="">
-            <a:extLst xmlns:a="http://schemas.openxmlformats.org/drawingml/2006/main">
+          <p:cNvPr id="4" name="Rectangle 3">
+            <a:extLst>
               <a:ext uri="{FF2B5EF4-FFF2-40B4-BE49-F238E27FC236}">
                 <a16:creationId xmlns:a16="http://schemas.microsoft.com/office/drawing/2014/main" id="{34B5615A-6584-4027-AE70-A865CB9FD971}"/>
               </a:ext>
             </a:extLst>
           </p:cNvPr>
           <p:cNvSpPr>
-            <a:spLocks xmlns:a="http://schemas.openxmlformats.org/drawingml/2006/main" noGrp="1"/>
-          </p:cNvSpPr>
-          <p:nvPr/>
-        </p:nvSpPr>
-        <p:spPr>
-          <a:xfrm xmlns:a="http://schemas.openxmlformats.org/drawingml/2006/main">
+            <a:spLocks noGrp="1"/>
+          </p:cNvSpPr>
+          <p:nvPr/>
+        </p:nvSpPr>
+        <p:spPr>
+          <a:xfrm>
             <a:off x="838200" y="2381250"/>
             <a:ext cx="4667250" cy="2952750"/>
           </a:xfrm>
-          <a:prstGeom xmlns:a="http://schemas.openxmlformats.org/drawingml/2006/main" prst="rect">
-            <a:avLst/>
-          </a:prstGeom>
-          <a:noFill xmlns:a="http://schemas.openxmlformats.org/drawingml/2006/main"/>
-          <a:ln xmlns:a="http://schemas.openxmlformats.org/drawingml/2006/main" w="0">
-            <a:noFill/>
-            <a:prstDash val="solid"/>
-          </a:ln>
-        </p:spPr>
-        <p:txBody>
-          <a:bodyPr xmlns:a="http://schemas.openxmlformats.org/drawingml/2006/main" wrap="square" lIns="0" tIns="0" rIns="0" bIns="0" anchor="t">
-            <a:normAutofit fontScale="100000"/>
+          <a:prstGeom prst="rect">
+            <a:avLst/>
+          </a:prstGeom>
+          <a:noFill/>
+          <a:ln w="0">
+            <a:noFill/>
+            <a:prstDash val="solid"/>
+          </a:ln>
+        </p:spPr>
+        <p:txBody>
+          <a:bodyPr wrap="square" lIns="0" tIns="0" rIns="0" bIns="0" anchor="t">
+            <a:normAutofit/>
           </a:bodyPr>
-          <a:lstStyle xmlns:a="http://schemas.openxmlformats.org/drawingml/2006/main"/>
-          <a:p xmlns:a="http://schemas.openxmlformats.org/drawingml/2006/main">
+          <a:lstStyle/>
+          <a:p>
             <a:pPr algn="l">
               <a:defRPr sz="1800" b="0">
                 <a:solidFill>
@@ -7279,12 +7150,17 @@
               <a:t>The program creates and shuffles a 52-card deck.</a:t>
             </a:r>
           </a:p>
-          <a:p xmlns:a="http://schemas.openxmlformats.org/drawingml/2006/main">
-            <a:r>
-              <a:t/>
-            </a:r>
-          </a:p>
-          <a:p xmlns:a="http://schemas.openxmlformats.org/drawingml/2006/main">
+          <a:p>
+            <a:endParaRPr sz="1800" b="0">
+              <a:solidFill>
+                <a:srgbClr val="FFFDF8"/>
+              </a:solidFill>
+              <a:latin typeface="Microsoft YaHei"/>
+              <a:ea typeface="Microsoft YaHei"/>
+              <a:cs typeface="Microsoft YaHei"/>
+            </a:endParaRPr>
+          </a:p>
+          <a:p>
             <a:pPr algn="l">
               <a:defRPr sz="1800" b="0">
                 <a:solidFill>
@@ -7307,12 +7183,17 @@
               <a:t>It deals two private cards to each player and displays them.</a:t>
             </a:r>
           </a:p>
-          <a:p xmlns:a="http://schemas.openxmlformats.org/drawingml/2006/main">
-            <a:r>
-              <a:t/>
-            </a:r>
-          </a:p>
-          <a:p xmlns:a="http://schemas.openxmlformats.org/drawingml/2006/main">
+          <a:p>
+            <a:endParaRPr sz="1800" b="0">
+              <a:solidFill>
+                <a:srgbClr val="FFFDF8"/>
+              </a:solidFill>
+              <a:latin typeface="Microsoft YaHei"/>
+              <a:ea typeface="Microsoft YaHei"/>
+              <a:cs typeface="Microsoft YaHei"/>
+            </a:endParaRPr>
+          </a:p>
+          <a:p>
             <a:pPr algn="l">
               <a:defRPr sz="1800" b="0">
                 <a:solidFill>
@@ -7339,69 +7220,69 @@
       </p:sp>
       <p:sp>
         <p:nvSpPr>
-          <p:cNvPr id="5" name="">
-            <a:extLst xmlns:a="http://schemas.openxmlformats.org/drawingml/2006/main">
+          <p:cNvPr id="5" name="Rectangle 4">
+            <a:extLst>
               <a:ext uri="{FF2B5EF4-FFF2-40B4-BE49-F238E27FC236}">
                 <a16:creationId xmlns:a16="http://schemas.microsoft.com/office/drawing/2014/main" id="{B060EAA2-8A73-44F2-AAA1-227631D5A14E}"/>
               </a:ext>
             </a:extLst>
           </p:cNvPr>
           <p:cNvSpPr>
-            <a:spLocks xmlns:a="http://schemas.openxmlformats.org/drawingml/2006/main" noGrp="1"/>
-          </p:cNvSpPr>
-          <p:nvPr/>
-        </p:nvSpPr>
-        <p:spPr>
-          <a:xfrm xmlns:a="http://schemas.openxmlformats.org/drawingml/2006/main">
+            <a:spLocks noGrp="1"/>
+          </p:cNvSpPr>
+          <p:nvPr/>
+        </p:nvSpPr>
+        <p:spPr>
+          <a:xfrm>
             <a:off x="6000750" y="1828800"/>
             <a:ext cx="19050" cy="3524250"/>
           </a:xfrm>
-          <a:prstGeom xmlns:a="http://schemas.openxmlformats.org/drawingml/2006/main" prst="rect">
-            <a:avLst/>
-          </a:prstGeom>
-          <a:solidFill xmlns:a="http://schemas.openxmlformats.org/drawingml/2006/main">
+          <a:prstGeom prst="rect">
+            <a:avLst/>
+          </a:prstGeom>
+          <a:solidFill>
             <a:srgbClr val="56766B"/>
           </a:solidFill>
-          <a:ln xmlns:a="http://schemas.openxmlformats.org/drawingml/2006/main" w="0">
-            <a:noFill/>
-            <a:prstDash val="solid"/>
-          </a:ln>
-        </p:spPr>
-      </p:sp>
-      <p:sp>
-        <p:nvSpPr>
-          <p:cNvPr id="6" name="">
-            <a:extLst xmlns:a="http://schemas.openxmlformats.org/drawingml/2006/main">
+          <a:ln w="0">
+            <a:noFill/>
+            <a:prstDash val="solid"/>
+          </a:ln>
+        </p:spPr>
+      </p:sp>
+      <p:sp>
+        <p:nvSpPr>
+          <p:cNvPr id="6" name="Rectangle 5">
+            <a:extLst>
               <a:ext uri="{FF2B5EF4-FFF2-40B4-BE49-F238E27FC236}">
                 <a16:creationId xmlns:a16="http://schemas.microsoft.com/office/drawing/2014/main" id="{AFB517C2-F6CC-4B08-A1B2-E732DF29F95A}"/>
               </a:ext>
             </a:extLst>
           </p:cNvPr>
           <p:cNvSpPr>
-            <a:spLocks xmlns:a="http://schemas.openxmlformats.org/drawingml/2006/main" noGrp="1"/>
-          </p:cNvSpPr>
-          <p:nvPr/>
-        </p:nvSpPr>
-        <p:spPr>
-          <a:xfrm xmlns:a="http://schemas.openxmlformats.org/drawingml/2006/main">
+            <a:spLocks noGrp="1"/>
+          </p:cNvSpPr>
+          <p:nvPr/>
+        </p:nvSpPr>
+        <p:spPr>
+          <a:xfrm>
             <a:off x="6515100" y="1828800"/>
             <a:ext cx="4381500" cy="400050"/>
           </a:xfrm>
-          <a:prstGeom xmlns:a="http://schemas.openxmlformats.org/drawingml/2006/main" prst="rect">
-            <a:avLst/>
-          </a:prstGeom>
-          <a:noFill xmlns:a="http://schemas.openxmlformats.org/drawingml/2006/main"/>
-          <a:ln xmlns:a="http://schemas.openxmlformats.org/drawingml/2006/main" w="0">
-            <a:noFill/>
-            <a:prstDash val="solid"/>
-          </a:ln>
-        </p:spPr>
-        <p:txBody>
-          <a:bodyPr xmlns:a="http://schemas.openxmlformats.org/drawingml/2006/main" wrap="square" lIns="0" tIns="0" rIns="0" bIns="0" anchor="t">
-            <a:normAutofit fontScale="100000"/>
+          <a:prstGeom prst="rect">
+            <a:avLst/>
+          </a:prstGeom>
+          <a:noFill/>
+          <a:ln w="0">
+            <a:noFill/>
+            <a:prstDash val="solid"/>
+          </a:ln>
+        </p:spPr>
+        <p:txBody>
+          <a:bodyPr wrap="square" lIns="0" tIns="0" rIns="0" bIns="0" anchor="t">
+            <a:normAutofit/>
           </a:bodyPr>
-          <a:lstStyle xmlns:a="http://schemas.openxmlformats.org/drawingml/2006/main"/>
-          <a:p xmlns:a="http://schemas.openxmlformats.org/drawingml/2006/main">
+          <a:lstStyle/>
+          <a:p>
             <a:pPr algn="l">
               <a:defRPr sz="2175" b="1">
                 <a:solidFill>
@@ -7428,38 +7309,38 @@
       </p:sp>
       <p:sp>
         <p:nvSpPr>
-          <p:cNvPr id="7" name="">
-            <a:extLst xmlns:a="http://schemas.openxmlformats.org/drawingml/2006/main">
+          <p:cNvPr id="7" name="Rectangle 6">
+            <a:extLst>
               <a:ext uri="{FF2B5EF4-FFF2-40B4-BE49-F238E27FC236}">
                 <a16:creationId xmlns:a16="http://schemas.microsoft.com/office/drawing/2014/main" id="{45C69D2B-267A-4559-BB20-2BE4AACEBC73}"/>
               </a:ext>
             </a:extLst>
           </p:cNvPr>
           <p:cNvSpPr>
-            <a:spLocks xmlns:a="http://schemas.openxmlformats.org/drawingml/2006/main" noGrp="1"/>
-          </p:cNvSpPr>
-          <p:nvPr/>
-        </p:nvSpPr>
-        <p:spPr>
-          <a:xfrm xmlns:a="http://schemas.openxmlformats.org/drawingml/2006/main">
+            <a:spLocks noGrp="1"/>
+          </p:cNvSpPr>
+          <p:nvPr/>
+        </p:nvSpPr>
+        <p:spPr>
+          <a:xfrm>
             <a:off x="6515100" y="2381250"/>
             <a:ext cx="4762500" cy="2952750"/>
           </a:xfrm>
-          <a:prstGeom xmlns:a="http://schemas.openxmlformats.org/drawingml/2006/main" prst="rect">
-            <a:avLst/>
-          </a:prstGeom>
-          <a:noFill xmlns:a="http://schemas.openxmlformats.org/drawingml/2006/main"/>
-          <a:ln xmlns:a="http://schemas.openxmlformats.org/drawingml/2006/main" w="0">
-            <a:noFill/>
-            <a:prstDash val="solid"/>
-          </a:ln>
-        </p:spPr>
-        <p:txBody>
-          <a:bodyPr xmlns:a="http://schemas.openxmlformats.org/drawingml/2006/main" wrap="square" lIns="0" tIns="0" rIns="0" bIns="0" anchor="t">
-            <a:normAutofit fontScale="100000"/>
+          <a:prstGeom prst="rect">
+            <a:avLst/>
+          </a:prstGeom>
+          <a:noFill/>
+          <a:ln w="0">
+            <a:noFill/>
+            <a:prstDash val="solid"/>
+          </a:ln>
+        </p:spPr>
+        <p:txBody>
+          <a:bodyPr wrap="square" lIns="0" tIns="0" rIns="0" bIns="0" anchor="t">
+            <a:normAutofit/>
           </a:bodyPr>
-          <a:lstStyle xmlns:a="http://schemas.openxmlformats.org/drawingml/2006/main"/>
-          <a:p xmlns:a="http://schemas.openxmlformats.org/drawingml/2006/main">
+          <a:lstStyle/>
+          <a:p>
             <a:pPr algn="l">
               <a:defRPr sz="1800" b="0">
                 <a:solidFill>
@@ -7482,12 +7363,17 @@
               <a:t>Add chips and blinds, then implement betting actions.</a:t>
             </a:r>
           </a:p>
-          <a:p xmlns:a="http://schemas.openxmlformats.org/drawingml/2006/main">
-            <a:r>
-              <a:t/>
-            </a:r>
-          </a:p>
-          <a:p xmlns:a="http://schemas.openxmlformats.org/drawingml/2006/main">
+          <a:p>
+            <a:endParaRPr sz="1800" b="0">
+              <a:solidFill>
+                <a:srgbClr val="FFFDF8"/>
+              </a:solidFill>
+              <a:latin typeface="Microsoft YaHei"/>
+              <a:ea typeface="Microsoft YaHei"/>
+              <a:cs typeface="Microsoft YaHei"/>
+            </a:endParaRPr>
+          </a:p>
+          <a:p>
             <a:pPr algn="l">
               <a:defRPr sz="1800" b="0">
                 <a:solidFill>
@@ -7510,12 +7396,17 @@
               <a:t>Deal the Flop, Turn, and River; evaluate hands and settle the pot.</a:t>
             </a:r>
           </a:p>
-          <a:p xmlns:a="http://schemas.openxmlformats.org/drawingml/2006/main">
-            <a:r>
-              <a:t/>
-            </a:r>
-          </a:p>
-          <a:p xmlns:a="http://schemas.openxmlformats.org/drawingml/2006/main">
+          <a:p>
+            <a:endParaRPr sz="1800" b="0">
+              <a:solidFill>
+                <a:srgbClr val="FFFDF8"/>
+              </a:solidFill>
+              <a:latin typeface="Microsoft YaHei"/>
+              <a:ea typeface="Microsoft YaHei"/>
+              <a:cs typeface="Microsoft YaHei"/>
+            </a:endParaRPr>
+          </a:p>
+          <a:p>
             <a:pPr algn="l">
               <a:defRPr sz="1800" b="0">
                 <a:solidFill>
@@ -7542,38 +7433,38 @@
       </p:sp>
       <p:sp>
         <p:nvSpPr>
-          <p:cNvPr id="8" name="">
-            <a:extLst xmlns:a="http://schemas.openxmlformats.org/drawingml/2006/main">
+          <p:cNvPr id="8" name="Rectangle 7">
+            <a:extLst>
               <a:ext uri="{FF2B5EF4-FFF2-40B4-BE49-F238E27FC236}">
                 <a16:creationId xmlns:a16="http://schemas.microsoft.com/office/drawing/2014/main" id="{CD3DC899-4F0B-4712-BFD3-77738880BE3F}"/>
               </a:ext>
             </a:extLst>
           </p:cNvPr>
           <p:cNvSpPr>
-            <a:spLocks xmlns:a="http://schemas.openxmlformats.org/drawingml/2006/main" noGrp="1"/>
-          </p:cNvSpPr>
-          <p:nvPr/>
-        </p:nvSpPr>
-        <p:spPr>
-          <a:xfrm xmlns:a="http://schemas.openxmlformats.org/drawingml/2006/main">
+            <a:spLocks noGrp="1"/>
+          </p:cNvSpPr>
+          <p:nvPr/>
+        </p:nvSpPr>
+        <p:spPr>
+          <a:xfrm>
             <a:off x="838200" y="5886450"/>
             <a:ext cx="10382250" cy="361950"/>
           </a:xfrm>
-          <a:prstGeom xmlns:a="http://schemas.openxmlformats.org/drawingml/2006/main" prst="rect">
-            <a:avLst/>
-          </a:prstGeom>
-          <a:noFill xmlns:a="http://schemas.openxmlformats.org/drawingml/2006/main"/>
-          <a:ln xmlns:a="http://schemas.openxmlformats.org/drawingml/2006/main" w="0">
-            <a:noFill/>
-            <a:prstDash val="solid"/>
-          </a:ln>
-        </p:spPr>
-        <p:txBody>
-          <a:bodyPr xmlns:a="http://schemas.openxmlformats.org/drawingml/2006/main" wrap="square" lIns="0" tIns="0" rIns="0" bIns="0" anchor="t">
+          <a:prstGeom prst="rect">
+            <a:avLst/>
+          </a:prstGeom>
+          <a:noFill/>
+          <a:ln w="0">
+            <a:noFill/>
+            <a:prstDash val="solid"/>
+          </a:ln>
+        </p:spPr>
+        <p:txBody>
+          <a:bodyPr wrap="square" lIns="0" tIns="0" rIns="0" bIns="0" anchor="t">
             <a:normAutofit fontScale="98952"/>
           </a:bodyPr>
-          <a:lstStyle xmlns:a="http://schemas.openxmlformats.org/drawingml/2006/main"/>
-          <a:p xmlns:a="http://schemas.openxmlformats.org/drawingml/2006/main">
+          <a:lstStyle/>
+          <a:p>
             <a:pPr algn="l">
               <a:defRPr sz="1650" b="0">
                 <a:solidFill>
@@ -7605,6 +7496,9 @@
       </p:ext>
     </p:extLst>
   </p:cSld>
+  <p:clrMapOvr>
+    <a:masterClrMapping/>
+  </p:clrMapOvr>
 </p:sld>
 </file>
 
@@ -7850,5 +7744,254 @@
       </a:bgFillStyleLst>
     </a:fmtScheme>
   </a:themeElements>
+  <a:objectDefaults/>
+  <a:extraClrSchemeLst/>
+</a:theme>
+</file>
+
+<file path=ppt/theme/theme2.xml><?xml version="1.0" encoding="utf-8"?>
+<a:theme xmlns:a="http://schemas.openxmlformats.org/drawingml/2006/main" name="ChatGPT">
+  <a:themeElements>
+    <a:clrScheme name="ChatGPT">
+      <a:dk1>
+        <a:srgbClr val="000000"/>
+      </a:dk1>
+      <a:lt1>
+        <a:srgbClr val="FFFFFF"/>
+      </a:lt1>
+      <a:dk2>
+        <a:srgbClr val="0E2841"/>
+      </a:dk2>
+      <a:lt2>
+        <a:srgbClr val="E8E8E8"/>
+      </a:lt2>
+      <a:accent1>
+        <a:srgbClr val="156082"/>
+      </a:accent1>
+      <a:accent2>
+        <a:srgbClr val="E97132"/>
+      </a:accent2>
+      <a:accent3>
+        <a:srgbClr val="196B24"/>
+      </a:accent3>
+      <a:accent4>
+        <a:srgbClr val="0F9ED5"/>
+      </a:accent4>
+      <a:accent5>
+        <a:srgbClr val="A02B93"/>
+      </a:accent5>
+      <a:accent6>
+        <a:srgbClr val="4EA72E"/>
+      </a:accent6>
+      <a:hlink>
+        <a:srgbClr val="467886"/>
+      </a:hlink>
+      <a:folHlink>
+        <a:srgbClr val="96607D"/>
+      </a:folHlink>
+    </a:clrScheme>
+    <a:fontScheme name="Office">
+      <a:majorFont>
+        <a:latin typeface="Calibri Light"/>
+        <a:ea typeface="Calibri Light"/>
+        <a:cs typeface="Calibri Light"/>
+      </a:majorFont>
+      <a:minorFont>
+        <a:latin typeface="Calibri"/>
+        <a:ea typeface="Calibri"/>
+        <a:cs typeface="Calibri"/>
+      </a:minorFont>
+    </a:fontScheme>
+    <a:fmtScheme name="ChatGPT">
+      <a:fillStyleLst>
+        <a:solidFill>
+          <a:schemeClr val="phClr"/>
+        </a:solidFill>
+        <a:gradFill>
+          <a:gsLst>
+            <a:gs pos="0">
+              <a:schemeClr val="phClr">
+                <a:tint val="67000"/>
+                <a:lumMod val="110000"/>
+                <a:satMod val="105000"/>
+              </a:schemeClr>
+            </a:gs>
+            <a:gs pos="50000">
+              <a:schemeClr val="phClr">
+                <a:tint val="73000"/>
+                <a:lumMod val="105000"/>
+                <a:satMod val="103000"/>
+              </a:schemeClr>
+            </a:gs>
+            <a:gs pos="100000">
+              <a:schemeClr val="phClr">
+                <a:tint val="81000"/>
+                <a:lumMod val="105000"/>
+                <a:satMod val="109000"/>
+              </a:schemeClr>
+            </a:gs>
+          </a:gsLst>
+          <a:lin ang="5400000" scaled="0"/>
+        </a:gradFill>
+        <a:gradFill>
+          <a:gsLst>
+            <a:gs pos="0">
+              <a:schemeClr val="phClr">
+                <a:tint val="94000"/>
+                <a:lumMod val="102000"/>
+                <a:satMod val="103000"/>
+              </a:schemeClr>
+            </a:gs>
+            <a:gs pos="50000">
+              <a:schemeClr val="phClr">
+                <a:shade val="100000"/>
+                <a:lumMod val="100000"/>
+                <a:satMod val="110000"/>
+              </a:schemeClr>
+            </a:gs>
+            <a:gs pos="100000">
+              <a:schemeClr val="phClr">
+                <a:shade val="78000"/>
+                <a:lumMod val="99000"/>
+                <a:satMod val="120000"/>
+              </a:schemeClr>
+            </a:gs>
+          </a:gsLst>
+          <a:lin ang="5400000" scaled="0"/>
+        </a:gradFill>
+      </a:fillStyleLst>
+      <a:lnStyleLst>
+        <a:ln w="12700">
+          <a:solidFill>
+            <a:schemeClr val="phClr"/>
+          </a:solidFill>
+          <a:prstDash val="solid"/>
+        </a:ln>
+        <a:ln w="19050">
+          <a:solidFill>
+            <a:schemeClr val="phClr"/>
+          </a:solidFill>
+          <a:prstDash val="solid"/>
+        </a:ln>
+        <a:ln w="25400">
+          <a:solidFill>
+            <a:schemeClr val="phClr"/>
+          </a:solidFill>
+          <a:prstDash val="solid"/>
+        </a:ln>
+      </a:lnStyleLst>
+      <a:effectStyleLst>
+        <a:effectStyle>
+          <a:effectLst/>
+        </a:effectStyle>
+        <a:effectStyle>
+          <a:effectLst/>
+        </a:effectStyle>
+        <a:effectStyle>
+          <a:effectLst>
+            <a:outerShdw blurRad="57150" dist="19050" dir="5400000">
+              <a:srgbClr val="000000">
+                <a:alpha val="16000"/>
+              </a:srgbClr>
+            </a:outerShdw>
+          </a:effectLst>
+        </a:effectStyle>
+        <a:effectStyle>
+          <a:effectLst>
+            <a:outerShdw blurRad="19050" dist="9525" dir="5400000">
+              <a:srgbClr val="000000">
+                <a:alpha val="6000"/>
+              </a:srgbClr>
+            </a:outerShdw>
+          </a:effectLst>
+        </a:effectStyle>
+        <a:effectStyle>
+          <a:effectLst>
+            <a:outerShdw blurRad="28575" dist="9525" dir="5400000">
+              <a:srgbClr val="000000">
+                <a:alpha val="8000"/>
+              </a:srgbClr>
+            </a:outerShdw>
+          </a:effectLst>
+        </a:effectStyle>
+        <a:effectStyle>
+          <a:effectLst>
+            <a:outerShdw blurRad="57150" dist="19050" dir="5400000">
+              <a:srgbClr val="000000">
+                <a:alpha val="10000"/>
+              </a:srgbClr>
+            </a:outerShdw>
+          </a:effectLst>
+        </a:effectStyle>
+        <a:effectStyle>
+          <a:effectLst>
+            <a:outerShdw blurRad="114300" dist="38100" dir="5400000">
+              <a:srgbClr val="000000">
+                <a:alpha val="12000"/>
+              </a:srgbClr>
+            </a:outerShdw>
+          </a:effectLst>
+        </a:effectStyle>
+        <a:effectStyle>
+          <a:effectLst>
+            <a:outerShdw blurRad="171450" dist="57150" dir="5400000">
+              <a:srgbClr val="000000">
+                <a:alpha val="16000"/>
+              </a:srgbClr>
+            </a:outerShdw>
+          </a:effectLst>
+        </a:effectStyle>
+        <a:effectStyle>
+          <a:effectLst>
+            <a:outerShdw blurRad="266700" dist="95250" dir="5400000">
+              <a:srgbClr val="000000">
+                <a:alpha val="24000"/>
+              </a:srgbClr>
+            </a:outerShdw>
+          </a:effectLst>
+        </a:effectStyle>
+      </a:effectStyleLst>
+      <a:bgFillStyleLst>
+        <a:solidFill>
+          <a:schemeClr val="phClr"/>
+        </a:solidFill>
+        <a:solidFill>
+          <a:schemeClr val="phClr">
+            <a:tint val="95000"/>
+            <a:satMod val="170000"/>
+          </a:schemeClr>
+        </a:solidFill>
+        <a:gradFill>
+          <a:gsLst>
+            <a:gs pos="0">
+              <a:schemeClr val="phClr">
+                <a:tint val="93000"/>
+                <a:shade val="98000"/>
+                <a:lumMod val="102000"/>
+                <a:satMod val="150000"/>
+              </a:schemeClr>
+            </a:gs>
+            <a:gs pos="50000">
+              <a:schemeClr val="phClr">
+                <a:tint val="98000"/>
+                <a:shade val="90000"/>
+                <a:lumMod val="103000"/>
+                <a:satMod val="130000"/>
+              </a:schemeClr>
+            </a:gs>
+            <a:gs pos="100000">
+              <a:schemeClr val="phClr">
+                <a:shade val="63000"/>
+                <a:satMod val="120000"/>
+              </a:schemeClr>
+            </a:gs>
+          </a:gsLst>
+          <a:lin ang="5400000" scaled="0"/>
+        </a:gradFill>
+      </a:bgFillStyleLst>
+    </a:fmtScheme>
+  </a:themeElements>
+  <a:objectDefaults/>
+  <a:extraClrSchemeLst/>
 </a:theme>
 </file>